--- a/doc/gnss/M2-09_Escada_de_Precisao.pptx
+++ b/doc/gnss/M2-09_Escada_de_Precisao.pptx
@@ -24,6 +24,7 @@
     <p:sldId id="272" r:id="rId23"/>
     <p:sldId id="273" r:id="rId24"/>
     <p:sldId id="274" r:id="rId25"/>
+    <p:sldId id="275" r:id="rId26"/>
   </p:sldIdLst>
   <p:sldSz cx="12191695" cy="6858000" type="screen4x3"/>
   <p:notesSz cx="6858000" cy="9144000"/>
@@ -525,7 +526,22 @@
           </a:p>
           <a:p>
             <a:r>
+              <a:t>PointPerfect — Serviço PPP-RTK da u-blox: modelo SSR em SPARTN, entregue por IP (MQTT, ou NTRIP como base virtual em RTCM) ou por L-band (receptor NEO-D9S). Vale onde há cobertura; Manaus fora na data do curso.</a:t>
+            </a:r>
+          </a:p>
+          <a:p>
+            <a:r>
               <a:t>NTRIP — Networked Transport of RTCM via Internet Protocol: o transporte das correções por HTTP.</a:t>
+            </a:r>
+          </a:p>
+          <a:p>
+            <a:r>
+              <a:t>PPP — Precise Point Positioning: correção por órbitas e relógios precisos, sem base; converge em minutos.</a:t>
+            </a:r>
+          </a:p>
+          <a:p>
+            <a:r>
+              <a:t>PPP-RTK — PPP com correções de estado (SSR) que incluem atmosfera; converge em dezenas de segundos.</a:t>
             </a:r>
           </a:p>
           <a:p>
@@ -790,32 +806,62 @@
           </a:p>
           <a:p>
             <a:r>
-              <a:t>EVK — Evaluation Kit: a placa de avaliação da u-blox (EVK-X20P).</a:t>
-            </a:r>
-          </a:p>
-          <a:p>
-            <a:r>
-              <a:t>NTRIP — Networked Transport of RTCM via Internet Protocol: o transporte das correções por HTTP.</a:t>
-            </a:r>
-          </a:p>
-          <a:p>
-            <a:r>
               <a:t>RTCM — O formato binário das correções (RTCM 10403, 'RTCM 3'); as mensagens têm número (1005, 1074, 1230...).</a:t>
             </a:r>
           </a:p>
           <a:p>
             <a:r>
-              <a:t>SMA — O conector coaxial de antena da SMA-DK e do EVK.</a:t>
-            </a:r>
-          </a:p>
-          <a:p>
-            <a:r>
-              <a:t>DK — Development Kit: a placa de desenvolvimento (nRF54LM20-DK).</a:t>
+              <a:t>UART — Universal Asynchronous Receiver/Transmitter: a serial do console.</a:t>
+            </a:r>
+          </a:p>
+          <a:p>
+            <a:r>
+              <a:t>GGA — A sentença NMEA com posição, número de satélites, HDOP e a qualidade do fix (1 autônomo, 2 DGNSS, 4 RTK fixo, 5 RTK flutuante).</a:t>
             </a:r>
           </a:p>
           <a:p>
             <a:r>
               <a:t>NMEA — O protocolo de texto dos receptores GNSS (sentenças $GPGGA, $GPRMC...), NMEA 0183.</a:t>
+            </a:r>
+          </a:p>
+          <a:p>
+            <a:r>
+              <a:t>GPS — Global Positioning System: a constelação americana; o nRF9151 recebe só o sinal L1 C/A dela.</a:t>
+            </a:r>
+          </a:p>
+          <a:p>
+            <a:r>
+              <a:t>GLONASS — A constelação russa; usa FDMA em L1OF e L2OF, e por isso exige a mensagem 1230 ou 1033 no RTK.</a:t>
+            </a:r>
+          </a:p>
+          <a:p>
+            <a:r>
+              <a:t>Galileo — A constelação europeia (E1, E5a, E5b, E6).</a:t>
+            </a:r>
+          </a:p>
+          <a:p>
+            <a:r>
+              <a:t>BeiDou — A constelação chinesa (B1, B1C, B2a, B3I).</a:t>
+            </a:r>
+          </a:p>
+          <a:p>
+            <a:r>
+              <a:t>UBX — O protocolo binário dos receptores u-blox (UBX-NAV-PVT, UBX-RXM-COR...).</a:t>
+            </a:r>
+          </a:p>
+          <a:p>
+            <a:r>
+              <a:t>RAM — Random Access Memory: a memória de trabalho (511 KB no nRF54LM20).</a:t>
+            </a:r>
+          </a:p>
+          <a:p>
+            <a:r>
+              <a:t>MSM — Multiple Signal Message: as mensagens RTCM de observáveis por constelação (1074, 1084, 1094, 1124).</a:t>
+            </a:r>
+          </a:p>
+          <a:p>
+            <a:r>
+              <a:t>CEP — Circular Error Probable: o raio que contém uma fração das posições (CEP50 metade, CEP95 dezenove em vinte).</a:t>
             </a:r>
           </a:p>
         </p:txBody>
@@ -895,12 +941,12 @@
           </a:p>
           <a:p>
             <a:r>
-              <a:t>HPG — High Precision GNSS: a linha de firmware do ZED-X20P (HPG 2.02, 2.11).</a:t>
-            </a:r>
-          </a:p>
-          <a:p>
-            <a:r>
-              <a:t>UBX — O protocolo binário dos receptores u-blox (UBX-NAV-PVT, UBX-RXM-COR...).</a:t>
+              <a:t>NTRIP — Networked Transport of RTCM via Internet Protocol: o transporte das correções por HTTP.</a:t>
+            </a:r>
+          </a:p>
+          <a:p>
+            <a:r>
+              <a:t>RTCM — O formato binário das correções (RTCM 10403, 'RTCM 3'); as mensagens têm número (1005, 1074, 1230...).</a:t>
             </a:r>
           </a:p>
           <a:p>
@@ -915,32 +961,7 @@
           </a:p>
           <a:p>
             <a:r>
-              <a:t>CEP50 — O raio que contém metade das posições.</a:t>
-            </a:r>
-          </a:p>
-          <a:p>
-            <a:r>
-              <a:t>CEP95 — O raio que contém 95 por cento das posições.</a:t>
-            </a:r>
-          </a:p>
-          <a:p>
-            <a:r>
               <a:t>NMEA — O protocolo de texto dos receptores GNSS (sentenças $GPGGA, $GPRMC...), NMEA 0183.</a:t>
-            </a:r>
-          </a:p>
-          <a:p>
-            <a:r>
-              <a:t>DGNSS — Differential GNSS: correção de código contra uma base; decimétrico.</a:t>
-            </a:r>
-          </a:p>
-          <a:p>
-            <a:r>
-              <a:t>RTK — Real-Time Kinematic: correção por fase da portadora contra uma base próxima; centimétrico.</a:t>
-            </a:r>
-          </a:p>
-          <a:p>
-            <a:r>
-              <a:t>CEP — Circular Error Probable: o raio que contém uma fração das posições (CEP50 metade, CEP95 dezenove em vinte).</a:t>
             </a:r>
           </a:p>
         </p:txBody>
@@ -1015,22 +1036,57 @@
           </a:p>
           <a:p>
             <a:r>
+              <a:t>EVK — Evaluation Kit: a placa de avaliação da u-blox (EVK-X20P).</a:t>
+            </a:r>
+          </a:p>
+          <a:p>
+            <a:r>
+              <a:t>HPG — High Precision GNSS: a linha de firmware do ZED-X20P (HPG 2.02, 2.11).</a:t>
+            </a:r>
+          </a:p>
+          <a:p>
+            <a:r>
+              <a:t>UBX — O protocolo binário dos receptores u-blox (UBX-NAV-PVT, UBX-RXM-COR...).</a:t>
+            </a:r>
+          </a:p>
+          <a:p>
+            <a:r>
+              <a:t>SMA — O conector coaxial de antena da SMA-DK e do EVK.</a:t>
+            </a:r>
+          </a:p>
+          <a:p>
+            <a:r>
+              <a:t>DK — Development Kit: a placa de desenvolvimento (nRF54LM20-DK).</a:t>
+            </a:r>
+          </a:p>
+          <a:p>
+            <a:r>
+              <a:t>CEP50 — O raio que contém metade das posições.</a:t>
+            </a:r>
+          </a:p>
+          <a:p>
+            <a:r>
+              <a:t>CEP95 — O raio que contém 95 por cento das posições.</a:t>
+            </a:r>
+          </a:p>
+          <a:p>
+            <a:r>
+              <a:t>NMEA — O protocolo de texto dos receptores GNSS (sentenças $GPGGA, $GPRMC...), NMEA 0183.</a:t>
+            </a:r>
+          </a:p>
+          <a:p>
+            <a:r>
+              <a:t>DGNSS — Differential GNSS: correção de código contra uma base; decimétrico.</a:t>
+            </a:r>
+          </a:p>
+          <a:p>
+            <a:r>
               <a:t>RTK — Real-Time Kinematic: correção por fase da portadora contra uma base próxima; centimétrico.</a:t>
             </a:r>
           </a:p>
           <a:p>
             <a:r>
-              <a:t>MSM — Multiple Signal Message: as mensagens RTCM de observáveis por constelação (1074, 1084, 1094, 1124).</a:t>
-            </a:r>
-          </a:p>
-          <a:p>
-            <a:r>
-              <a:t>GLONASS — A constelação russa; usa FDMA em L1OF e L2OF, e por isso exige a mensagem 1230 ou 1033 no RTK.</a:t>
-            </a:r>
-          </a:p>
-          <a:p>
-            <a:r>
-              <a:t>UBX — O protocolo binário dos receptores u-blox (UBX-NAV-PVT, UBX-RXM-COR...).</a:t>
+              <a:t>CEP — Circular Error Probable: o raio que contém uma fração das posições (CEP50 metade, CEP95 dezenove em vinte).</a:t>
             </a:r>
           </a:p>
         </p:txBody>
@@ -1105,22 +1161,22 @@
           </a:p>
           <a:p>
             <a:r>
+              <a:t>RTK — Real-Time Kinematic: correção por fase da portadora contra uma base próxima; centimétrico.</a:t>
+            </a:r>
+          </a:p>
+          <a:p>
+            <a:r>
+              <a:t>MSM — Multiple Signal Message: as mensagens RTCM de observáveis por constelação (1074, 1084, 1094, 1124).</a:t>
+            </a:r>
+          </a:p>
+          <a:p>
+            <a:r>
+              <a:t>GLONASS — A constelação russa; usa FDMA em L1OF e L2OF, e por isso exige a mensagem 1230 ou 1033 no RTK.</a:t>
+            </a:r>
+          </a:p>
+          <a:p>
+            <a:r>
               <a:t>UBX — O protocolo binário dos receptores u-blox (UBX-NAV-PVT, UBX-RXM-COR...).</a:t>
-            </a:r>
-          </a:p>
-          <a:p>
-            <a:r>
-              <a:t>PVT — Position, Velocity, Time: a estrutura que o receptor entrega a cada época.</a:t>
-            </a:r>
-          </a:p>
-          <a:p>
-            <a:r>
-              <a:t>NMEA — O protocolo de texto dos receptores GNSS (sentenças $GPGGA, $GPRMC...), NMEA 0183.</a:t>
-            </a:r>
-          </a:p>
-          <a:p>
-            <a:r>
-              <a:t>GGA — A sentença NMEA com posição, número de satélites, HDOP e a qualidade do fix (1 autônomo, 2 DGNSS, 4 RTK fixo, 5 RTK flutuante).</a:t>
             </a:r>
           </a:p>
         </p:txBody>
@@ -1195,42 +1251,22 @@
           </a:p>
           <a:p>
             <a:r>
-              <a:t>SMA — O conector coaxial de antena da SMA-DK e do EVK.</a:t>
-            </a:r>
-          </a:p>
-          <a:p>
-            <a:r>
-              <a:t>DK — Development Kit: a placa de desenvolvimento (nRF54LM20-DK).</a:t>
-            </a:r>
-          </a:p>
-          <a:p>
-            <a:r>
-              <a:t>EVK — Evaluation Kit: a placa de avaliação da u-blox (EVK-X20P).</a:t>
-            </a:r>
-          </a:p>
-          <a:p>
-            <a:r>
-              <a:t>RF — Radiofrequência; chave de RF é o switch de antena entre BLE e Wi-Fi (ausente na EB II desta placa).</a:t>
-            </a:r>
-          </a:p>
-          <a:p>
-            <a:r>
-              <a:t>SPI — Serial Peripheral Interface: barramento serial de 4 fios entre o host e o nRF7002 (8 MHz na EB II).</a:t>
-            </a:r>
-          </a:p>
-          <a:p>
-            <a:r>
-              <a:t>UART — Universal Asynchronous Receiver/Transmitter: a serial do console.</a:t>
-            </a:r>
-          </a:p>
-          <a:p>
-            <a:r>
               <a:t>UBX — O protocolo binário dos receptores u-blox (UBX-NAV-PVT, UBX-RXM-COR...).</a:t>
             </a:r>
           </a:p>
           <a:p>
             <a:r>
-              <a:t>HPG — High Precision GNSS: a linha de firmware do ZED-X20P (HPG 2.02, 2.11).</a:t>
+              <a:t>PVT — Position, Velocity, Time: a estrutura que o receptor entrega a cada época.</a:t>
+            </a:r>
+          </a:p>
+          <a:p>
+            <a:r>
+              <a:t>NMEA — O protocolo de texto dos receptores GNSS (sentenças $GPGGA, $GPRMC...), NMEA 0183.</a:t>
+            </a:r>
+          </a:p>
+          <a:p>
+            <a:r>
+              <a:t>GGA — A sentença NMEA com posição, número de satélites, HDOP e a qualidade do fix (1 autônomo, 2 DGNSS, 4 RTK fixo, 5 RTK flutuante).</a:t>
             </a:r>
           </a:p>
         </p:txBody>
@@ -1305,6 +1341,116 @@
           </a:p>
           <a:p>
             <a:r>
+              <a:t>SMA — O conector coaxial de antena da SMA-DK e do EVK.</a:t>
+            </a:r>
+          </a:p>
+          <a:p>
+            <a:r>
+              <a:t>DK — Development Kit: a placa de desenvolvimento (nRF54LM20-DK).</a:t>
+            </a:r>
+          </a:p>
+          <a:p>
+            <a:r>
+              <a:t>EVK — Evaluation Kit: a placa de avaliação da u-blox (EVK-X20P).</a:t>
+            </a:r>
+          </a:p>
+          <a:p>
+            <a:r>
+              <a:t>RF — Radiofrequência; chave de RF é o switch de antena entre BLE e Wi-Fi (ausente na EB II desta placa).</a:t>
+            </a:r>
+          </a:p>
+          <a:p>
+            <a:r>
+              <a:t>SPI — Serial Peripheral Interface: barramento serial de 4 fios entre o host e o nRF7002 (8 MHz na EB II).</a:t>
+            </a:r>
+          </a:p>
+          <a:p>
+            <a:r>
+              <a:t>UART — Universal Asynchronous Receiver/Transmitter: a serial do console.</a:t>
+            </a:r>
+          </a:p>
+          <a:p>
+            <a:r>
+              <a:t>UBX — O protocolo binário dos receptores u-blox (UBX-NAV-PVT, UBX-RXM-COR...).</a:t>
+            </a:r>
+          </a:p>
+          <a:p>
+            <a:r>
+              <a:t>HPG — High Precision GNSS: a linha de firmware do ZED-X20P (HPG 2.02, 2.11).</a:t>
+            </a:r>
+          </a:p>
+        </p:txBody>
+      </p:sp>
+      <p:sp>
+        <p:nvSpPr>
+          <p:cNvPr id="4" name="Slide Number Placeholder 3"/>
+          <p:cNvSpPr>
+            <a:spLocks noGrp="1"/>
+          </p:cNvSpPr>
+          <p:nvPr>
+            <p:ph type="sldNum" idx="5" sz="quarter"/>
+          </p:nvPr>
+        </p:nvSpPr>
+        <p:spPr/>
+      </p:sp>
+    </p:spTree>
+  </p:cSld>
+  <p:clrMapOvr>
+    <a:masterClrMapping/>
+  </p:clrMapOvr>
+</p:notes>
+</file>
+
+<file path=ppt/notesSlides/notesSlide18.xml><?xml version="1.0" encoding="utf-8"?>
+<p:notes xmlns:a="http://schemas.openxmlformats.org/drawingml/2006/main" xmlns:p="http://schemas.openxmlformats.org/presentationml/2006/main" xmlns:r="http://schemas.openxmlformats.org/officeDocument/2006/relationships">
+  <p:cSld>
+    <p:spTree>
+      <p:nvGrpSpPr>
+        <p:cNvPr id="1" name=""/>
+        <p:cNvGrpSpPr/>
+        <p:nvPr/>
+      </p:nvGrpSpPr>
+      <p:grpSpPr>
+        <a:xfrm>
+          <a:off x="0" y="0"/>
+          <a:ext cx="0" cy="0"/>
+          <a:chOff x="0" y="0"/>
+          <a:chExt cx="0" cy="0"/>
+        </a:xfrm>
+      </p:grpSpPr>
+      <p:sp>
+        <p:nvSpPr>
+          <p:cNvPr id="2" name="Slide Image Placeholder 1"/>
+          <p:cNvSpPr>
+            <a:spLocks noGrp="1"/>
+          </p:cNvSpPr>
+          <p:nvPr>
+            <p:ph type="sldImg" idx="2"/>
+          </p:nvPr>
+        </p:nvSpPr>
+        <p:spPr/>
+      </p:sp>
+      <p:sp>
+        <p:nvSpPr>
+          <p:cNvPr id="3" name="Notes Placeholder 2"/>
+          <p:cNvSpPr>
+            <a:spLocks noGrp="1"/>
+          </p:cNvSpPr>
+          <p:nvPr>
+            <p:ph type="body" idx="3" sz="quarter"/>
+          </p:nvPr>
+        </p:nvSpPr>
+        <p:spPr/>
+        <p:txBody>
+          <a:bodyPr/>
+          <a:lstStyle/>
+          <a:p>
+            <a:r>
+              <a:t>Glossário deste slide:</a:t>
+            </a:r>
+          </a:p>
+          <a:p>
+            <a:r>
               <a:t>RTK — Real-Time Kinematic: correção por fase da portadora contra uma base próxima; centimétrico.</a:t>
             </a:r>
           </a:p>
@@ -1316,6 +1462,16 @@
           <a:p>
             <a:r>
               <a:t>SBAS — Satellite-Based Augmentation System: correção de área ampla difundida por satélite geoestacionário (WAAS, EGNOS).</a:t>
+            </a:r>
+          </a:p>
+          <a:p>
+            <a:r>
+              <a:t>PointPerfect — Serviço PPP-RTK da u-blox: modelo SSR em SPARTN, entregue por IP (MQTT, ou NTRIP como base virtual em RTCM) ou por L-band (receptor NEO-D9S). Vale onde há cobertura; Manaus fora na data do curso.</a:t>
+            </a:r>
+          </a:p>
+          <a:p>
+            <a:r>
+              <a:t>NTRIP — Networked Transport of RTCM via Internet Protocol: o transporte das correções por HTTP.</a:t>
             </a:r>
           </a:p>
           <a:p>
@@ -1765,6 +1921,16 @@
           </a:p>
           <a:p>
             <a:r>
+              <a:t>PointPerfect — Serviço PPP-RTK da u-blox: modelo SSR em SPARTN, entregue por IP (MQTT, ou NTRIP como base virtual em RTCM) ou por L-band (receptor NEO-D9S). Vale onde há cobertura; Manaus fora na data do curso.</a:t>
+            </a:r>
+          </a:p>
+          <a:p>
+            <a:r>
+              <a:t>NTRIP — Networked Transport of RTCM via Internet Protocol: o transporte das correções por HTTP.</a:t>
+            </a:r>
+          </a:p>
+          <a:p>
+            <a:r>
               <a:t>RTK — Real-Time Kinematic: correção por fase da portadora contra uma base próxima; centimétrico.</a:t>
             </a:r>
           </a:p>
@@ -1841,6 +2007,11 @@
           <a:p>
             <a:r>
               <a:t>RTK — Real-Time Kinematic: correção por fase da portadora contra uma base próxima; centimétrico.</a:t>
+            </a:r>
+          </a:p>
+          <a:p>
+            <a:r>
+              <a:t>PointPerfect — Serviço PPP-RTK da u-blox: modelo SSR em SPARTN, entregue por IP (MQTT, ou NTRIP como base virtual em RTCM) ou por L-band (receptor NEO-D9S). Vale onde há cobertura; Manaus fora na data do curso.</a:t>
             </a:r>
           </a:p>
           <a:p>
@@ -5201,7 +5372,7 @@
                 </a:solidFill>
                 <a:latin typeface="Segoe UI"/>
               </a:rPr>
-              <a:t>Os dois receptores no mesmo céu e nos mesmos minutos: janela obstruída, céu aberto, correção por rede (NTRIP) e RTK de base própria. Depois, as regras de medida por trás de cada número, e a demo com as cinco falhas de RTK. </a:t>
+              <a:t>Os dois receptores no mesmo céu e nos mesmos minutos: janela obstruída, céu aberto, PointPerfect por NTRIP (PPP-RTK) e RTK de base própria. Depois, as regras de medida por trás de cada número, e a demo com as cinco falhas de RTK. </a:t>
             </a:r>
             <a:r>
               <a:rPr sz="1600" b="1" i="0">
@@ -8328,7 +8499,7 @@
                 </a:solidFill>
                 <a:latin typeface="Segoe UI"/>
               </a:rPr>
-              <a:t>A montagem</a:t>
+              <a:t>Configurar base e rover: o que muda</a:t>
             </a:r>
           </a:p>
         </p:txBody>
@@ -8466,17 +8637,58 @@
       </p:sp>
       <p:sp>
         <p:nvSpPr>
-          <p:cNvPr id="8" name="Oval 7"/>
+          <p:cNvPr id="8" name="TextBox 7"/>
+          <p:cNvSpPr txBox="1"/>
+          <p:nvPr/>
+        </p:nvSpPr>
+        <p:spPr>
+          <a:xfrm>
+            <a:off x="713232" y="1225296"/>
+            <a:ext cx="10765231" cy="548640"/>
+          </a:xfrm>
+          <a:prstGeom prst="rect">
+            <a:avLst/>
+          </a:prstGeom>
+          <a:noFill/>
+        </p:spPr>
+        <p:txBody>
+          <a:bodyPr wrap="square" anchor="t" lIns="0" rIns="0" tIns="0" bIns="0">
+            <a:spAutoFit/>
+          </a:bodyPr>
+          <a:lstStyle/>
+          <a:p>
+            <a:pPr algn="l">
+              <a:lnSpc>
+                <a:spcPct val="125000"/>
+              </a:lnSpc>
+            </a:pPr>
+            <a:r>
+              <a:rPr sz="1400" b="0" i="0">
+                <a:solidFill>
+                  <a:srgbClr val="566577"/>
+                </a:solidFill>
+                <a:latin typeface="Segoe UI"/>
+              </a:rPr>
+              <a:t>A base precisa saber onde está e emitir o que mede; o rover só precisa aceitar RTCM na UART, e isso já vem de fábrica. Toda configuração do X20P é um par chave-valor numa camada; o u-center 2 faz o mesmo por trás dos menus.</a:t>
+            </a:r>
+          </a:p>
+        </p:txBody>
+      </p:sp>
+      <p:sp>
+        <p:nvSpPr>
+          <p:cNvPr id="9" name="Rounded Rectangle 8"/>
           <p:cNvSpPr/>
           <p:nvPr/>
         </p:nvSpPr>
         <p:spPr>
           <a:xfrm>
-            <a:off x="1604772" y="1691640"/>
-            <a:ext cx="548640" cy="548640"/>
-          </a:xfrm>
-          <a:prstGeom prst="ellipse">
-            <a:avLst/>
+            <a:off x="713232" y="1929384"/>
+            <a:ext cx="3063240" cy="2743200"/>
+          </a:xfrm>
+          <a:prstGeom prst="roundRect">
+            <a:avLst>
+              <a:gd name="adj" fmla="val 7000"/>
+            </a:avLst>
           </a:prstGeom>
           <a:solidFill>
             <a:srgbClr val="00224E"/>
@@ -8510,14 +8722,14 @@
       </p:sp>
       <p:sp>
         <p:nvSpPr>
-          <p:cNvPr id="9" name="TextBox 8"/>
+          <p:cNvPr id="10" name="TextBox 9"/>
           <p:cNvSpPr txBox="1"/>
           <p:nvPr/>
         </p:nvSpPr>
         <p:spPr>
           <a:xfrm>
-            <a:off x="804672" y="2258568"/>
-            <a:ext cx="2148840" cy="274320"/>
+            <a:off x="896112" y="2020824"/>
+            <a:ext cx="2697480" cy="320040"/>
           </a:xfrm>
           <a:prstGeom prst="rect">
             <a:avLst/>
@@ -8530,75 +8742,346 @@
           </a:bodyPr>
           <a:lstStyle/>
           <a:p>
-            <a:pPr algn="ctr">
+            <a:pPr algn="l">
               <a:lnSpc>
                 <a:spcPct val="100000"/>
               </a:lnSpc>
             </a:pPr>
             <a:r>
-              <a:rPr sz="1000" b="1" i="0">
-                <a:solidFill>
-                  <a:srgbClr val="0B1B2B"/>
-                </a:solidFill>
-                <a:latin typeface="Segoe UI"/>
-              </a:rPr>
-              <a:t>antena A</a:t>
-            </a:r>
-          </a:p>
-        </p:txBody>
-      </p:sp>
-      <p:cxnSp>
-        <p:nvCxnSpPr>
-          <p:cNvPr id="10" name="Connector 9"/>
-          <p:cNvCxnSpPr/>
-          <p:nvPr/>
-        </p:nvCxnSpPr>
-        <p:spPr>
-          <a:xfrm>
-            <a:off x="1879092" y="2240280"/>
-            <a:ext cx="0" cy="411480"/>
-          </a:xfrm>
-          <a:prstGeom prst="line">
-            <a:avLst/>
-          </a:prstGeom>
-          <a:ln w="19050">
+              <a:rPr sz="1250" b="1" i="0">
+                <a:solidFill>
+                  <a:srgbClr val="FFFFFF"/>
+                </a:solidFill>
+                <a:latin typeface="Segoe UI"/>
+              </a:rPr>
+              <a:t>BASE: duas coisas a ligar</a:t>
+            </a:r>
+          </a:p>
+        </p:txBody>
+      </p:sp>
+      <p:sp>
+        <p:nvSpPr>
+          <p:cNvPr id="11" name="TextBox 10"/>
+          <p:cNvSpPr txBox="1"/>
+          <p:nvPr/>
+        </p:nvSpPr>
+        <p:spPr>
+          <a:xfrm>
+            <a:off x="896112" y="2432304"/>
+            <a:ext cx="2697480" cy="2194560"/>
+          </a:xfrm>
+          <a:prstGeom prst="rect">
+            <a:avLst/>
+          </a:prstGeom>
+          <a:noFill/>
+        </p:spPr>
+        <p:txBody>
+          <a:bodyPr wrap="square" anchor="t" lIns="0" rIns="0" tIns="0" bIns="0">
+            <a:spAutoFit/>
+          </a:bodyPr>
+          <a:lstStyle/>
+          <a:p>
+            <a:pPr algn="l">
+              <a:lnSpc>
+                <a:spcPct val="115000"/>
+              </a:lnSpc>
+            </a:pPr>
+            <a:r>
+              <a:rPr sz="950" b="1" i="0">
+                <a:solidFill>
+                  <a:srgbClr val="FFFFFF"/>
+                </a:solidFill>
+                <a:latin typeface="Segoe UI"/>
+              </a:rPr>
+              <a:t>1. Saber onde está.</a:t>
+            </a:r>
+            <a:r>
+              <a:rPr sz="950" b="0" i="0">
+                <a:solidFill>
+                  <a:srgbClr val="E8F1F8"/>
+                </a:solidFill>
+                <a:latin typeface="Segoe UI"/>
+              </a:rPr>
+              <a:t> Modo estação (</a:t>
+            </a:r>
+            <a:r>
+              <a:rPr sz="950" b="0" i="0">
+                <a:solidFill>
+                  <a:srgbClr val="E8F1F8"/>
+                </a:solidFill>
+                <a:latin typeface="Consolas"/>
+              </a:rPr>
+              <a:t>CFG-TMODE-MODE</a:t>
+            </a:r>
+            <a:r>
+              <a:rPr sz="950" b="0" i="0">
+                <a:solidFill>
+                  <a:srgbClr val="E8F1F8"/>
+                </a:solidFill>
+                <a:latin typeface="Segoe UI"/>
+              </a:rPr>
+              <a:t>): survey-in descobre a posição sozinho (encerra em 60 s e 5 m) ou fixed recebe a coordenada conhecida.</a:t>
+            </a:r>
+          </a:p>
+          <a:p>
+            <a:pPr algn="l">
+              <a:lnSpc>
+                <a:spcPct val="115000"/>
+              </a:lnSpc>
+            </a:pPr>
+            <a:r>
+              <a:rPr sz="950" b="1" i="0">
+                <a:solidFill>
+                  <a:srgbClr val="FFFFFF"/>
+                </a:solidFill>
+                <a:latin typeface="Segoe UI"/>
+              </a:rPr>
+              <a:t>2. Emitir o que mede.</a:t>
+            </a:r>
+            <a:r>
+              <a:rPr sz="950" b="0" i="0">
+                <a:solidFill>
+                  <a:srgbClr val="E8F1F8"/>
+                </a:solidFill>
+                <a:latin typeface="Segoe UI"/>
+              </a:rPr>
+              <a:t> Saída RTCM na UART (</a:t>
+            </a:r>
+            <a:r>
+              <a:rPr sz="950" b="0" i="0">
+                <a:solidFill>
+                  <a:srgbClr val="E8F1F8"/>
+                </a:solidFill>
+                <a:latin typeface="Consolas"/>
+              </a:rPr>
+              <a:t>CFG-MSGOUT-RTCM_3X_*</a:t>
+            </a:r>
+            <a:r>
+              <a:rPr sz="950" b="0" i="0">
+                <a:solidFill>
+                  <a:srgbClr val="E8F1F8"/>
+                </a:solidFill>
+                <a:latin typeface="Segoe UI"/>
+              </a:rPr>
+              <a:t>): as três mensagens ao lado, uma vez por época.</a:t>
+            </a:r>
+          </a:p>
+        </p:txBody>
+      </p:sp>
+      <p:sp>
+        <p:nvSpPr>
+          <p:cNvPr id="12" name="Rounded Rectangle 11"/>
+          <p:cNvSpPr/>
+          <p:nvPr/>
+        </p:nvSpPr>
+        <p:spPr>
+          <a:xfrm>
+            <a:off x="8415223" y="1929384"/>
+            <a:ext cx="3063240" cy="2743200"/>
+          </a:xfrm>
+          <a:prstGeom prst="roundRect">
+            <a:avLst>
+              <a:gd name="adj" fmla="val 7000"/>
+            </a:avLst>
+          </a:prstGeom>
+          <a:solidFill>
+            <a:srgbClr val="E1F0FA"/>
+          </a:solidFill>
+          <a:ln w="12700">
             <a:solidFill>
-              <a:srgbClr val="566577"/>
+              <a:srgbClr val="0093D0"/>
             </a:solidFill>
-            <a:tailEnd type="triangle" w="med" len="med"/>
           </a:ln>
+          <a:effectLst/>
         </p:spPr>
         <p:style>
-          <a:lnRef idx="2">
+          <a:lnRef idx="1">
             <a:schemeClr val="accent1"/>
           </a:lnRef>
-          <a:fillRef idx="0">
+          <a:fillRef idx="3">
             <a:schemeClr val="accent1"/>
           </a:fillRef>
-          <a:effectRef idx="1">
+          <a:effectRef idx="2">
             <a:schemeClr val="accent1"/>
           </a:effectRef>
           <a:fontRef idx="minor">
-            <a:schemeClr val="tx1"/>
+            <a:schemeClr val="lt1"/>
           </a:fontRef>
         </p:style>
-      </p:cxnSp>
-      <p:sp>
-        <p:nvSpPr>
-          <p:cNvPr id="11" name="Oval 10"/>
+        <p:txBody>
+          <a:bodyPr rtlCol="0" anchor="ctr"/>
+          <a:lstStyle/>
+          <a:p>
+            <a:pPr algn="ctr"/>
+          </a:p>
+        </p:txBody>
+      </p:sp>
+      <p:sp>
+        <p:nvSpPr>
+          <p:cNvPr id="13" name="TextBox 12"/>
+          <p:cNvSpPr txBox="1"/>
+          <p:nvPr/>
+        </p:nvSpPr>
+        <p:spPr>
+          <a:xfrm>
+            <a:off x="8598103" y="2020824"/>
+            <a:ext cx="2697480" cy="320040"/>
+          </a:xfrm>
+          <a:prstGeom prst="rect">
+            <a:avLst/>
+          </a:prstGeom>
+          <a:noFill/>
+        </p:spPr>
+        <p:txBody>
+          <a:bodyPr wrap="square" anchor="t" lIns="0" rIns="0" tIns="0" bIns="0">
+            <a:spAutoFit/>
+          </a:bodyPr>
+          <a:lstStyle/>
+          <a:p>
+            <a:pPr algn="l">
+              <a:lnSpc>
+                <a:spcPct val="100000"/>
+              </a:lnSpc>
+            </a:pPr>
+            <a:r>
+              <a:rPr sz="1250" b="1" i="0">
+                <a:solidFill>
+                  <a:srgbClr val="00224E"/>
+                </a:solidFill>
+                <a:latin typeface="Segoe UI"/>
+              </a:rPr>
+              <a:t>ROVER: quase nada</a:t>
+            </a:r>
+          </a:p>
+        </p:txBody>
+      </p:sp>
+      <p:sp>
+        <p:nvSpPr>
+          <p:cNvPr id="14" name="TextBox 13"/>
+          <p:cNvSpPr txBox="1"/>
+          <p:nvPr/>
+        </p:nvSpPr>
+        <p:spPr>
+          <a:xfrm>
+            <a:off x="8598103" y="2432304"/>
+            <a:ext cx="2697480" cy="2194560"/>
+          </a:xfrm>
+          <a:prstGeom prst="rect">
+            <a:avLst/>
+          </a:prstGeom>
+          <a:noFill/>
+        </p:spPr>
+        <p:txBody>
+          <a:bodyPr wrap="square" anchor="t" lIns="0" rIns="0" tIns="0" bIns="0">
+            <a:spAutoFit/>
+          </a:bodyPr>
+          <a:lstStyle/>
+          <a:p>
+            <a:pPr algn="l">
+              <a:lnSpc>
+                <a:spcPct val="115000"/>
+              </a:lnSpc>
+            </a:pPr>
+            <a:r>
+              <a:rPr sz="950" b="1" i="0">
+                <a:solidFill>
+                  <a:srgbClr val="00224E"/>
+                </a:solidFill>
+                <a:latin typeface="Segoe UI"/>
+              </a:rPr>
+              <a:t>Aceitar RTCM na UART</a:t>
+            </a:r>
+            <a:r>
+              <a:rPr sz="950" b="0" i="0">
+                <a:solidFill>
+                  <a:srgbClr val="0B1B2B"/>
+                </a:solidFill>
+                <a:latin typeface="Segoe UI"/>
+              </a:rPr>
+              <a:t> (</a:t>
+            </a:r>
+            <a:r>
+              <a:rPr sz="950" b="0" i="0">
+                <a:solidFill>
+                  <a:srgbClr val="0B1B2B"/>
+                </a:solidFill>
+                <a:latin typeface="Consolas"/>
+              </a:rPr>
+              <a:t>CFG-UARTxINPROT-RTCM3X</a:t>
+            </a:r>
+            <a:r>
+              <a:rPr sz="950" b="0" i="0">
+                <a:solidFill>
+                  <a:srgbClr val="0B1B2B"/>
+                </a:solidFill>
+                <a:latin typeface="Segoe UI"/>
+              </a:rPr>
+              <a:t>): já vem ligado de fábrica. Um rover no padrão fixa sem nenhuma configuração.</a:t>
+            </a:r>
+          </a:p>
+          <a:p>
+            <a:pPr algn="l">
+              <a:lnSpc>
+                <a:spcPct val="115000"/>
+              </a:lnSpc>
+            </a:pPr>
+            <a:r>
+              <a:rPr sz="950" b="1" i="0">
+                <a:solidFill>
+                  <a:srgbClr val="00224E"/>
+                </a:solidFill>
+                <a:latin typeface="Segoe UI"/>
+              </a:rPr>
+              <a:t>Opcional: GGA de alta precisão</a:t>
+            </a:r>
+            <a:r>
+              <a:rPr sz="950" b="0" i="0">
+                <a:solidFill>
+                  <a:srgbClr val="0B1B2B"/>
+                </a:solidFill>
+                <a:latin typeface="Segoe UI"/>
+              </a:rPr>
+              <a:t> (</a:t>
+            </a:r>
+            <a:r>
+              <a:rPr sz="950" b="0" i="0">
+                <a:solidFill>
+                  <a:srgbClr val="0B1B2B"/>
+                </a:solidFill>
+                <a:latin typeface="Consolas"/>
+              </a:rPr>
+              <a:t>CFG-NMEA-HIGHPREC</a:t>
+            </a:r>
+            <a:r>
+              <a:rPr sz="950" b="0" i="0">
+                <a:solidFill>
+                  <a:srgbClr val="0B1B2B"/>
+                </a:solidFill>
+                <a:latin typeface="Segoe UI"/>
+              </a:rPr>
+              <a:t>): 7 casas de minuto. Sem ela a posição sai em degraus de ~1,85 cm e o mapa de desvio do fixo fica falso.</a:t>
+            </a:r>
+          </a:p>
+        </p:txBody>
+      </p:sp>
+      <p:sp>
+        <p:nvSpPr>
+          <p:cNvPr id="15" name="Rounded Rectangle 14"/>
           <p:cNvSpPr/>
           <p:nvPr/>
         </p:nvSpPr>
         <p:spPr>
           <a:xfrm>
-            <a:off x="7731252" y="1691640"/>
-            <a:ext cx="548640" cy="548640"/>
-          </a:xfrm>
-          <a:prstGeom prst="ellipse">
-            <a:avLst/>
+            <a:off x="3913632" y="1929384"/>
+            <a:ext cx="4364431" cy="853440"/>
+          </a:xfrm>
+          <a:prstGeom prst="roundRect">
+            <a:avLst>
+              <a:gd name="adj" fmla="val 7000"/>
+            </a:avLst>
           </a:prstGeom>
           <a:solidFill>
-            <a:srgbClr val="0093D0"/>
+            <a:srgbClr val="EDF3F8"/>
           </a:solidFill>
           <a:ln>
             <a:noFill/>
@@ -8627,164 +9110,6 @@
           </a:p>
         </p:txBody>
       </p:sp>
-      <p:sp>
-        <p:nvSpPr>
-          <p:cNvPr id="12" name="TextBox 11"/>
-          <p:cNvSpPr txBox="1"/>
-          <p:nvPr/>
-        </p:nvSpPr>
-        <p:spPr>
-          <a:xfrm>
-            <a:off x="6931152" y="2258568"/>
-            <a:ext cx="2148840" cy="274320"/>
-          </a:xfrm>
-          <a:prstGeom prst="rect">
-            <a:avLst/>
-          </a:prstGeom>
-          <a:noFill/>
-        </p:spPr>
-        <p:txBody>
-          <a:bodyPr wrap="square" anchor="t" lIns="0" rIns="0" tIns="0" bIns="0">
-            <a:spAutoFit/>
-          </a:bodyPr>
-          <a:lstStyle/>
-          <a:p>
-            <a:pPr algn="ctr">
-              <a:lnSpc>
-                <a:spcPct val="100000"/>
-              </a:lnSpc>
-            </a:pPr>
-            <a:r>
-              <a:rPr sz="1000" b="1" i="0">
-                <a:solidFill>
-                  <a:srgbClr val="0B1B2B"/>
-                </a:solidFill>
-                <a:latin typeface="Segoe UI"/>
-              </a:rPr>
-              <a:t>antena B</a:t>
-            </a:r>
-          </a:p>
-        </p:txBody>
-      </p:sp>
-      <p:cxnSp>
-        <p:nvCxnSpPr>
-          <p:cNvPr id="13" name="Connector 12"/>
-          <p:cNvCxnSpPr/>
-          <p:nvPr/>
-        </p:nvCxnSpPr>
-        <p:spPr>
-          <a:xfrm>
-            <a:off x="8005572" y="2240280"/>
-            <a:ext cx="0" cy="411480"/>
-          </a:xfrm>
-          <a:prstGeom prst="line">
-            <a:avLst/>
-          </a:prstGeom>
-          <a:ln w="19050">
-            <a:solidFill>
-              <a:srgbClr val="566577"/>
-            </a:solidFill>
-            <a:tailEnd type="triangle" w="med" len="med"/>
-          </a:ln>
-        </p:spPr>
-        <p:style>
-          <a:lnRef idx="2">
-            <a:schemeClr val="accent1"/>
-          </a:lnRef>
-          <a:fillRef idx="0">
-            <a:schemeClr val="accent1"/>
-          </a:fillRef>
-          <a:effectRef idx="1">
-            <a:schemeClr val="accent1"/>
-          </a:effectRef>
-          <a:fontRef idx="minor">
-            <a:schemeClr val="tx1"/>
-          </a:fontRef>
-        </p:style>
-      </p:cxnSp>
-      <p:sp>
-        <p:nvSpPr>
-          <p:cNvPr id="14" name="Oval 13"/>
-          <p:cNvSpPr/>
-          <p:nvPr/>
-        </p:nvSpPr>
-        <p:spPr>
-          <a:xfrm>
-            <a:off x="10062972" y="1691640"/>
-            <a:ext cx="548640" cy="548640"/>
-          </a:xfrm>
-          <a:prstGeom prst="ellipse">
-            <a:avLst/>
-          </a:prstGeom>
-          <a:solidFill>
-            <a:srgbClr val="0093D0"/>
-          </a:solidFill>
-          <a:ln>
-            <a:noFill/>
-          </a:ln>
-          <a:effectLst/>
-        </p:spPr>
-        <p:style>
-          <a:lnRef idx="1">
-            <a:schemeClr val="accent1"/>
-          </a:lnRef>
-          <a:fillRef idx="3">
-            <a:schemeClr val="accent1"/>
-          </a:fillRef>
-          <a:effectRef idx="2">
-            <a:schemeClr val="accent1"/>
-          </a:effectRef>
-          <a:fontRef idx="minor">
-            <a:schemeClr val="lt1"/>
-          </a:fontRef>
-        </p:style>
-        <p:txBody>
-          <a:bodyPr rtlCol="0" anchor="ctr"/>
-          <a:lstStyle/>
-          <a:p>
-            <a:pPr algn="ctr"/>
-          </a:p>
-        </p:txBody>
-      </p:sp>
-      <p:sp>
-        <p:nvSpPr>
-          <p:cNvPr id="15" name="TextBox 14"/>
-          <p:cNvSpPr txBox="1"/>
-          <p:nvPr/>
-        </p:nvSpPr>
-        <p:spPr>
-          <a:xfrm>
-            <a:off x="9262872" y="2258568"/>
-            <a:ext cx="2148840" cy="274320"/>
-          </a:xfrm>
-          <a:prstGeom prst="rect">
-            <a:avLst/>
-          </a:prstGeom>
-          <a:noFill/>
-        </p:spPr>
-        <p:txBody>
-          <a:bodyPr wrap="square" anchor="t" lIns="0" rIns="0" tIns="0" bIns="0">
-            <a:spAutoFit/>
-          </a:bodyPr>
-          <a:lstStyle/>
-          <a:p>
-            <a:pPr algn="ctr">
-              <a:lnSpc>
-                <a:spcPct val="100000"/>
-              </a:lnSpc>
-            </a:pPr>
-            <a:r>
-              <a:rPr sz="1000" b="1" i="0">
-                <a:solidFill>
-                  <a:srgbClr val="0B1B2B"/>
-                </a:solidFill>
-                <a:latin typeface="Segoe UI"/>
-              </a:rPr>
-              <a:t>antena C</a:t>
-            </a:r>
-          </a:p>
-        </p:txBody>
-      </p:sp>
       <p:cxnSp>
         <p:nvCxnSpPr>
           <p:cNvPr id="16" name="Connector 15"/>
@@ -8793,799 +9118,8 @@
         </p:nvCxnSpPr>
         <p:spPr>
           <a:xfrm>
-            <a:off x="10337292" y="2240280"/>
-            <a:ext cx="0" cy="411480"/>
-          </a:xfrm>
-          <a:prstGeom prst="line">
-            <a:avLst/>
-          </a:prstGeom>
-          <a:ln w="19050">
-            <a:solidFill>
-              <a:srgbClr val="566577"/>
-            </a:solidFill>
-            <a:tailEnd type="triangle" w="med" len="med"/>
-          </a:ln>
-        </p:spPr>
-        <p:style>
-          <a:lnRef idx="2">
-            <a:schemeClr val="accent1"/>
-          </a:lnRef>
-          <a:fillRef idx="0">
-            <a:schemeClr val="accent1"/>
-          </a:fillRef>
-          <a:effectRef idx="1">
-            <a:schemeClr val="accent1"/>
-          </a:effectRef>
-          <a:fontRef idx="minor">
-            <a:schemeClr val="tx1"/>
-          </a:fontRef>
-        </p:style>
-      </p:cxnSp>
-      <p:sp>
-        <p:nvSpPr>
-          <p:cNvPr id="17" name="Rounded Rectangle 16"/>
-          <p:cNvSpPr/>
-          <p:nvPr/>
-        </p:nvSpPr>
-        <p:spPr>
-          <a:xfrm>
-            <a:off x="804672" y="2651760"/>
-            <a:ext cx="2148840" cy="1188720"/>
-          </a:xfrm>
-          <a:prstGeom prst="roundRect">
-            <a:avLst>
-              <a:gd name="adj" fmla="val 7000"/>
-            </a:avLst>
-          </a:prstGeom>
-          <a:solidFill>
-            <a:srgbClr val="00224E"/>
-          </a:solidFill>
-          <a:ln>
-            <a:noFill/>
-          </a:ln>
-          <a:effectLst/>
-        </p:spPr>
-        <p:style>
-          <a:lnRef idx="1">
-            <a:schemeClr val="accent1"/>
-          </a:lnRef>
-          <a:fillRef idx="3">
-            <a:schemeClr val="accent1"/>
-          </a:fillRef>
-          <a:effectRef idx="2">
-            <a:schemeClr val="accent1"/>
-          </a:effectRef>
-          <a:fontRef idx="minor">
-            <a:schemeClr val="lt1"/>
-          </a:fontRef>
-        </p:style>
-        <p:txBody>
-          <a:bodyPr rtlCol="0" anchor="ctr"/>
-          <a:lstStyle/>
-          <a:p>
-            <a:pPr algn="ctr"/>
-          </a:p>
-        </p:txBody>
-      </p:sp>
-      <p:sp>
-        <p:nvSpPr>
-          <p:cNvPr id="18" name="TextBox 17"/>
-          <p:cNvSpPr txBox="1"/>
-          <p:nvPr/>
-        </p:nvSpPr>
-        <p:spPr>
-          <a:xfrm>
-            <a:off x="969264" y="2761488"/>
-            <a:ext cx="1819656" cy="292608"/>
-          </a:xfrm>
-          <a:prstGeom prst="rect">
-            <a:avLst/>
-          </a:prstGeom>
-          <a:noFill/>
-        </p:spPr>
-        <p:txBody>
-          <a:bodyPr wrap="square" anchor="t" lIns="0" rIns="0" tIns="0" bIns="0">
-            <a:spAutoFit/>
-          </a:bodyPr>
-          <a:lstStyle/>
-          <a:p>
-            <a:pPr algn="l">
-              <a:lnSpc>
-                <a:spcPct val="100000"/>
-              </a:lnSpc>
-            </a:pPr>
-            <a:r>
-              <a:rPr sz="1150" b="1" i="0">
-                <a:solidFill>
-                  <a:srgbClr val="E8F1F8"/>
-                </a:solidFill>
-                <a:latin typeface="Segoe UI"/>
-              </a:rPr>
-              <a:t>EVK-X20P · base</a:t>
-            </a:r>
-          </a:p>
-        </p:txBody>
-      </p:sp>
-      <p:sp>
-        <p:nvSpPr>
-          <p:cNvPr id="19" name="TextBox 18"/>
-          <p:cNvSpPr txBox="1"/>
-          <p:nvPr/>
-        </p:nvSpPr>
-        <p:spPr>
-          <a:xfrm>
-            <a:off x="969264" y="3090672"/>
-            <a:ext cx="1819656" cy="685800"/>
-          </a:xfrm>
-          <a:prstGeom prst="rect">
-            <a:avLst/>
-          </a:prstGeom>
-          <a:noFill/>
-        </p:spPr>
-        <p:txBody>
-          <a:bodyPr wrap="square" anchor="t" lIns="0" rIns="0" tIns="0" bIns="0">
-            <a:spAutoFit/>
-          </a:bodyPr>
-          <a:lstStyle/>
-          <a:p>
-            <a:pPr algn="l">
-              <a:lnSpc>
-                <a:spcPct val="115000"/>
-              </a:lnSpc>
-            </a:pPr>
-            <a:r>
-              <a:rPr sz="900" b="0" i="0">
-                <a:solidFill>
-                  <a:srgbClr val="93A6B8"/>
-                </a:solidFill>
-                <a:latin typeface="Segoe UI"/>
-              </a:rPr>
-              <a:t>Survey-In </a:t>
-            </a:r>
-            <a:r>
-              <a:rPr sz="900" b="1" i="0">
-                <a:solidFill>
-                  <a:srgbClr val="E8F1F8"/>
-                </a:solidFill>
-                <a:latin typeface="Segoe UI"/>
-              </a:rPr>
-              <a:t>uma vez</a:t>
-            </a:r>
-            <a:r>
-              <a:rPr sz="900" b="0" i="0">
-                <a:solidFill>
-                  <a:srgbClr val="93A6B8"/>
-                </a:solidFill>
-                <a:latin typeface="Segoe UI"/>
-              </a:rPr>
-              <a:t>, na montagem</a:t>
-            </a:r>
-          </a:p>
-          <a:p>
-            <a:pPr algn="l">
-              <a:lnSpc>
-                <a:spcPct val="115000"/>
-              </a:lnSpc>
-            </a:pPr>
-            <a:r>
-              <a:rPr sz="900" b="0" i="0">
-                <a:solidFill>
-                  <a:srgbClr val="93A6B8"/>
-                </a:solidFill>
-                <a:latin typeface="Segoe UI"/>
-              </a:rPr>
-              <a:t>gravado </a:t>
-            </a:r>
-            <a:r>
-              <a:rPr sz="900" b="0" i="0">
-                <a:solidFill>
-                  <a:srgbClr val="93A6B8"/>
-                </a:solidFill>
-                <a:latin typeface="Consolas"/>
-              </a:rPr>
-              <a:t>CFG-TMODE = FIXED</a:t>
-            </a:r>
-          </a:p>
-          <a:p>
-            <a:pPr algn="l">
-              <a:lnSpc>
-                <a:spcPct val="115000"/>
-              </a:lnSpc>
-            </a:pPr>
-            <a:r>
-              <a:rPr sz="900" b="0" i="0">
-                <a:solidFill>
-                  <a:srgbClr val="93A6B8"/>
-                </a:solidFill>
-                <a:latin typeface="Segoe UI"/>
-              </a:rPr>
-              <a:t>emite 1005 · 1074 · 1084</a:t>
-            </a:r>
-          </a:p>
-          <a:p>
-            <a:pPr algn="l">
-              <a:lnSpc>
-                <a:spcPct val="115000"/>
-              </a:lnSpc>
-            </a:pPr>
-            <a:r>
-              <a:rPr sz="900" b="0" i="0">
-                <a:solidFill>
-                  <a:srgbClr val="93A6B8"/>
-                </a:solidFill>
-                <a:latin typeface="Segoe UI"/>
-              </a:rPr>
-              <a:t>1094 · 1124 · 1230 (MSM4)</a:t>
-            </a:r>
-          </a:p>
-        </p:txBody>
-      </p:sp>
-      <p:sp>
-        <p:nvSpPr>
-          <p:cNvPr id="20" name="Rounded Rectangle 19"/>
-          <p:cNvSpPr/>
-          <p:nvPr/>
-        </p:nvSpPr>
-        <p:spPr>
-          <a:xfrm>
-            <a:off x="3867912" y="2651760"/>
-            <a:ext cx="2148840" cy="1188720"/>
-          </a:xfrm>
-          <a:prstGeom prst="roundRect">
-            <a:avLst>
-              <a:gd name="adj" fmla="val 7000"/>
-            </a:avLst>
-          </a:prstGeom>
-          <a:solidFill>
-            <a:srgbClr val="EDF3F8"/>
-          </a:solidFill>
-          <a:ln w="12700">
-            <a:solidFill>
-              <a:srgbClr val="D3E0EB"/>
-            </a:solidFill>
-          </a:ln>
-          <a:effectLst/>
-        </p:spPr>
-        <p:style>
-          <a:lnRef idx="1">
-            <a:schemeClr val="accent1"/>
-          </a:lnRef>
-          <a:fillRef idx="3">
-            <a:schemeClr val="accent1"/>
-          </a:fillRef>
-          <a:effectRef idx="2">
-            <a:schemeClr val="accent1"/>
-          </a:effectRef>
-          <a:fontRef idx="minor">
-            <a:schemeClr val="lt1"/>
-          </a:fontRef>
-        </p:style>
-        <p:txBody>
-          <a:bodyPr rtlCol="0" anchor="ctr"/>
-          <a:lstStyle/>
-          <a:p>
-            <a:pPr algn="ctr"/>
-          </a:p>
-        </p:txBody>
-      </p:sp>
-      <p:sp>
-        <p:nvSpPr>
-          <p:cNvPr id="21" name="TextBox 20"/>
-          <p:cNvSpPr txBox="1"/>
-          <p:nvPr/>
-        </p:nvSpPr>
-        <p:spPr>
-          <a:xfrm>
-            <a:off x="4032504" y="2761488"/>
-            <a:ext cx="1819656" cy="292608"/>
-          </a:xfrm>
-          <a:prstGeom prst="rect">
-            <a:avLst/>
-          </a:prstGeom>
-          <a:noFill/>
-        </p:spPr>
-        <p:txBody>
-          <a:bodyPr wrap="square" anchor="t" lIns="0" rIns="0" tIns="0" bIns="0">
-            <a:spAutoFit/>
-          </a:bodyPr>
-          <a:lstStyle/>
-          <a:p>
-            <a:pPr algn="l">
-              <a:lnSpc>
-                <a:spcPct val="100000"/>
-              </a:lnSpc>
-            </a:pPr>
-            <a:r>
-              <a:rPr sz="1150" b="1" i="0">
-                <a:solidFill>
-                  <a:srgbClr val="0B1B2B"/>
-                </a:solidFill>
-                <a:latin typeface="Segoe UI"/>
-              </a:rPr>
-              <a:t>notebook · u-center 2</a:t>
-            </a:r>
-          </a:p>
-        </p:txBody>
-      </p:sp>
-      <p:sp>
-        <p:nvSpPr>
-          <p:cNvPr id="22" name="TextBox 21"/>
-          <p:cNvSpPr txBox="1"/>
-          <p:nvPr/>
-        </p:nvSpPr>
-        <p:spPr>
-          <a:xfrm>
-            <a:off x="4032504" y="3090672"/>
-            <a:ext cx="1819656" cy="685800"/>
-          </a:xfrm>
-          <a:prstGeom prst="rect">
-            <a:avLst/>
-          </a:prstGeom>
-          <a:noFill/>
-        </p:spPr>
-        <p:txBody>
-          <a:bodyPr wrap="square" anchor="t" lIns="0" rIns="0" tIns="0" bIns="0">
-            <a:spAutoFit/>
-          </a:bodyPr>
-          <a:lstStyle/>
-          <a:p>
-            <a:pPr algn="l">
-              <a:lnSpc>
-                <a:spcPct val="115000"/>
-              </a:lnSpc>
-            </a:pPr>
-            <a:r>
-              <a:rPr sz="900" b="0" i="0">
-                <a:solidFill>
-                  <a:srgbClr val="566577"/>
-                </a:solidFill>
-                <a:latin typeface="Segoe UI"/>
-              </a:rPr>
-              <a:t>caster NTRIP embutido</a:t>
-            </a:r>
-          </a:p>
-          <a:p>
-            <a:pPr algn="l">
-              <a:lnSpc>
-                <a:spcPct val="115000"/>
-              </a:lnSpc>
-            </a:pPr>
-            <a:r>
-              <a:rPr sz="900" b="0" i="0">
-                <a:solidFill>
-                  <a:srgbClr val="566577"/>
-                </a:solidFill>
-                <a:latin typeface="Segoe UI"/>
-              </a:rPr>
-              <a:t>(porta liberada no firewall)</a:t>
-            </a:r>
-          </a:p>
-          <a:p>
-            <a:pPr algn="l">
-              <a:lnSpc>
-                <a:spcPct val="115000"/>
-              </a:lnSpc>
-            </a:pPr>
-            <a:r>
-              <a:rPr sz="900" b="0" i="0">
-                <a:solidFill>
-                  <a:srgbClr val="566577"/>
-                </a:solidFill>
-                <a:latin typeface="Segoe UI"/>
-              </a:rPr>
-              <a:t>rede local, </a:t>
-            </a:r>
-            <a:r>
-              <a:rPr sz="900" b="1" i="0">
-                <a:solidFill>
-                  <a:srgbClr val="0B1B2B"/>
-                </a:solidFill>
-                <a:latin typeface="Segoe UI"/>
-              </a:rPr>
-              <a:t>sem internet</a:t>
-            </a:r>
-          </a:p>
-        </p:txBody>
-      </p:sp>
-      <p:sp>
-        <p:nvSpPr>
-          <p:cNvPr id="23" name="Rounded Rectangle 22"/>
-          <p:cNvSpPr/>
-          <p:nvPr/>
-        </p:nvSpPr>
-        <p:spPr>
-          <a:xfrm>
-            <a:off x="6931152" y="2651760"/>
-            <a:ext cx="2148840" cy="1188720"/>
-          </a:xfrm>
-          <a:prstGeom prst="roundRect">
-            <a:avLst>
-              <a:gd name="adj" fmla="val 7000"/>
-            </a:avLst>
-          </a:prstGeom>
-          <a:solidFill>
-            <a:srgbClr val="00224E"/>
-          </a:solidFill>
-          <a:ln>
-            <a:noFill/>
-          </a:ln>
-          <a:effectLst/>
-        </p:spPr>
-        <p:style>
-          <a:lnRef idx="1">
-            <a:schemeClr val="accent1"/>
-          </a:lnRef>
-          <a:fillRef idx="3">
-            <a:schemeClr val="accent1"/>
-          </a:fillRef>
-          <a:effectRef idx="2">
-            <a:schemeClr val="accent1"/>
-          </a:effectRef>
-          <a:fontRef idx="minor">
-            <a:schemeClr val="lt1"/>
-          </a:fontRef>
-        </p:style>
-        <p:txBody>
-          <a:bodyPr rtlCol="0" anchor="ctr"/>
-          <a:lstStyle/>
-          <a:p>
-            <a:pPr algn="ctr"/>
-          </a:p>
-        </p:txBody>
-      </p:sp>
-      <p:sp>
-        <p:nvSpPr>
-          <p:cNvPr id="24" name="TextBox 23"/>
-          <p:cNvSpPr txBox="1"/>
-          <p:nvPr/>
-        </p:nvSpPr>
-        <p:spPr>
-          <a:xfrm>
-            <a:off x="7095744" y="2761488"/>
-            <a:ext cx="1819656" cy="292608"/>
-          </a:xfrm>
-          <a:prstGeom prst="rect">
-            <a:avLst/>
-          </a:prstGeom>
-          <a:noFill/>
-        </p:spPr>
-        <p:txBody>
-          <a:bodyPr wrap="square" anchor="t" lIns="0" rIns="0" tIns="0" bIns="0">
-            <a:spAutoFit/>
-          </a:bodyPr>
-          <a:lstStyle/>
-          <a:p>
-            <a:pPr algn="l">
-              <a:lnSpc>
-                <a:spcPct val="100000"/>
-              </a:lnSpc>
-            </a:pPr>
-            <a:r>
-              <a:rPr sz="1150" b="1" i="0">
-                <a:solidFill>
-                  <a:srgbClr val="E8F1F8"/>
-                </a:solidFill>
-                <a:latin typeface="Segoe UI"/>
-              </a:rPr>
-              <a:t>EVK-X20P · rover</a:t>
-            </a:r>
-          </a:p>
-        </p:txBody>
-      </p:sp>
-      <p:sp>
-        <p:nvSpPr>
-          <p:cNvPr id="25" name="TextBox 24"/>
-          <p:cNvSpPr txBox="1"/>
-          <p:nvPr/>
-        </p:nvSpPr>
-        <p:spPr>
-          <a:xfrm>
-            <a:off x="7095744" y="3090672"/>
-            <a:ext cx="1819656" cy="685800"/>
-          </a:xfrm>
-          <a:prstGeom prst="rect">
-            <a:avLst/>
-          </a:prstGeom>
-          <a:noFill/>
-        </p:spPr>
-        <p:txBody>
-          <a:bodyPr wrap="square" anchor="t" lIns="0" rIns="0" tIns="0" bIns="0">
-            <a:spAutoFit/>
-          </a:bodyPr>
-          <a:lstStyle/>
-          <a:p>
-            <a:pPr algn="l">
-              <a:lnSpc>
-                <a:spcPct val="115000"/>
-              </a:lnSpc>
-            </a:pPr>
-            <a:r>
-              <a:rPr sz="900" b="0" i="0">
-                <a:solidFill>
-                  <a:srgbClr val="93A6B8"/>
-                </a:solidFill>
-                <a:latin typeface="Segoe UI"/>
-              </a:rPr>
-              <a:t>degrau 2: autônomo</a:t>
-            </a:r>
-          </a:p>
-          <a:p>
-            <a:pPr algn="l">
-              <a:lnSpc>
-                <a:spcPct val="115000"/>
-              </a:lnSpc>
-            </a:pPr>
-            <a:r>
-              <a:rPr sz="900" b="0" i="0">
-                <a:solidFill>
-                  <a:srgbClr val="93A6B8"/>
-                </a:solidFill>
-                <a:latin typeface="Segoe UI"/>
-              </a:rPr>
-              <a:t>degrau 3: cliente NTRIP no</a:t>
-            </a:r>
-          </a:p>
-          <a:p>
-            <a:pPr algn="l">
-              <a:lnSpc>
-                <a:spcPct val="115000"/>
-              </a:lnSpc>
-            </a:pPr>
-            <a:r>
-              <a:rPr sz="900" b="0" i="0">
-                <a:solidFill>
-                  <a:srgbClr val="93A6B8"/>
-                </a:solidFill>
-                <a:latin typeface="Segoe UI"/>
-              </a:rPr>
-              <a:t>u-center 2, RTCM pela serial</a:t>
-            </a:r>
-          </a:p>
-        </p:txBody>
-      </p:sp>
-      <p:sp>
-        <p:nvSpPr>
-          <p:cNvPr id="26" name="Rounded Rectangle 25"/>
-          <p:cNvSpPr/>
-          <p:nvPr/>
-        </p:nvSpPr>
-        <p:spPr>
-          <a:xfrm>
-            <a:off x="9262872" y="2651760"/>
-            <a:ext cx="2148840" cy="1188720"/>
-          </a:xfrm>
-          <a:prstGeom prst="roundRect">
-            <a:avLst>
-              <a:gd name="adj" fmla="val 7000"/>
-            </a:avLst>
-          </a:prstGeom>
-          <a:solidFill>
-            <a:srgbClr val="EDF3F8"/>
-          </a:solidFill>
-          <a:ln w="12700">
-            <a:solidFill>
-              <a:srgbClr val="D3E0EB"/>
-            </a:solidFill>
-          </a:ln>
-          <a:effectLst/>
-        </p:spPr>
-        <p:style>
-          <a:lnRef idx="1">
-            <a:schemeClr val="accent1"/>
-          </a:lnRef>
-          <a:fillRef idx="3">
-            <a:schemeClr val="accent1"/>
-          </a:fillRef>
-          <a:effectRef idx="2">
-            <a:schemeClr val="accent1"/>
-          </a:effectRef>
-          <a:fontRef idx="minor">
-            <a:schemeClr val="lt1"/>
-          </a:fontRef>
-        </p:style>
-        <p:txBody>
-          <a:bodyPr rtlCol="0" anchor="ctr"/>
-          <a:lstStyle/>
-          <a:p>
-            <a:pPr algn="ctr"/>
-          </a:p>
-        </p:txBody>
-      </p:sp>
-      <p:sp>
-        <p:nvSpPr>
-          <p:cNvPr id="27" name="TextBox 26"/>
-          <p:cNvSpPr txBox="1"/>
-          <p:nvPr/>
-        </p:nvSpPr>
-        <p:spPr>
-          <a:xfrm>
-            <a:off x="9427464" y="2761488"/>
-            <a:ext cx="1819656" cy="292608"/>
-          </a:xfrm>
-          <a:prstGeom prst="rect">
-            <a:avLst/>
-          </a:prstGeom>
-          <a:noFill/>
-        </p:spPr>
-        <p:txBody>
-          <a:bodyPr wrap="square" anchor="t" lIns="0" rIns="0" tIns="0" bIns="0">
-            <a:spAutoFit/>
-          </a:bodyPr>
-          <a:lstStyle/>
-          <a:p>
-            <a:pPr algn="l">
-              <a:lnSpc>
-                <a:spcPct val="100000"/>
-              </a:lnSpc>
-            </a:pPr>
-            <a:r>
-              <a:rPr sz="1150" b="1" i="0">
-                <a:solidFill>
-                  <a:srgbClr val="0B1B2B"/>
-                </a:solidFill>
-                <a:latin typeface="Segoe UI"/>
-              </a:rPr>
-              <a:t>nRF9151 SMA-DK</a:t>
-            </a:r>
-          </a:p>
-        </p:txBody>
-      </p:sp>
-      <p:sp>
-        <p:nvSpPr>
-          <p:cNvPr id="28" name="TextBox 27"/>
-          <p:cNvSpPr txBox="1"/>
-          <p:nvPr/>
-        </p:nvSpPr>
-        <p:spPr>
-          <a:xfrm>
-            <a:off x="9427464" y="3090672"/>
-            <a:ext cx="1819656" cy="685800"/>
-          </a:xfrm>
-          <a:prstGeom prst="rect">
-            <a:avLst/>
-          </a:prstGeom>
-          <a:noFill/>
-        </p:spPr>
-        <p:txBody>
-          <a:bodyPr wrap="square" anchor="t" lIns="0" rIns="0" tIns="0" bIns="0">
-            <a:spAutoFit/>
-          </a:bodyPr>
-          <a:lstStyle/>
-          <a:p>
-            <a:pPr algn="l">
-              <a:lnSpc>
-                <a:spcPct val="115000"/>
-              </a:lnSpc>
-            </a:pPr>
-            <a:r>
-              <a:rPr sz="900" b="0" i="0">
-                <a:solidFill>
-                  <a:srgbClr val="566577"/>
-                </a:solidFill>
-                <a:latin typeface="Segoe UI"/>
-              </a:rPr>
-              <a:t>degrau 1: firmware do lab 3</a:t>
-            </a:r>
-          </a:p>
-          <a:p>
-            <a:pPr algn="l">
-              <a:lnSpc>
-                <a:spcPct val="115000"/>
-              </a:lnSpc>
-            </a:pPr>
-            <a:r>
-              <a:rPr sz="900" b="0" i="0">
-                <a:solidFill>
-                  <a:srgbClr val="566577"/>
-                </a:solidFill>
-                <a:latin typeface="Segoe UI"/>
-              </a:rPr>
-              <a:t>(NMEA limpo) capturado por</a:t>
-            </a:r>
-          </a:p>
-          <a:p>
-            <a:pPr algn="l">
-              <a:lnSpc>
-                <a:spcPct val="115000"/>
-              </a:lnSpc>
-            </a:pPr>
-            <a:r>
-              <a:rPr sz="900" b="0" i="0">
-                <a:solidFill>
-                  <a:srgbClr val="566577"/>
-                </a:solidFill>
-                <a:latin typeface="Consolas"/>
-              </a:rPr>
-              <a:t>nmea_captura.py</a:t>
-            </a:r>
-          </a:p>
-        </p:txBody>
-      </p:sp>
-      <p:cxnSp>
-        <p:nvCxnSpPr>
-          <p:cNvPr id="29" name="Connector 28"/>
-          <p:cNvCxnSpPr/>
-          <p:nvPr/>
-        </p:nvCxnSpPr>
-        <p:spPr>
-          <a:xfrm>
-            <a:off x="2953512" y="3246120"/>
-            <a:ext cx="914400" cy="0"/>
-          </a:xfrm>
-          <a:prstGeom prst="line">
-            <a:avLst/>
-          </a:prstGeom>
-          <a:ln w="25400">
-            <a:solidFill>
-              <a:srgbClr val="0093D0"/>
-            </a:solidFill>
-            <a:tailEnd type="triangle" w="med" len="med"/>
-          </a:ln>
-        </p:spPr>
-        <p:style>
-          <a:lnRef idx="2">
-            <a:schemeClr val="accent1"/>
-          </a:lnRef>
-          <a:fillRef idx="0">
-            <a:schemeClr val="accent1"/>
-          </a:fillRef>
-          <a:effectRef idx="1">
-            <a:schemeClr val="accent1"/>
-          </a:effectRef>
-          <a:fontRef idx="minor">
-            <a:schemeClr val="tx1"/>
-          </a:fontRef>
-        </p:style>
-      </p:cxnSp>
-      <p:sp>
-        <p:nvSpPr>
-          <p:cNvPr id="30" name="TextBox 29"/>
-          <p:cNvSpPr txBox="1"/>
-          <p:nvPr/>
-        </p:nvSpPr>
-        <p:spPr>
-          <a:xfrm>
-            <a:off x="2862072" y="2862072"/>
-            <a:ext cx="1188720" cy="237744"/>
-          </a:xfrm>
-          <a:prstGeom prst="rect">
-            <a:avLst/>
-          </a:prstGeom>
-          <a:noFill/>
-        </p:spPr>
-        <p:txBody>
-          <a:bodyPr wrap="square" anchor="t" lIns="0" rIns="0" tIns="0" bIns="0">
-            <a:spAutoFit/>
-          </a:bodyPr>
-          <a:lstStyle/>
-          <a:p>
-            <a:pPr algn="ctr">
-              <a:lnSpc>
-                <a:spcPct val="100000"/>
-              </a:lnSpc>
-            </a:pPr>
-            <a:r>
-              <a:rPr sz="900" b="1" i="0">
-                <a:solidFill>
-                  <a:srgbClr val="0093D0"/>
-                </a:solidFill>
-                <a:latin typeface="Segoe UI"/>
-              </a:rPr>
-              <a:t>RTCM3, serial</a:t>
-            </a:r>
-          </a:p>
-        </p:txBody>
-      </p:sp>
-      <p:cxnSp>
-        <p:nvCxnSpPr>
-          <p:cNvPr id="31" name="Connector 30"/>
-          <p:cNvCxnSpPr/>
-          <p:nvPr/>
-        </p:nvCxnSpPr>
-        <p:spPr>
-          <a:xfrm>
-            <a:off x="6016752" y="3246120"/>
-            <a:ext cx="914400" cy="0"/>
+            <a:off x="3776472" y="2356104"/>
+            <a:ext cx="155448" cy="0"/>
           </a:xfrm>
           <a:prstGeom prst="line">
             <a:avLst/>
@@ -9595,80 +9129,6 @@
               <a:srgbClr val="1FA971"/>
             </a:solidFill>
             <a:tailEnd type="triangle" w="med" len="med"/>
-          </a:ln>
-        </p:spPr>
-        <p:style>
-          <a:lnRef idx="2">
-            <a:schemeClr val="accent1"/>
-          </a:lnRef>
-          <a:fillRef idx="0">
-            <a:schemeClr val="accent1"/>
-          </a:fillRef>
-          <a:effectRef idx="1">
-            <a:schemeClr val="accent1"/>
-          </a:effectRef>
-          <a:fontRef idx="minor">
-            <a:schemeClr val="tx1"/>
-          </a:fontRef>
-        </p:style>
-      </p:cxnSp>
-      <p:sp>
-        <p:nvSpPr>
-          <p:cNvPr id="32" name="TextBox 31"/>
-          <p:cNvSpPr txBox="1"/>
-          <p:nvPr/>
-        </p:nvSpPr>
-        <p:spPr>
-          <a:xfrm>
-            <a:off x="5925312" y="2862072"/>
-            <a:ext cx="1188720" cy="237744"/>
-          </a:xfrm>
-          <a:prstGeom prst="rect">
-            <a:avLst/>
-          </a:prstGeom>
-          <a:noFill/>
-        </p:spPr>
-        <p:txBody>
-          <a:bodyPr wrap="square" anchor="t" lIns="0" rIns="0" tIns="0" bIns="0">
-            <a:spAutoFit/>
-          </a:bodyPr>
-          <a:lstStyle/>
-          <a:p>
-            <a:pPr algn="ctr">
-              <a:lnSpc>
-                <a:spcPct val="100000"/>
-              </a:lnSpc>
-            </a:pPr>
-            <a:r>
-              <a:rPr sz="900" b="1" i="0">
-                <a:solidFill>
-                  <a:srgbClr val="1FA971"/>
-                </a:solidFill>
-                <a:latin typeface="Segoe UI"/>
-              </a:rPr>
-              <a:t>rede local</a:t>
-            </a:r>
-          </a:p>
-        </p:txBody>
-      </p:sp>
-      <p:cxnSp>
-        <p:nvCxnSpPr>
-          <p:cNvPr id="33" name="Connector 32"/>
-          <p:cNvCxnSpPr/>
-          <p:nvPr/>
-        </p:nvCxnSpPr>
-        <p:spPr>
-          <a:xfrm>
-            <a:off x="6931152" y="4069080"/>
-            <a:ext cx="4480560" cy="0"/>
-          </a:xfrm>
-          <a:prstGeom prst="line">
-            <a:avLst/>
-          </a:prstGeom>
-          <a:ln w="15875">
-            <a:solidFill>
-              <a:srgbClr val="566577"/>
-            </a:solidFill>
           </a:ln>
         </p:spPr>
         <p:style>
@@ -9688,22 +9148,199 @@
       </p:cxnSp>
       <p:cxnSp>
         <p:nvCxnSpPr>
-          <p:cNvPr id="34" name="Connector 33"/>
+          <p:cNvPr id="17" name="Connector 16"/>
           <p:cNvCxnSpPr/>
           <p:nvPr/>
         </p:nvCxnSpPr>
         <p:spPr>
           <a:xfrm>
-            <a:off x="6931152" y="4069080"/>
-            <a:ext cx="0" cy="109728"/>
+            <a:off x="8259775" y="2356104"/>
+            <a:ext cx="155448" cy="0"/>
           </a:xfrm>
           <a:prstGeom prst="line">
             <a:avLst/>
           </a:prstGeom>
-          <a:ln w="15875">
+          <a:ln w="25400">
             <a:solidFill>
-              <a:srgbClr val="566577"/>
+              <a:srgbClr val="1FA971"/>
             </a:solidFill>
+            <a:tailEnd type="triangle" w="med" len="med"/>
+          </a:ln>
+        </p:spPr>
+        <p:style>
+          <a:lnRef idx="2">
+            <a:schemeClr val="accent1"/>
+          </a:lnRef>
+          <a:fillRef idx="0">
+            <a:schemeClr val="accent1"/>
+          </a:fillRef>
+          <a:effectRef idx="1">
+            <a:schemeClr val="accent1"/>
+          </a:effectRef>
+          <a:fontRef idx="minor">
+            <a:schemeClr val="tx1"/>
+          </a:fontRef>
+        </p:style>
+      </p:cxnSp>
+      <p:sp>
+        <p:nvSpPr>
+          <p:cNvPr id="18" name="TextBox 17"/>
+          <p:cNvSpPr txBox="1"/>
+          <p:nvPr/>
+        </p:nvSpPr>
+        <p:spPr>
+          <a:xfrm>
+            <a:off x="4050792" y="1965960"/>
+            <a:ext cx="4090111" cy="274320"/>
+          </a:xfrm>
+          <a:prstGeom prst="rect">
+            <a:avLst/>
+          </a:prstGeom>
+          <a:noFill/>
+        </p:spPr>
+        <p:txBody>
+          <a:bodyPr wrap="square" anchor="t" lIns="0" rIns="0" tIns="0" bIns="0">
+            <a:spAutoFit/>
+          </a:bodyPr>
+          <a:lstStyle/>
+          <a:p>
+            <a:pPr algn="l">
+              <a:lnSpc>
+                <a:spcPct val="100000"/>
+              </a:lnSpc>
+            </a:pPr>
+            <a:r>
+              <a:rPr sz="1050" b="1" i="0">
+                <a:solidFill>
+                  <a:srgbClr val="1FA971"/>
+                </a:solidFill>
+                <a:latin typeface="Consolas"/>
+              </a:rPr>
+              <a:t>1006</a:t>
+            </a:r>
+          </a:p>
+        </p:txBody>
+      </p:sp>
+      <p:sp>
+        <p:nvSpPr>
+          <p:cNvPr id="19" name="TextBox 18"/>
+          <p:cNvSpPr txBox="1"/>
+          <p:nvPr/>
+        </p:nvSpPr>
+        <p:spPr>
+          <a:xfrm>
+            <a:off x="4050792" y="2203704"/>
+            <a:ext cx="4090111" cy="560832"/>
+          </a:xfrm>
+          <a:prstGeom prst="rect">
+            <a:avLst/>
+          </a:prstGeom>
+          <a:noFill/>
+        </p:spPr>
+        <p:txBody>
+          <a:bodyPr wrap="square" anchor="t" lIns="0" rIns="0" tIns="0" bIns="0">
+            <a:spAutoFit/>
+          </a:bodyPr>
+          <a:lstStyle/>
+          <a:p>
+            <a:pPr algn="l">
+              <a:lnSpc>
+                <a:spcPct val="105000"/>
+              </a:lnSpc>
+            </a:pPr>
+            <a:r>
+              <a:rPr sz="880" b="1" i="0">
+                <a:solidFill>
+                  <a:srgbClr val="0B1B2B"/>
+                </a:solidFill>
+                <a:latin typeface="Segoe UI"/>
+              </a:rPr>
+              <a:t>onde a antena da base está</a:t>
+            </a:r>
+          </a:p>
+          <a:p>
+            <a:pPr algn="l">
+              <a:lnSpc>
+                <a:spcPct val="105000"/>
+              </a:lnSpc>
+            </a:pPr>
+            <a:r>
+              <a:rPr sz="880" b="0" i="0">
+                <a:solidFill>
+                  <a:srgbClr val="0B1B2B"/>
+                </a:solidFill>
+                <a:latin typeface="Segoe UI"/>
+              </a:rPr>
+              <a:t>sem ela o rover não tem referência e não computa posição (falha A)</a:t>
+            </a:r>
+          </a:p>
+        </p:txBody>
+      </p:sp>
+      <p:sp>
+        <p:nvSpPr>
+          <p:cNvPr id="20" name="Rounded Rectangle 19"/>
+          <p:cNvSpPr/>
+          <p:nvPr/>
+        </p:nvSpPr>
+        <p:spPr>
+          <a:xfrm>
+            <a:off x="3913632" y="2874264"/>
+            <a:ext cx="4364431" cy="853440"/>
+          </a:xfrm>
+          <a:prstGeom prst="roundRect">
+            <a:avLst>
+              <a:gd name="adj" fmla="val 7000"/>
+            </a:avLst>
+          </a:prstGeom>
+          <a:solidFill>
+            <a:srgbClr val="EDF3F8"/>
+          </a:solidFill>
+          <a:ln>
+            <a:noFill/>
+          </a:ln>
+          <a:effectLst/>
+        </p:spPr>
+        <p:style>
+          <a:lnRef idx="1">
+            <a:schemeClr val="accent1"/>
+          </a:lnRef>
+          <a:fillRef idx="3">
+            <a:schemeClr val="accent1"/>
+          </a:fillRef>
+          <a:effectRef idx="2">
+            <a:schemeClr val="accent1"/>
+          </a:effectRef>
+          <a:fontRef idx="minor">
+            <a:schemeClr val="lt1"/>
+          </a:fontRef>
+        </p:style>
+        <p:txBody>
+          <a:bodyPr rtlCol="0" anchor="ctr"/>
+          <a:lstStyle/>
+          <a:p>
+            <a:pPr algn="ctr"/>
+          </a:p>
+        </p:txBody>
+      </p:sp>
+      <p:cxnSp>
+        <p:nvCxnSpPr>
+          <p:cNvPr id="21" name="Connector 20"/>
+          <p:cNvCxnSpPr/>
+          <p:nvPr/>
+        </p:nvCxnSpPr>
+        <p:spPr>
+          <a:xfrm>
+            <a:off x="3776472" y="3300984"/>
+            <a:ext cx="155448" cy="0"/>
+          </a:xfrm>
+          <a:prstGeom prst="line">
+            <a:avLst/>
+          </a:prstGeom>
+          <a:ln w="25400">
+            <a:solidFill>
+              <a:srgbClr val="1FA971"/>
+            </a:solidFill>
+            <a:tailEnd type="triangle" w="med" len="med"/>
           </a:ln>
         </p:spPr>
         <p:style>
@@ -9723,22 +9360,23 @@
       </p:cxnSp>
       <p:cxnSp>
         <p:nvCxnSpPr>
-          <p:cNvPr id="35" name="Connector 34"/>
+          <p:cNvPr id="22" name="Connector 21"/>
           <p:cNvCxnSpPr/>
           <p:nvPr/>
         </p:nvCxnSpPr>
         <p:spPr>
           <a:xfrm>
-            <a:off x="11411712" y="4069080"/>
-            <a:ext cx="0" cy="109728"/>
+            <a:off x="8259775" y="3300984"/>
+            <a:ext cx="155448" cy="0"/>
           </a:xfrm>
           <a:prstGeom prst="line">
             <a:avLst/>
           </a:prstGeom>
-          <a:ln w="15875">
+          <a:ln w="25400">
             <a:solidFill>
-              <a:srgbClr val="566577"/>
+              <a:srgbClr val="1FA971"/>
             </a:solidFill>
+            <a:tailEnd type="triangle" w="med" len="med"/>
           </a:ln>
         </p:spPr>
         <p:style>
@@ -9758,14 +9396,14 @@
       </p:cxnSp>
       <p:sp>
         <p:nvSpPr>
-          <p:cNvPr id="36" name="TextBox 35"/>
+          <p:cNvPr id="23" name="TextBox 22"/>
           <p:cNvSpPr txBox="1"/>
           <p:nvPr/>
         </p:nvSpPr>
         <p:spPr>
           <a:xfrm>
-            <a:off x="6931152" y="3794760"/>
-            <a:ext cx="4480560" cy="256032"/>
+            <a:off x="4050792" y="2910840"/>
+            <a:ext cx="4090111" cy="274320"/>
           </a:xfrm>
           <a:prstGeom prst="rect">
             <a:avLst/>
@@ -9778,24 +9416,33 @@
           </a:bodyPr>
           <a:lstStyle/>
           <a:p>
-            <a:pPr algn="ctr">
+            <a:pPr algn="l">
               <a:lnSpc>
                 <a:spcPct val="100000"/>
               </a:lnSpc>
             </a:pPr>
-          </a:p>
-        </p:txBody>
-      </p:sp>
-      <p:sp>
-        <p:nvSpPr>
-          <p:cNvPr id="37" name="TextBox 36"/>
+            <a:r>
+              <a:rPr sz="1050" b="1" i="0">
+                <a:solidFill>
+                  <a:srgbClr val="1FA971"/>
+                </a:solidFill>
+                <a:latin typeface="Consolas"/>
+              </a:rPr>
+              <a:t>1074 · 1084 · 1094 · 1124</a:t>
+            </a:r>
+          </a:p>
+        </p:txBody>
+      </p:sp>
+      <p:sp>
+        <p:nvSpPr>
+          <p:cNvPr id="24" name="TextBox 23"/>
           <p:cNvSpPr txBox="1"/>
           <p:nvPr/>
         </p:nvSpPr>
         <p:spPr>
           <a:xfrm>
-            <a:off x="6931152" y="4215384"/>
-            <a:ext cx="4480560" cy="274320"/>
+            <a:off x="4050792" y="3148584"/>
+            <a:ext cx="4090111" cy="560832"/>
           </a:xfrm>
           <a:prstGeom prst="rect">
             <a:avLst/>
@@ -9808,51 +9455,167 @@
           </a:bodyPr>
           <a:lstStyle/>
           <a:p>
-            <a:pPr algn="ctr">
-              <a:lnSpc>
-                <a:spcPct val="100000"/>
-              </a:lnSpc>
-            </a:pPr>
-            <a:r>
-              <a:rPr sz="1050" b="0" i="0">
+            <a:pPr algn="l">
+              <a:lnSpc>
+                <a:spcPct val="105000"/>
+              </a:lnSpc>
+            </a:pPr>
+            <a:r>
+              <a:rPr sz="880" b="1" i="0">
                 <a:solidFill>
                   <a:srgbClr val="0B1B2B"/>
                 </a:solidFill>
                 <a:latin typeface="Segoe UI"/>
               </a:rPr>
-              <a:t>gravam </a:t>
-            </a:r>
-            <a:r>
-              <a:rPr sz="1050" b="1" i="0">
+              <a:t>o que a base mede de cada satélite de GPS, GLONASS, Galileo e BeiDou</a:t>
+            </a:r>
+          </a:p>
+          <a:p>
+            <a:pPr algn="l">
+              <a:lnSpc>
+                <a:spcPct val="105000"/>
+              </a:lnSpc>
+            </a:pPr>
+            <a:r>
+              <a:rPr sz="880" b="0" i="0">
                 <a:solidFill>
                   <a:srgbClr val="0B1B2B"/>
                 </a:solidFill>
                 <a:latin typeface="Segoe UI"/>
               </a:rPr>
-              <a:t>ao mesmo tempo</a:t>
-            </a:r>
-            <a:r>
-              <a:rPr sz="1050" b="0" i="0">
-                <a:solidFill>
-                  <a:srgbClr val="0B1B2B"/>
-                </a:solidFill>
-                <a:latin typeface="Segoe UI"/>
-              </a:rPr>
-              <a:t>: a comparação controla o instante</a:t>
-            </a:r>
-          </a:p>
-        </p:txBody>
-      </p:sp>
-      <p:sp>
-        <p:nvSpPr>
-          <p:cNvPr id="38" name="TextBox 37"/>
+              <a:t>código e fase da portadora por satélite, no formato compacto MSM4</a:t>
+            </a:r>
+          </a:p>
+        </p:txBody>
+      </p:sp>
+      <p:sp>
+        <p:nvSpPr>
+          <p:cNvPr id="25" name="Rounded Rectangle 24"/>
+          <p:cNvSpPr/>
+          <p:nvPr/>
+        </p:nvSpPr>
+        <p:spPr>
+          <a:xfrm>
+            <a:off x="3913632" y="3819144"/>
+            <a:ext cx="4364431" cy="853440"/>
+          </a:xfrm>
+          <a:prstGeom prst="roundRect">
+            <a:avLst>
+              <a:gd name="adj" fmla="val 7000"/>
+            </a:avLst>
+          </a:prstGeom>
+          <a:solidFill>
+            <a:srgbClr val="EDF3F8"/>
+          </a:solidFill>
+          <a:ln>
+            <a:noFill/>
+          </a:ln>
+          <a:effectLst/>
+        </p:spPr>
+        <p:style>
+          <a:lnRef idx="1">
+            <a:schemeClr val="accent1"/>
+          </a:lnRef>
+          <a:fillRef idx="3">
+            <a:schemeClr val="accent1"/>
+          </a:fillRef>
+          <a:effectRef idx="2">
+            <a:schemeClr val="accent1"/>
+          </a:effectRef>
+          <a:fontRef idx="minor">
+            <a:schemeClr val="lt1"/>
+          </a:fontRef>
+        </p:style>
+        <p:txBody>
+          <a:bodyPr rtlCol="0" anchor="ctr"/>
+          <a:lstStyle/>
+          <a:p>
+            <a:pPr algn="ctr"/>
+          </a:p>
+        </p:txBody>
+      </p:sp>
+      <p:cxnSp>
+        <p:nvCxnSpPr>
+          <p:cNvPr id="26" name="Connector 25"/>
+          <p:cNvCxnSpPr/>
+          <p:nvPr/>
+        </p:nvCxnSpPr>
+        <p:spPr>
+          <a:xfrm>
+            <a:off x="3776472" y="4245864"/>
+            <a:ext cx="155448" cy="0"/>
+          </a:xfrm>
+          <a:prstGeom prst="line">
+            <a:avLst/>
+          </a:prstGeom>
+          <a:ln w="25400">
+            <a:solidFill>
+              <a:srgbClr val="1FA971"/>
+            </a:solidFill>
+            <a:tailEnd type="triangle" w="med" len="med"/>
+          </a:ln>
+        </p:spPr>
+        <p:style>
+          <a:lnRef idx="2">
+            <a:schemeClr val="accent1"/>
+          </a:lnRef>
+          <a:fillRef idx="0">
+            <a:schemeClr val="accent1"/>
+          </a:fillRef>
+          <a:effectRef idx="1">
+            <a:schemeClr val="accent1"/>
+          </a:effectRef>
+          <a:fontRef idx="minor">
+            <a:schemeClr val="tx1"/>
+          </a:fontRef>
+        </p:style>
+      </p:cxnSp>
+      <p:cxnSp>
+        <p:nvCxnSpPr>
+          <p:cNvPr id="27" name="Connector 26"/>
+          <p:cNvCxnSpPr/>
+          <p:nvPr/>
+        </p:nvCxnSpPr>
+        <p:spPr>
+          <a:xfrm>
+            <a:off x="8259775" y="4245864"/>
+            <a:ext cx="155448" cy="0"/>
+          </a:xfrm>
+          <a:prstGeom prst="line">
+            <a:avLst/>
+          </a:prstGeom>
+          <a:ln w="25400">
+            <a:solidFill>
+              <a:srgbClr val="1FA971"/>
+            </a:solidFill>
+            <a:tailEnd type="triangle" w="med" len="med"/>
+          </a:ln>
+        </p:spPr>
+        <p:style>
+          <a:lnRef idx="2">
+            <a:schemeClr val="accent1"/>
+          </a:lnRef>
+          <a:fillRef idx="0">
+            <a:schemeClr val="accent1"/>
+          </a:fillRef>
+          <a:effectRef idx="1">
+            <a:schemeClr val="accent1"/>
+          </a:effectRef>
+          <a:fontRef idx="minor">
+            <a:schemeClr val="tx1"/>
+          </a:fontRef>
+        </p:style>
+      </p:cxnSp>
+      <p:sp>
+        <p:nvSpPr>
+          <p:cNvPr id="28" name="TextBox 27"/>
           <p:cNvSpPr txBox="1"/>
           <p:nvPr/>
         </p:nvSpPr>
         <p:spPr>
           <a:xfrm>
-            <a:off x="713232" y="4754880"/>
-            <a:ext cx="10765231" cy="914400"/>
+            <a:off x="4050792" y="3855720"/>
+            <a:ext cx="4090111" cy="274320"/>
           </a:xfrm>
           <a:prstGeom prst="rect">
             <a:avLst/>
@@ -9867,85 +9630,539 @@
           <a:p>
             <a:pPr algn="l">
               <a:lnSpc>
-                <a:spcPct val="120000"/>
-              </a:lnSpc>
-            </a:pPr>
-            <a:r>
-              <a:rPr sz="1050" b="0" i="0">
+                <a:spcPct val="100000"/>
+              </a:lnSpc>
+            </a:pPr>
+            <a:r>
+              <a:rPr sz="1050" b="1" i="0">
+                <a:solidFill>
+                  <a:srgbClr val="1FA971"/>
+                </a:solidFill>
+                <a:latin typeface="Consolas"/>
+              </a:rPr>
+              <a:t>1230</a:t>
+            </a:r>
+          </a:p>
+        </p:txBody>
+      </p:sp>
+      <p:sp>
+        <p:nvSpPr>
+          <p:cNvPr id="29" name="TextBox 28"/>
+          <p:cNvSpPr txBox="1"/>
+          <p:nvPr/>
+        </p:nvSpPr>
+        <p:spPr>
+          <a:xfrm>
+            <a:off x="4050792" y="4093464"/>
+            <a:ext cx="4090111" cy="560832"/>
+          </a:xfrm>
+          <a:prstGeom prst="rect">
+            <a:avLst/>
+          </a:prstGeom>
+          <a:noFill/>
+        </p:spPr>
+        <p:txBody>
+          <a:bodyPr wrap="square" anchor="t" lIns="0" rIns="0" tIns="0" bIns="0">
+            <a:spAutoFit/>
+          </a:bodyPr>
+          <a:lstStyle/>
+          <a:p>
+            <a:pPr algn="l">
+              <a:lnSpc>
+                <a:spcPct val="105000"/>
+              </a:lnSpc>
+            </a:pPr>
+            <a:r>
+              <a:rPr sz="880" b="1" i="0">
+                <a:solidFill>
+                  <a:srgbClr val="0B1B2B"/>
+                </a:solidFill>
+                <a:latin typeface="Segoe UI"/>
+              </a:rPr>
+              <a:t>o acerto do GLONASS</a:t>
+            </a:r>
+          </a:p>
+          <a:p>
+            <a:pPr algn="l">
+              <a:lnSpc>
+                <a:spcPct val="105000"/>
+              </a:lnSpc>
+            </a:pPr>
+            <a:r>
+              <a:rPr sz="880" b="0" i="0">
+                <a:solidFill>
+                  <a:srgbClr val="0B1B2B"/>
+                </a:solidFill>
+                <a:latin typeface="Segoe UI"/>
+              </a:rPr>
+              <a:t>cada satélite GLONASS transmite numa frequência própria, com um atraso próprio no receptor; sem esse acerto o GLONASS entra na conta mas não fixa (falha C)</a:t>
+            </a:r>
+          </a:p>
+        </p:txBody>
+      </p:sp>
+      <p:sp>
+        <p:nvSpPr>
+          <p:cNvPr id="30" name="Rounded Rectangle 29"/>
+          <p:cNvSpPr/>
+          <p:nvPr/>
+        </p:nvSpPr>
+        <p:spPr>
+          <a:xfrm>
+            <a:off x="713232" y="4855464"/>
+            <a:ext cx="10765231" cy="960120"/>
+          </a:xfrm>
+          <a:prstGeom prst="roundRect">
+            <a:avLst>
+              <a:gd name="adj" fmla="val 7000"/>
+            </a:avLst>
+          </a:prstGeom>
+          <a:solidFill>
+            <a:srgbClr val="FFFFFF"/>
+          </a:solidFill>
+          <a:ln w="12700">
+            <a:solidFill>
+              <a:srgbClr val="D3E0EB"/>
+            </a:solidFill>
+          </a:ln>
+          <a:effectLst/>
+        </p:spPr>
+        <p:style>
+          <a:lnRef idx="1">
+            <a:schemeClr val="accent1"/>
+          </a:lnRef>
+          <a:fillRef idx="3">
+            <a:schemeClr val="accent1"/>
+          </a:fillRef>
+          <a:effectRef idx="2">
+            <a:schemeClr val="accent1"/>
+          </a:effectRef>
+          <a:fontRef idx="minor">
+            <a:schemeClr val="lt1"/>
+          </a:fontRef>
+        </p:style>
+        <p:txBody>
+          <a:bodyPr rtlCol="0" anchor="ctr"/>
+          <a:lstStyle/>
+          <a:p>
+            <a:pPr algn="ctr"/>
+          </a:p>
+        </p:txBody>
+      </p:sp>
+      <p:sp>
+        <p:nvSpPr>
+          <p:cNvPr id="31" name="TextBox 30"/>
+          <p:cNvSpPr txBox="1"/>
+          <p:nvPr/>
+        </p:nvSpPr>
+        <p:spPr>
+          <a:xfrm>
+            <a:off x="896112" y="4928616"/>
+            <a:ext cx="2194560" cy="822960"/>
+          </a:xfrm>
+          <a:prstGeom prst="rect">
+            <a:avLst/>
+          </a:prstGeom>
+          <a:noFill/>
+        </p:spPr>
+        <p:txBody>
+          <a:bodyPr wrap="square" anchor="t" lIns="0" rIns="0" tIns="0" bIns="0">
+            <a:spAutoFit/>
+          </a:bodyPr>
+          <a:lstStyle/>
+          <a:p>
+            <a:pPr algn="l">
+              <a:lnSpc>
+                <a:spcPct val="110000"/>
+              </a:lnSpc>
+            </a:pPr>
+            <a:r>
+              <a:rPr sz="950" b="1" i="0">
+                <a:solidFill>
+                  <a:srgbClr val="00224E"/>
+                </a:solidFill>
+                <a:latin typeface="Segoe UI"/>
+              </a:rPr>
+              <a:t>Como se configura</a:t>
+            </a:r>
+          </a:p>
+          <a:p>
+            <a:pPr algn="l">
+              <a:lnSpc>
+                <a:spcPct val="110000"/>
+              </a:lnSpc>
+            </a:pPr>
+            <a:r>
+              <a:rPr sz="950" b="0" i="0">
+                <a:solidFill>
+                  <a:srgbClr val="00224E"/>
+                </a:solidFill>
+                <a:latin typeface="Consolas"/>
+              </a:rPr>
+              <a:t>UBX-CFG-VALSET</a:t>
+            </a:r>
+            <a:r>
+              <a:rPr sz="950" b="0" i="0">
+                <a:solidFill>
+                  <a:srgbClr val="00224E"/>
+                </a:solidFill>
+                <a:latin typeface="Segoe UI"/>
+              </a:rPr>
+              <a:t>:</a:t>
+            </a:r>
+          </a:p>
+          <a:p>
+            <a:pPr algn="l">
+              <a:lnSpc>
+                <a:spcPct val="110000"/>
+              </a:lnSpc>
+            </a:pPr>
+            <a:r>
+              <a:rPr sz="950" b="0" i="0">
+                <a:solidFill>
+                  <a:srgbClr val="00224E"/>
+                </a:solidFill>
+                <a:latin typeface="Segoe UI"/>
+              </a:rPr>
+              <a:t>chave + valor + camada</a:t>
+            </a:r>
+          </a:p>
+        </p:txBody>
+      </p:sp>
+      <p:sp>
+        <p:nvSpPr>
+          <p:cNvPr id="32" name="TextBox 31"/>
+          <p:cNvSpPr txBox="1"/>
+          <p:nvPr/>
+        </p:nvSpPr>
+        <p:spPr>
+          <a:xfrm>
+            <a:off x="3090672" y="4946904"/>
+            <a:ext cx="1959787" cy="274320"/>
+          </a:xfrm>
+          <a:prstGeom prst="rect">
+            <a:avLst/>
+          </a:prstGeom>
+          <a:noFill/>
+        </p:spPr>
+        <p:txBody>
+          <a:bodyPr wrap="square" anchor="t" lIns="0" rIns="0" tIns="0" bIns="0">
+            <a:spAutoFit/>
+          </a:bodyPr>
+          <a:lstStyle/>
+          <a:p>
+            <a:pPr algn="l">
+              <a:lnSpc>
+                <a:spcPct val="100000"/>
+              </a:lnSpc>
+            </a:pPr>
+            <a:r>
+              <a:rPr sz="1000" b="1" i="0">
+                <a:solidFill>
+                  <a:srgbClr val="0B1B2B"/>
+                </a:solidFill>
+                <a:latin typeface="Segoe UI"/>
+              </a:rPr>
+              <a:t>0 · RAM</a:t>
+            </a:r>
+          </a:p>
+        </p:txBody>
+      </p:sp>
+      <p:sp>
+        <p:nvSpPr>
+          <p:cNvPr id="33" name="TextBox 32"/>
+          <p:cNvSpPr txBox="1"/>
+          <p:nvPr/>
+        </p:nvSpPr>
+        <p:spPr>
+          <a:xfrm>
+            <a:off x="3090672" y="5239512"/>
+            <a:ext cx="1959787" cy="548640"/>
+          </a:xfrm>
+          <a:prstGeom prst="rect">
+            <a:avLst/>
+          </a:prstGeom>
+          <a:noFill/>
+        </p:spPr>
+        <p:txBody>
+          <a:bodyPr wrap="square" anchor="t" lIns="0" rIns="0" tIns="0" bIns="0">
+            <a:spAutoFit/>
+          </a:bodyPr>
+          <a:lstStyle/>
+          <a:p>
+            <a:pPr algn="l">
+              <a:lnSpc>
+                <a:spcPct val="105000"/>
+              </a:lnSpc>
+            </a:pPr>
+            <a:r>
+              <a:rPr sz="880" b="0" i="0">
                 <a:solidFill>
                   <a:srgbClr val="566577"/>
                 </a:solidFill>
                 <a:latin typeface="Segoe UI"/>
               </a:rPr>
-              <a:t>▪  Três antenas ANN-MB2, </a:t>
-            </a:r>
-            <a:r>
-              <a:rPr sz="1050" b="1" i="0">
+              <a:t>vale até religar; é o que a demo usa</a:t>
+            </a:r>
+          </a:p>
+        </p:txBody>
+      </p:sp>
+      <p:sp>
+        <p:nvSpPr>
+          <p:cNvPr id="34" name="TextBox 33"/>
+          <p:cNvSpPr txBox="1"/>
+          <p:nvPr/>
+        </p:nvSpPr>
+        <p:spPr>
+          <a:xfrm>
+            <a:off x="5141899" y="4946904"/>
+            <a:ext cx="1959787" cy="274320"/>
+          </a:xfrm>
+          <a:prstGeom prst="rect">
+            <a:avLst/>
+          </a:prstGeom>
+          <a:noFill/>
+        </p:spPr>
+        <p:txBody>
+          <a:bodyPr wrap="square" anchor="t" lIns="0" rIns="0" tIns="0" bIns="0">
+            <a:spAutoFit/>
+          </a:bodyPr>
+          <a:lstStyle/>
+          <a:p>
+            <a:pPr algn="l">
+              <a:lnSpc>
+                <a:spcPct val="100000"/>
+              </a:lnSpc>
+            </a:pPr>
+            <a:r>
+              <a:rPr sz="1000" b="1" i="0">
                 <a:solidFill>
                   <a:srgbClr val="0B1B2B"/>
                 </a:solidFill>
                 <a:latin typeface="Segoe UI"/>
               </a:rPr>
-              <a:t>na mesma altura</a:t>
-            </a:r>
-            <a:r>
-              <a:rPr sz="1050" b="0" i="0">
+              <a:t>1 · BBR  2 · flash</a:t>
+            </a:r>
+          </a:p>
+        </p:txBody>
+      </p:sp>
+      <p:sp>
+        <p:nvSpPr>
+          <p:cNvPr id="35" name="TextBox 34"/>
+          <p:cNvSpPr txBox="1"/>
+          <p:nvPr/>
+        </p:nvSpPr>
+        <p:spPr>
+          <a:xfrm>
+            <a:off x="5141899" y="5239512"/>
+            <a:ext cx="1959787" cy="548640"/>
+          </a:xfrm>
+          <a:prstGeom prst="rect">
+            <a:avLst/>
+          </a:prstGeom>
+          <a:noFill/>
+        </p:spPr>
+        <p:txBody>
+          <a:bodyPr wrap="square" anchor="t" lIns="0" rIns="0" tIns="0" bIns="0">
+            <a:spAutoFit/>
+          </a:bodyPr>
+          <a:lstStyle/>
+          <a:p>
+            <a:pPr algn="l">
+              <a:lnSpc>
+                <a:spcPct val="105000"/>
+              </a:lnSpc>
+            </a:pPr>
+            <a:r>
+              <a:rPr sz="880" b="0" i="0">
                 <a:solidFill>
                   <a:srgbClr val="566577"/>
                 </a:solidFill>
                 <a:latin typeface="Segoe UI"/>
               </a:rPr>
-              <a:t>, cada uma sobre plano de terra de ø12 cm, separadas por ~1,5 m. Base e rover a metros: baseline curta, mesma atmosfera.</a:t>
-            </a:r>
-          </a:p>
+              <a:t>persistem; só se pedir</a:t>
+            </a:r>
+          </a:p>
+        </p:txBody>
+      </p:sp>
+      <p:sp>
+        <p:nvSpPr>
+          <p:cNvPr id="36" name="TextBox 35"/>
+          <p:cNvSpPr txBox="1"/>
+          <p:nvPr/>
+        </p:nvSpPr>
+        <p:spPr>
+          <a:xfrm>
+            <a:off x="7193127" y="4946904"/>
+            <a:ext cx="1959787" cy="274320"/>
+          </a:xfrm>
+          <a:prstGeom prst="rect">
+            <a:avLst/>
+          </a:prstGeom>
+          <a:noFill/>
+        </p:spPr>
+        <p:txBody>
+          <a:bodyPr wrap="square" anchor="t" lIns="0" rIns="0" tIns="0" bIns="0">
+            <a:spAutoFit/>
+          </a:bodyPr>
+          <a:lstStyle/>
           <a:p>
             <a:pPr algn="l">
               <a:lnSpc>
-                <a:spcPct val="120000"/>
-              </a:lnSpc>
-            </a:pPr>
-            <a:r>
-              <a:rPr sz="1050" b="0" i="0">
+                <a:spcPct val="100000"/>
+              </a:lnSpc>
+            </a:pPr>
+            <a:r>
+              <a:rPr sz="1000" b="1" i="0">
+                <a:solidFill>
+                  <a:srgbClr val="0B1B2B"/>
+                </a:solidFill>
+                <a:latin typeface="Segoe UI"/>
+              </a:rPr>
+              <a:t>7 · Default</a:t>
+            </a:r>
+          </a:p>
+        </p:txBody>
+      </p:sp>
+      <p:sp>
+        <p:nvSpPr>
+          <p:cNvPr id="37" name="TextBox 36"/>
+          <p:cNvSpPr txBox="1"/>
+          <p:nvPr/>
+        </p:nvSpPr>
+        <p:spPr>
+          <a:xfrm>
+            <a:off x="7193127" y="5239512"/>
+            <a:ext cx="1959787" cy="548640"/>
+          </a:xfrm>
+          <a:prstGeom prst="rect">
+            <a:avLst/>
+          </a:prstGeom>
+          <a:noFill/>
+        </p:spPr>
+        <p:txBody>
+          <a:bodyPr wrap="square" anchor="t" lIns="0" rIns="0" tIns="0" bIns="0">
+            <a:spAutoFit/>
+          </a:bodyPr>
+          <a:lstStyle/>
+          <a:p>
+            <a:pPr algn="l">
+              <a:lnSpc>
+                <a:spcPct val="105000"/>
+              </a:lnSpc>
+            </a:pPr>
+            <a:r>
+              <a:rPr sz="880" b="0" i="0">
                 <a:solidFill>
                   <a:srgbClr val="566577"/>
                 </a:solidFill>
                 <a:latin typeface="Segoe UI"/>
               </a:rPr>
-              <a:t>▪  Uma antena por receptor: sem troca de cabo e sem compartilhar antena (o J2 da SMA-DK alimenta a 3 V, o EVK a 3,3 V).</a:t>
-            </a:r>
-          </a:p>
+              <a:t>o padrão de fábrica, só leitura; </a:t>
+            </a:r>
+            <a:r>
+              <a:rPr sz="880" b="0" i="0">
+                <a:solidFill>
+                  <a:srgbClr val="566577"/>
+                </a:solidFill>
+                <a:latin typeface="Consolas"/>
+              </a:rPr>
+              <a:t>VALGET</a:t>
+            </a:r>
+            <a:r>
+              <a:rPr sz="880" b="0" i="0">
+                <a:solidFill>
+                  <a:srgbClr val="566577"/>
+                </a:solidFill>
+                <a:latin typeface="Segoe UI"/>
+              </a:rPr>
+              <a:t> compara</a:t>
+            </a:r>
+          </a:p>
+        </p:txBody>
+      </p:sp>
+      <p:sp>
+        <p:nvSpPr>
+          <p:cNvPr id="38" name="TextBox 37"/>
+          <p:cNvSpPr txBox="1"/>
+          <p:nvPr/>
+        </p:nvSpPr>
+        <p:spPr>
+          <a:xfrm>
+            <a:off x="9244355" y="4946904"/>
+            <a:ext cx="1959787" cy="274320"/>
+          </a:xfrm>
+          <a:prstGeom prst="rect">
+            <a:avLst/>
+          </a:prstGeom>
+          <a:noFill/>
+        </p:spPr>
+        <p:txBody>
+          <a:bodyPr wrap="square" anchor="t" lIns="0" rIns="0" tIns="0" bIns="0">
+            <a:spAutoFit/>
+          </a:bodyPr>
+          <a:lstStyle/>
           <a:p>
             <a:pPr algn="l">
               <a:lnSpc>
-                <a:spcPct val="120000"/>
-              </a:lnSpc>
-            </a:pPr>
-            <a:r>
-              <a:rPr sz="1050" b="0" i="0">
+                <a:spcPct val="100000"/>
+              </a:lnSpc>
+            </a:pPr>
+            <a:r>
+              <a:rPr sz="1000" b="1" i="0">
+                <a:solidFill>
+                  <a:srgbClr val="0B1B2B"/>
+                </a:solidFill>
+                <a:latin typeface="Segoe UI"/>
+              </a:rPr>
+              <a:t>voltar ao padrão</a:t>
+            </a:r>
+          </a:p>
+        </p:txBody>
+      </p:sp>
+      <p:sp>
+        <p:nvSpPr>
+          <p:cNvPr id="39" name="TextBox 38"/>
+          <p:cNvSpPr txBox="1"/>
+          <p:nvPr/>
+        </p:nvSpPr>
+        <p:spPr>
+          <a:xfrm>
+            <a:off x="9244355" y="5239512"/>
+            <a:ext cx="1959787" cy="548640"/>
+          </a:xfrm>
+          <a:prstGeom prst="rect">
+            <a:avLst/>
+          </a:prstGeom>
+          <a:noFill/>
+        </p:spPr>
+        <p:txBody>
+          <a:bodyPr wrap="square" anchor="t" lIns="0" rIns="0" tIns="0" bIns="0">
+            <a:spAutoFit/>
+          </a:bodyPr>
+          <a:lstStyle/>
+          <a:p>
+            <a:pPr algn="l">
+              <a:lnSpc>
+                <a:spcPct val="105000"/>
+              </a:lnSpc>
+            </a:pPr>
+            <a:r>
+              <a:rPr sz="880" b="0" i="0">
                 <a:solidFill>
                   <a:srgbClr val="566577"/>
                 </a:solidFill>
-                <a:latin typeface="Segoe UI"/>
-              </a:rPr>
-              <a:t>▪  As antenas B e C não estão no mesmo ponto: os degraus comparam </a:t>
-            </a:r>
-            <a:r>
-              <a:rPr sz="1050" b="1" i="0">
-                <a:solidFill>
-                  <a:srgbClr val="0B1B2B"/>
-                </a:solidFill>
-                <a:latin typeface="Segoe UI"/>
-              </a:rPr>
-              <a:t>dispersão</a:t>
-            </a:r>
-            <a:r>
-              <a:rPr sz="1050" b="0" i="0">
+                <a:latin typeface="Consolas"/>
+              </a:rPr>
+              <a:t>UBX-CFG-CFG</a:t>
+            </a:r>
+            <a:r>
+              <a:rPr sz="880" b="0" i="0">
                 <a:solidFill>
                   <a:srgbClr val="566577"/>
                 </a:solidFill>
                 <a:latin typeface="Segoe UI"/>
               </a:rPr>
-              <a:t>, não posição absoluta.</a:t>
+              <a:t> limpa BBR e flash e recarrega o Default</a:t>
             </a:r>
           </a:p>
         </p:txBody>
@@ -10085,7 +10302,7 @@
                 </a:solidFill>
                 <a:latin typeface="Segoe UI"/>
               </a:rPr>
-              <a:t>O roteiro</a:t>
+              <a:t>A montagem</a:t>
             </a:r>
           </a:p>
         </p:txBody>
@@ -10223,20 +10440,20 @@
       </p:sp>
       <p:sp>
         <p:nvSpPr>
-          <p:cNvPr id="8" name="Rectangle 7"/>
+          <p:cNvPr id="8" name="Oval 7"/>
           <p:cNvSpPr/>
           <p:nvPr/>
         </p:nvSpPr>
         <p:spPr>
           <a:xfrm>
-            <a:off x="1261872" y="2029968"/>
-            <a:ext cx="25400" cy="464820"/>
-          </a:xfrm>
-          <a:prstGeom prst="rect">
+            <a:off x="1604772" y="1691640"/>
+            <a:ext cx="548640" cy="548640"/>
+          </a:xfrm>
+          <a:prstGeom prst="ellipse">
             <a:avLst/>
           </a:prstGeom>
           <a:solidFill>
-            <a:srgbClr val="D3E0EB"/>
+            <a:srgbClr val="00224E"/>
           </a:solidFill>
           <a:ln>
             <a:noFill/>
@@ -10267,14 +10484,89 @@
       </p:sp>
       <p:sp>
         <p:nvSpPr>
-          <p:cNvPr id="9" name="Oval 8"/>
+          <p:cNvPr id="9" name="TextBox 8"/>
+          <p:cNvSpPr txBox="1"/>
+          <p:nvPr/>
+        </p:nvSpPr>
+        <p:spPr>
+          <a:xfrm>
+            <a:off x="804672" y="2258568"/>
+            <a:ext cx="2148840" cy="274320"/>
+          </a:xfrm>
+          <a:prstGeom prst="rect">
+            <a:avLst/>
+          </a:prstGeom>
+          <a:noFill/>
+        </p:spPr>
+        <p:txBody>
+          <a:bodyPr wrap="square" anchor="t" lIns="0" rIns="0" tIns="0" bIns="0">
+            <a:spAutoFit/>
+          </a:bodyPr>
+          <a:lstStyle/>
+          <a:p>
+            <a:pPr algn="ctr">
+              <a:lnSpc>
+                <a:spcPct val="100000"/>
+              </a:lnSpc>
+            </a:pPr>
+            <a:r>
+              <a:rPr sz="1000" b="1" i="0">
+                <a:solidFill>
+                  <a:srgbClr val="0B1B2B"/>
+                </a:solidFill>
+                <a:latin typeface="Segoe UI"/>
+              </a:rPr>
+              <a:t>antena A</a:t>
+            </a:r>
+          </a:p>
+        </p:txBody>
+      </p:sp>
+      <p:cxnSp>
+        <p:nvCxnSpPr>
+          <p:cNvPr id="10" name="Connector 9"/>
+          <p:cNvCxnSpPr/>
+          <p:nvPr/>
+        </p:nvCxnSpPr>
+        <p:spPr>
+          <a:xfrm>
+            <a:off x="1879092" y="2240280"/>
+            <a:ext cx="0" cy="411480"/>
+          </a:xfrm>
+          <a:prstGeom prst="line">
+            <a:avLst/>
+          </a:prstGeom>
+          <a:ln w="19050">
+            <a:solidFill>
+              <a:srgbClr val="566577"/>
+            </a:solidFill>
+            <a:tailEnd type="triangle" w="med" len="med"/>
+          </a:ln>
+        </p:spPr>
+        <p:style>
+          <a:lnRef idx="2">
+            <a:schemeClr val="accent1"/>
+          </a:lnRef>
+          <a:fillRef idx="0">
+            <a:schemeClr val="accent1"/>
+          </a:fillRef>
+          <a:effectRef idx="1">
+            <a:schemeClr val="accent1"/>
+          </a:effectRef>
+          <a:fontRef idx="minor">
+            <a:schemeClr val="tx1"/>
+          </a:fontRef>
+        </p:style>
+      </p:cxnSp>
+      <p:sp>
+        <p:nvSpPr>
+          <p:cNvPr id="11" name="Oval 10"/>
           <p:cNvSpPr/>
           <p:nvPr/>
         </p:nvSpPr>
         <p:spPr>
           <a:xfrm>
-            <a:off x="1078992" y="1600200"/>
-            <a:ext cx="402336" cy="402336"/>
+            <a:off x="7731252" y="1691640"/>
+            <a:ext cx="548640" cy="548640"/>
           </a:xfrm>
           <a:prstGeom prst="ellipse">
             <a:avLst/>
@@ -10311,14 +10603,14 @@
       </p:sp>
       <p:sp>
         <p:nvSpPr>
-          <p:cNvPr id="10" name="TextBox 9"/>
+          <p:cNvPr id="12" name="TextBox 11"/>
           <p:cNvSpPr txBox="1"/>
           <p:nvPr/>
         </p:nvSpPr>
         <p:spPr>
           <a:xfrm>
-            <a:off x="1078992" y="1645920"/>
-            <a:ext cx="402336" cy="320040"/>
+            <a:off x="6931152" y="2258568"/>
+            <a:ext cx="2148840" cy="274320"/>
           </a:xfrm>
           <a:prstGeom prst="rect">
             <a:avLst/>
@@ -10337,139 +10629,53 @@
               </a:lnSpc>
             </a:pPr>
             <a:r>
-              <a:rPr sz="1500" b="1" i="0">
-                <a:solidFill>
-                  <a:srgbClr val="FFFFFF"/>
-                </a:solidFill>
-                <a:latin typeface="Segoe UI"/>
-              </a:rPr>
-              <a:t>1</a:t>
-            </a:r>
-          </a:p>
-        </p:txBody>
-      </p:sp>
-      <p:sp>
-        <p:nvSpPr>
-          <p:cNvPr id="11" name="TextBox 10"/>
-          <p:cNvSpPr txBox="1"/>
-          <p:nvPr/>
-        </p:nvSpPr>
-        <p:spPr>
-          <a:xfrm>
-            <a:off x="1764792" y="1572768"/>
-            <a:ext cx="8936431" cy="292608"/>
-          </a:xfrm>
-          <a:prstGeom prst="rect">
-            <a:avLst/>
-          </a:prstGeom>
-          <a:noFill/>
-        </p:spPr>
-        <p:txBody>
-          <a:bodyPr wrap="square" anchor="t" lIns="0" rIns="0" tIns="0" bIns="0">
-            <a:spAutoFit/>
-          </a:bodyPr>
-          <a:lstStyle/>
-          <a:p>
-            <a:pPr algn="l">
-              <a:lnSpc>
-                <a:spcPct val="100000"/>
-              </a:lnSpc>
-            </a:pPr>
-            <a:r>
-              <a:rPr sz="1500" b="1" i="0">
+              <a:rPr sz="1000" b="1" i="0">
                 <a:solidFill>
                   <a:srgbClr val="0B1B2B"/>
                 </a:solidFill>
                 <a:latin typeface="Segoe UI"/>
               </a:rPr>
-              <a:t>Antes da aula: firmware e Survey-In</a:t>
-            </a:r>
-          </a:p>
-        </p:txBody>
-      </p:sp>
-      <p:sp>
-        <p:nvSpPr>
-          <p:cNvPr id="12" name="TextBox 11"/>
-          <p:cNvSpPr txBox="1"/>
-          <p:nvPr/>
-        </p:nvSpPr>
-        <p:spPr>
-          <a:xfrm>
-            <a:off x="1764792" y="1883664"/>
-            <a:ext cx="8936431" cy="320040"/>
-          </a:xfrm>
-          <a:prstGeom prst="rect">
-            <a:avLst/>
-          </a:prstGeom>
-          <a:noFill/>
-        </p:spPr>
-        <p:txBody>
-          <a:bodyPr wrap="square" anchor="t" lIns="0" rIns="0" tIns="0" bIns="0">
-            <a:spAutoFit/>
-          </a:bodyPr>
-          <a:lstStyle/>
-          <a:p>
-            <a:pPr algn="l">
-              <a:lnSpc>
-                <a:spcPct val="100000"/>
-              </a:lnSpc>
-            </a:pPr>
-            <a:r>
-              <a:rPr sz="1250" b="0" i="0">
-                <a:solidFill>
-                  <a:srgbClr val="566577"/>
-                </a:solidFill>
-                <a:latin typeface="Segoe UI"/>
-              </a:rPr>
-              <a:t>os dois EVK em HPG 2.11 (conferir com UBX-MON-VER). Survey-In da base uma vez: 5000 mm e 60 s de alvo, anotar a coordenada, gravar CFG-TMODE-MODE = FIXED e salvar na flash.</a:t>
-            </a:r>
-          </a:p>
-        </p:txBody>
-      </p:sp>
-      <p:sp>
-        <p:nvSpPr>
-          <p:cNvPr id="13" name="Rectangle 12"/>
-          <p:cNvSpPr/>
-          <p:nvPr/>
-        </p:nvSpPr>
-        <p:spPr>
-          <a:xfrm>
-            <a:off x="1261872" y="2814828"/>
-            <a:ext cx="25400" cy="464820"/>
-          </a:xfrm>
-          <a:prstGeom prst="rect">
-            <a:avLst/>
-          </a:prstGeom>
-          <a:solidFill>
-            <a:srgbClr val="D3E0EB"/>
-          </a:solidFill>
-          <a:ln>
-            <a:noFill/>
+              <a:t>antena B</a:t>
+            </a:r>
+          </a:p>
+        </p:txBody>
+      </p:sp>
+      <p:cxnSp>
+        <p:nvCxnSpPr>
+          <p:cNvPr id="13" name="Connector 12"/>
+          <p:cNvCxnSpPr/>
+          <p:nvPr/>
+        </p:nvCxnSpPr>
+        <p:spPr>
+          <a:xfrm>
+            <a:off x="8005572" y="2240280"/>
+            <a:ext cx="0" cy="411480"/>
+          </a:xfrm>
+          <a:prstGeom prst="line">
+            <a:avLst/>
+          </a:prstGeom>
+          <a:ln w="19050">
+            <a:solidFill>
+              <a:srgbClr val="566577"/>
+            </a:solidFill>
+            <a:tailEnd type="triangle" w="med" len="med"/>
           </a:ln>
-          <a:effectLst/>
         </p:spPr>
         <p:style>
-          <a:lnRef idx="1">
+          <a:lnRef idx="2">
             <a:schemeClr val="accent1"/>
           </a:lnRef>
-          <a:fillRef idx="3">
+          <a:fillRef idx="0">
             <a:schemeClr val="accent1"/>
           </a:fillRef>
-          <a:effectRef idx="2">
+          <a:effectRef idx="1">
             <a:schemeClr val="accent1"/>
           </a:effectRef>
           <a:fontRef idx="minor">
-            <a:schemeClr val="lt1"/>
+            <a:schemeClr val="tx1"/>
           </a:fontRef>
         </p:style>
-        <p:txBody>
-          <a:bodyPr rtlCol="0" anchor="ctr"/>
-          <a:lstStyle/>
-          <a:p>
-            <a:pPr algn="ctr"/>
-          </a:p>
-        </p:txBody>
-      </p:sp>
+      </p:cxnSp>
       <p:sp>
         <p:nvSpPr>
           <p:cNvPr id="14" name="Oval 13"/>
@@ -10478,8 +10684,8 @@
         </p:nvSpPr>
         <p:spPr>
           <a:xfrm>
-            <a:off x="1078992" y="2385060"/>
-            <a:ext cx="402336" cy="402336"/>
+            <a:off x="10062972" y="1691640"/>
+            <a:ext cx="548640" cy="548640"/>
           </a:xfrm>
           <a:prstGeom prst="ellipse">
             <a:avLst/>
@@ -10522,8 +10728,8 @@
         </p:nvSpPr>
         <p:spPr>
           <a:xfrm>
-            <a:off x="1078992" y="2430780"/>
-            <a:ext cx="402336" cy="320040"/>
+            <a:off x="9262872" y="2258568"/>
+            <a:ext cx="2148840" cy="274320"/>
           </a:xfrm>
           <a:prstGeom prst="rect">
             <a:avLst/>
@@ -10542,111 +10748,71 @@
               </a:lnSpc>
             </a:pPr>
             <a:r>
-              <a:rPr sz="1500" b="1" i="0">
-                <a:solidFill>
-                  <a:srgbClr val="FFFFFF"/>
-                </a:solidFill>
-                <a:latin typeface="Segoe UI"/>
-              </a:rPr>
-              <a:t>2</a:t>
-            </a:r>
-          </a:p>
-        </p:txBody>
-      </p:sp>
-      <p:sp>
-        <p:nvSpPr>
-          <p:cNvPr id="16" name="TextBox 15"/>
-          <p:cNvSpPr txBox="1"/>
-          <p:nvPr/>
-        </p:nvSpPr>
-        <p:spPr>
-          <a:xfrm>
-            <a:off x="1764792" y="2357628"/>
-            <a:ext cx="8936431" cy="292608"/>
-          </a:xfrm>
-          <a:prstGeom prst="rect">
-            <a:avLst/>
-          </a:prstGeom>
-          <a:noFill/>
-        </p:spPr>
-        <p:txBody>
-          <a:bodyPr wrap="square" anchor="t" lIns="0" rIns="0" tIns="0" bIns="0">
-            <a:spAutoFit/>
-          </a:bodyPr>
-          <a:lstStyle/>
-          <a:p>
-            <a:pPr algn="l">
-              <a:lnSpc>
-                <a:spcPct val="100000"/>
-              </a:lnSpc>
-            </a:pPr>
-            <a:r>
-              <a:rPr sz="1500" b="1" i="0">
+              <a:rPr sz="1000" b="1" i="0">
                 <a:solidFill>
                   <a:srgbClr val="0B1B2B"/>
                 </a:solidFill>
                 <a:latin typeface="Segoe UI"/>
               </a:rPr>
-              <a:t>Degrau 1: a SMA-DK, na antena C</a:t>
-            </a:r>
-          </a:p>
-        </p:txBody>
-      </p:sp>
-      <p:sp>
-        <p:nvSpPr>
-          <p:cNvPr id="17" name="TextBox 16"/>
-          <p:cNvSpPr txBox="1"/>
-          <p:nvPr/>
-        </p:nvSpPr>
-        <p:spPr>
-          <a:xfrm>
-            <a:off x="1764792" y="2668524"/>
-            <a:ext cx="8936431" cy="320040"/>
-          </a:xfrm>
-          <a:prstGeom prst="rect">
-            <a:avLst/>
-          </a:prstGeom>
-          <a:noFill/>
-        </p:spPr>
-        <p:txBody>
-          <a:bodyPr wrap="square" anchor="t" lIns="0" rIns="0" tIns="0" bIns="0">
-            <a:spAutoFit/>
-          </a:bodyPr>
-          <a:lstStyle/>
-          <a:p>
-            <a:pPr algn="l">
-              <a:lnSpc>
-                <a:spcPct val="100000"/>
-              </a:lnSpc>
-            </a:pPr>
-            <a:r>
-              <a:rPr sz="1250" b="0" i="0">
-                <a:solidFill>
-                  <a:srgbClr val="566577"/>
-                </a:solidFill>
-                <a:latin typeface="Segoe UI"/>
-              </a:rPr>
-              <a:t>firmware do lab 3; o u-center 2 monta o Deviation Map com CEP50/CEP95 a partir do NMEA. Dispersão de metros.</a:t>
-            </a:r>
-          </a:p>
-        </p:txBody>
-      </p:sp>
-      <p:sp>
-        <p:nvSpPr>
-          <p:cNvPr id="18" name="Rectangle 17"/>
+              <a:t>antena C</a:t>
+            </a:r>
+          </a:p>
+        </p:txBody>
+      </p:sp>
+      <p:cxnSp>
+        <p:nvCxnSpPr>
+          <p:cNvPr id="16" name="Connector 15"/>
+          <p:cNvCxnSpPr/>
+          <p:nvPr/>
+        </p:nvCxnSpPr>
+        <p:spPr>
+          <a:xfrm>
+            <a:off x="10337292" y="2240280"/>
+            <a:ext cx="0" cy="411480"/>
+          </a:xfrm>
+          <a:prstGeom prst="line">
+            <a:avLst/>
+          </a:prstGeom>
+          <a:ln w="19050">
+            <a:solidFill>
+              <a:srgbClr val="566577"/>
+            </a:solidFill>
+            <a:tailEnd type="triangle" w="med" len="med"/>
+          </a:ln>
+        </p:spPr>
+        <p:style>
+          <a:lnRef idx="2">
+            <a:schemeClr val="accent1"/>
+          </a:lnRef>
+          <a:fillRef idx="0">
+            <a:schemeClr val="accent1"/>
+          </a:fillRef>
+          <a:effectRef idx="1">
+            <a:schemeClr val="accent1"/>
+          </a:effectRef>
+          <a:fontRef idx="minor">
+            <a:schemeClr val="tx1"/>
+          </a:fontRef>
+        </p:style>
+      </p:cxnSp>
+      <p:sp>
+        <p:nvSpPr>
+          <p:cNvPr id="17" name="Rounded Rectangle 16"/>
           <p:cNvSpPr/>
           <p:nvPr/>
         </p:nvSpPr>
         <p:spPr>
           <a:xfrm>
-            <a:off x="1261872" y="3599688"/>
-            <a:ext cx="25400" cy="464820"/>
-          </a:xfrm>
-          <a:prstGeom prst="rect">
-            <a:avLst/>
+            <a:off x="804672" y="2651760"/>
+            <a:ext cx="2148840" cy="1188720"/>
+          </a:xfrm>
+          <a:prstGeom prst="roundRect">
+            <a:avLst>
+              <a:gd name="adj" fmla="val 7000"/>
+            </a:avLst>
           </a:prstGeom>
           <a:solidFill>
-            <a:srgbClr val="D3E0EB"/>
+            <a:srgbClr val="00224E"/>
           </a:solidFill>
           <a:ln>
             <a:noFill/>
@@ -10677,20 +10843,342 @@
       </p:sp>
       <p:sp>
         <p:nvSpPr>
-          <p:cNvPr id="19" name="Oval 18"/>
+          <p:cNvPr id="18" name="TextBox 17"/>
+          <p:cNvSpPr txBox="1"/>
+          <p:nvPr/>
+        </p:nvSpPr>
+        <p:spPr>
+          <a:xfrm>
+            <a:off x="969264" y="2761488"/>
+            <a:ext cx="1819656" cy="292608"/>
+          </a:xfrm>
+          <a:prstGeom prst="rect">
+            <a:avLst/>
+          </a:prstGeom>
+          <a:noFill/>
+        </p:spPr>
+        <p:txBody>
+          <a:bodyPr wrap="square" anchor="t" lIns="0" rIns="0" tIns="0" bIns="0">
+            <a:spAutoFit/>
+          </a:bodyPr>
+          <a:lstStyle/>
+          <a:p>
+            <a:pPr algn="l">
+              <a:lnSpc>
+                <a:spcPct val="100000"/>
+              </a:lnSpc>
+            </a:pPr>
+            <a:r>
+              <a:rPr sz="1150" b="1" i="0">
+                <a:solidFill>
+                  <a:srgbClr val="E8F1F8"/>
+                </a:solidFill>
+                <a:latin typeface="Segoe UI"/>
+              </a:rPr>
+              <a:t>EVK-X20P · base</a:t>
+            </a:r>
+          </a:p>
+        </p:txBody>
+      </p:sp>
+      <p:sp>
+        <p:nvSpPr>
+          <p:cNvPr id="19" name="TextBox 18"/>
+          <p:cNvSpPr txBox="1"/>
+          <p:nvPr/>
+        </p:nvSpPr>
+        <p:spPr>
+          <a:xfrm>
+            <a:off x="969264" y="3090672"/>
+            <a:ext cx="1819656" cy="685800"/>
+          </a:xfrm>
+          <a:prstGeom prst="rect">
+            <a:avLst/>
+          </a:prstGeom>
+          <a:noFill/>
+        </p:spPr>
+        <p:txBody>
+          <a:bodyPr wrap="square" anchor="t" lIns="0" rIns="0" tIns="0" bIns="0">
+            <a:spAutoFit/>
+          </a:bodyPr>
+          <a:lstStyle/>
+          <a:p>
+            <a:pPr algn="l">
+              <a:lnSpc>
+                <a:spcPct val="115000"/>
+              </a:lnSpc>
+            </a:pPr>
+            <a:r>
+              <a:rPr sz="900" b="0" i="0">
+                <a:solidFill>
+                  <a:srgbClr val="93A6B8"/>
+                </a:solidFill>
+                <a:latin typeface="Segoe UI"/>
+              </a:rPr>
+              <a:t>Survey-In </a:t>
+            </a:r>
+            <a:r>
+              <a:rPr sz="900" b="1" i="0">
+                <a:solidFill>
+                  <a:srgbClr val="E8F1F8"/>
+                </a:solidFill>
+                <a:latin typeface="Segoe UI"/>
+              </a:rPr>
+              <a:t>uma vez</a:t>
+            </a:r>
+            <a:r>
+              <a:rPr sz="900" b="0" i="0">
+                <a:solidFill>
+                  <a:srgbClr val="93A6B8"/>
+                </a:solidFill>
+                <a:latin typeface="Segoe UI"/>
+              </a:rPr>
+              <a:t>, na montagem</a:t>
+            </a:r>
+          </a:p>
+          <a:p>
+            <a:pPr algn="l">
+              <a:lnSpc>
+                <a:spcPct val="115000"/>
+              </a:lnSpc>
+            </a:pPr>
+            <a:r>
+              <a:rPr sz="900" b="0" i="0">
+                <a:solidFill>
+                  <a:srgbClr val="93A6B8"/>
+                </a:solidFill>
+                <a:latin typeface="Segoe UI"/>
+              </a:rPr>
+              <a:t>gravado </a:t>
+            </a:r>
+            <a:r>
+              <a:rPr sz="900" b="0" i="0">
+                <a:solidFill>
+                  <a:srgbClr val="93A6B8"/>
+                </a:solidFill>
+                <a:latin typeface="Consolas"/>
+              </a:rPr>
+              <a:t>CFG-TMODE = FIXED</a:t>
+            </a:r>
+          </a:p>
+          <a:p>
+            <a:pPr algn="l">
+              <a:lnSpc>
+                <a:spcPct val="115000"/>
+              </a:lnSpc>
+            </a:pPr>
+            <a:r>
+              <a:rPr sz="900" b="0" i="0">
+                <a:solidFill>
+                  <a:srgbClr val="93A6B8"/>
+                </a:solidFill>
+                <a:latin typeface="Segoe UI"/>
+              </a:rPr>
+              <a:t>emite 1005 · 1074 · 1084</a:t>
+            </a:r>
+          </a:p>
+          <a:p>
+            <a:pPr algn="l">
+              <a:lnSpc>
+                <a:spcPct val="115000"/>
+              </a:lnSpc>
+            </a:pPr>
+            <a:r>
+              <a:rPr sz="900" b="0" i="0">
+                <a:solidFill>
+                  <a:srgbClr val="93A6B8"/>
+                </a:solidFill>
+                <a:latin typeface="Segoe UI"/>
+              </a:rPr>
+              <a:t>1094 · 1124 · 1230 (MSM4)</a:t>
+            </a:r>
+          </a:p>
+        </p:txBody>
+      </p:sp>
+      <p:sp>
+        <p:nvSpPr>
+          <p:cNvPr id="20" name="Rounded Rectangle 19"/>
           <p:cNvSpPr/>
           <p:nvPr/>
         </p:nvSpPr>
         <p:spPr>
           <a:xfrm>
-            <a:off x="1078992" y="3169920"/>
-            <a:ext cx="402336" cy="402336"/>
-          </a:xfrm>
-          <a:prstGeom prst="ellipse">
-            <a:avLst/>
+            <a:off x="3867912" y="2651760"/>
+            <a:ext cx="2148840" cy="1188720"/>
+          </a:xfrm>
+          <a:prstGeom prst="roundRect">
+            <a:avLst>
+              <a:gd name="adj" fmla="val 7000"/>
+            </a:avLst>
           </a:prstGeom>
           <a:solidFill>
-            <a:srgbClr val="0093D0"/>
+            <a:srgbClr val="EDF3F8"/>
+          </a:solidFill>
+          <a:ln w="12700">
+            <a:solidFill>
+              <a:srgbClr val="D3E0EB"/>
+            </a:solidFill>
+          </a:ln>
+          <a:effectLst/>
+        </p:spPr>
+        <p:style>
+          <a:lnRef idx="1">
+            <a:schemeClr val="accent1"/>
+          </a:lnRef>
+          <a:fillRef idx="3">
+            <a:schemeClr val="accent1"/>
+          </a:fillRef>
+          <a:effectRef idx="2">
+            <a:schemeClr val="accent1"/>
+          </a:effectRef>
+          <a:fontRef idx="minor">
+            <a:schemeClr val="lt1"/>
+          </a:fontRef>
+        </p:style>
+        <p:txBody>
+          <a:bodyPr rtlCol="0" anchor="ctr"/>
+          <a:lstStyle/>
+          <a:p>
+            <a:pPr algn="ctr"/>
+          </a:p>
+        </p:txBody>
+      </p:sp>
+      <p:sp>
+        <p:nvSpPr>
+          <p:cNvPr id="21" name="TextBox 20"/>
+          <p:cNvSpPr txBox="1"/>
+          <p:nvPr/>
+        </p:nvSpPr>
+        <p:spPr>
+          <a:xfrm>
+            <a:off x="4032504" y="2761488"/>
+            <a:ext cx="1819656" cy="292608"/>
+          </a:xfrm>
+          <a:prstGeom prst="rect">
+            <a:avLst/>
+          </a:prstGeom>
+          <a:noFill/>
+        </p:spPr>
+        <p:txBody>
+          <a:bodyPr wrap="square" anchor="t" lIns="0" rIns="0" tIns="0" bIns="0">
+            <a:spAutoFit/>
+          </a:bodyPr>
+          <a:lstStyle/>
+          <a:p>
+            <a:pPr algn="l">
+              <a:lnSpc>
+                <a:spcPct val="100000"/>
+              </a:lnSpc>
+            </a:pPr>
+            <a:r>
+              <a:rPr sz="1150" b="1" i="0">
+                <a:solidFill>
+                  <a:srgbClr val="0B1B2B"/>
+                </a:solidFill>
+                <a:latin typeface="Segoe UI"/>
+              </a:rPr>
+              <a:t>notebook · u-center 2</a:t>
+            </a:r>
+          </a:p>
+        </p:txBody>
+      </p:sp>
+      <p:sp>
+        <p:nvSpPr>
+          <p:cNvPr id="22" name="TextBox 21"/>
+          <p:cNvSpPr txBox="1"/>
+          <p:nvPr/>
+        </p:nvSpPr>
+        <p:spPr>
+          <a:xfrm>
+            <a:off x="4032504" y="3090672"/>
+            <a:ext cx="1819656" cy="685800"/>
+          </a:xfrm>
+          <a:prstGeom prst="rect">
+            <a:avLst/>
+          </a:prstGeom>
+          <a:noFill/>
+        </p:spPr>
+        <p:txBody>
+          <a:bodyPr wrap="square" anchor="t" lIns="0" rIns="0" tIns="0" bIns="0">
+            <a:spAutoFit/>
+          </a:bodyPr>
+          <a:lstStyle/>
+          <a:p>
+            <a:pPr algn="l">
+              <a:lnSpc>
+                <a:spcPct val="115000"/>
+              </a:lnSpc>
+            </a:pPr>
+            <a:r>
+              <a:rPr sz="900" b="0" i="0">
+                <a:solidFill>
+                  <a:srgbClr val="566577"/>
+                </a:solidFill>
+                <a:latin typeface="Segoe UI"/>
+              </a:rPr>
+              <a:t>caster NTRIP embutido</a:t>
+            </a:r>
+          </a:p>
+          <a:p>
+            <a:pPr algn="l">
+              <a:lnSpc>
+                <a:spcPct val="115000"/>
+              </a:lnSpc>
+            </a:pPr>
+            <a:r>
+              <a:rPr sz="900" b="0" i="0">
+                <a:solidFill>
+                  <a:srgbClr val="566577"/>
+                </a:solidFill>
+                <a:latin typeface="Segoe UI"/>
+              </a:rPr>
+              <a:t>(porta liberada no firewall)</a:t>
+            </a:r>
+          </a:p>
+          <a:p>
+            <a:pPr algn="l">
+              <a:lnSpc>
+                <a:spcPct val="115000"/>
+              </a:lnSpc>
+            </a:pPr>
+            <a:r>
+              <a:rPr sz="900" b="0" i="0">
+                <a:solidFill>
+                  <a:srgbClr val="566577"/>
+                </a:solidFill>
+                <a:latin typeface="Segoe UI"/>
+              </a:rPr>
+              <a:t>rede local, </a:t>
+            </a:r>
+            <a:r>
+              <a:rPr sz="900" b="1" i="0">
+                <a:solidFill>
+                  <a:srgbClr val="0B1B2B"/>
+                </a:solidFill>
+                <a:latin typeface="Segoe UI"/>
+              </a:rPr>
+              <a:t>sem internet</a:t>
+            </a:r>
+          </a:p>
+        </p:txBody>
+      </p:sp>
+      <p:sp>
+        <p:nvSpPr>
+          <p:cNvPr id="23" name="Rounded Rectangle 22"/>
+          <p:cNvSpPr/>
+          <p:nvPr/>
+        </p:nvSpPr>
+        <p:spPr>
+          <a:xfrm>
+            <a:off x="6931152" y="2651760"/>
+            <a:ext cx="2148840" cy="1188720"/>
+          </a:xfrm>
+          <a:prstGeom prst="roundRect">
+            <a:avLst>
+              <a:gd name="adj" fmla="val 7000"/>
+            </a:avLst>
+          </a:prstGeom>
+          <a:solidFill>
+            <a:srgbClr val="00224E"/>
           </a:solidFill>
           <a:ln>
             <a:noFill/>
@@ -10721,14 +11209,14 @@
       </p:sp>
       <p:sp>
         <p:nvSpPr>
-          <p:cNvPr id="20" name="TextBox 19"/>
+          <p:cNvPr id="24" name="TextBox 23"/>
           <p:cNvSpPr txBox="1"/>
           <p:nvPr/>
         </p:nvSpPr>
         <p:spPr>
           <a:xfrm>
-            <a:off x="1078992" y="3215640"/>
-            <a:ext cx="402336" cy="320040"/>
+            <a:off x="7095744" y="2761488"/>
+            <a:ext cx="1819656" cy="292608"/>
           </a:xfrm>
           <a:prstGeom prst="rect">
             <a:avLst/>
@@ -10741,33 +11229,33 @@
           </a:bodyPr>
           <a:lstStyle/>
           <a:p>
-            <a:pPr algn="ctr">
+            <a:pPr algn="l">
               <a:lnSpc>
                 <a:spcPct val="100000"/>
               </a:lnSpc>
             </a:pPr>
             <a:r>
-              <a:rPr sz="1500" b="1" i="0">
-                <a:solidFill>
-                  <a:srgbClr val="FFFFFF"/>
-                </a:solidFill>
-                <a:latin typeface="Segoe UI"/>
-              </a:rPr>
-              <a:t>3</a:t>
-            </a:r>
-          </a:p>
-        </p:txBody>
-      </p:sp>
-      <p:sp>
-        <p:nvSpPr>
-          <p:cNvPr id="21" name="TextBox 20"/>
+              <a:rPr sz="1150" b="1" i="0">
+                <a:solidFill>
+                  <a:srgbClr val="E8F1F8"/>
+                </a:solidFill>
+                <a:latin typeface="Segoe UI"/>
+              </a:rPr>
+              <a:t>EVK-X20P · rover</a:t>
+            </a:r>
+          </a:p>
+        </p:txBody>
+      </p:sp>
+      <p:sp>
+        <p:nvSpPr>
+          <p:cNvPr id="25" name="TextBox 24"/>
           <p:cNvSpPr txBox="1"/>
           <p:nvPr/>
         </p:nvSpPr>
         <p:spPr>
           <a:xfrm>
-            <a:off x="1764792" y="3142488"/>
-            <a:ext cx="8936431" cy="292608"/>
+            <a:off x="7095744" y="3090672"/>
+            <a:ext cx="1819656" cy="685800"/>
           </a:xfrm>
           <a:prstGeom prst="rect">
             <a:avLst/>
@@ -10782,79 +11270,76 @@
           <a:p>
             <a:pPr algn="l">
               <a:lnSpc>
-                <a:spcPct val="100000"/>
-              </a:lnSpc>
-            </a:pPr>
-            <a:r>
-              <a:rPr sz="1500" b="1" i="0">
-                <a:solidFill>
-                  <a:srgbClr val="0B1B2B"/>
-                </a:solidFill>
-                <a:latin typeface="Segoe UI"/>
-              </a:rPr>
-              <a:t>Degrau 2: o rover autônomo, na antena B</a:t>
-            </a:r>
-          </a:p>
-        </p:txBody>
-      </p:sp>
-      <p:sp>
-        <p:nvSpPr>
-          <p:cNvPr id="22" name="TextBox 21"/>
-          <p:cNvSpPr txBox="1"/>
-          <p:nvPr/>
-        </p:nvSpPr>
-        <p:spPr>
-          <a:xfrm>
-            <a:off x="1764792" y="3453384"/>
-            <a:ext cx="8936431" cy="320040"/>
-          </a:xfrm>
-          <a:prstGeom prst="rect">
-            <a:avLst/>
-          </a:prstGeom>
-          <a:noFill/>
-        </p:spPr>
-        <p:txBody>
-          <a:bodyPr wrap="square" anchor="t" lIns="0" rIns="0" tIns="0" bIns="0">
-            <a:spAutoFit/>
-          </a:bodyPr>
-          <a:lstStyle/>
+                <a:spcPct val="115000"/>
+              </a:lnSpc>
+            </a:pPr>
+            <a:r>
+              <a:rPr sz="900" b="0" i="0">
+                <a:solidFill>
+                  <a:srgbClr val="93A6B8"/>
+                </a:solidFill>
+                <a:latin typeface="Segoe UI"/>
+              </a:rPr>
+              <a:t>degrau 2: autônomo</a:t>
+            </a:r>
+          </a:p>
           <a:p>
             <a:pPr algn="l">
               <a:lnSpc>
-                <a:spcPct val="100000"/>
-              </a:lnSpc>
-            </a:pPr>
-            <a:r>
-              <a:rPr sz="1250" b="0" i="0">
-                <a:solidFill>
-                  <a:srgbClr val="566577"/>
-                </a:solidFill>
-                <a:latin typeface="Segoe UI"/>
-              </a:rPr>
-              <a:t>ao mesmo tempo que o degrau 1: o que a multibanda faz antes de qualquer correção. Decimétrico.</a:t>
-            </a:r>
-          </a:p>
-        </p:txBody>
-      </p:sp>
-      <p:sp>
-        <p:nvSpPr>
-          <p:cNvPr id="23" name="Rectangle 22"/>
+                <a:spcPct val="115000"/>
+              </a:lnSpc>
+            </a:pPr>
+            <a:r>
+              <a:rPr sz="900" b="0" i="0">
+                <a:solidFill>
+                  <a:srgbClr val="93A6B8"/>
+                </a:solidFill>
+                <a:latin typeface="Segoe UI"/>
+              </a:rPr>
+              <a:t>degrau 3: cliente NTRIP no</a:t>
+            </a:r>
+          </a:p>
+          <a:p>
+            <a:pPr algn="l">
+              <a:lnSpc>
+                <a:spcPct val="115000"/>
+              </a:lnSpc>
+            </a:pPr>
+            <a:r>
+              <a:rPr sz="900" b="0" i="0">
+                <a:solidFill>
+                  <a:srgbClr val="93A6B8"/>
+                </a:solidFill>
+                <a:latin typeface="Segoe UI"/>
+              </a:rPr>
+              <a:t>u-center 2, RTCM pela serial</a:t>
+            </a:r>
+          </a:p>
+        </p:txBody>
+      </p:sp>
+      <p:sp>
+        <p:nvSpPr>
+          <p:cNvPr id="26" name="Rounded Rectangle 25"/>
           <p:cNvSpPr/>
           <p:nvPr/>
         </p:nvSpPr>
         <p:spPr>
           <a:xfrm>
-            <a:off x="1261872" y="4384548"/>
-            <a:ext cx="25400" cy="464820"/>
-          </a:xfrm>
-          <a:prstGeom prst="rect">
-            <a:avLst/>
+            <a:off x="9262872" y="2651760"/>
+            <a:ext cx="2148840" cy="1188720"/>
+          </a:xfrm>
+          <a:prstGeom prst="roundRect">
+            <a:avLst>
+              <a:gd name="adj" fmla="val 7000"/>
+            </a:avLst>
           </a:prstGeom>
           <a:solidFill>
-            <a:srgbClr val="D3E0EB"/>
+            <a:srgbClr val="EDF3F8"/>
           </a:solidFill>
-          <a:ln>
-            <a:noFill/>
+          <a:ln w="12700">
+            <a:solidFill>
+              <a:srgbClr val="D3E0EB"/>
+            </a:solidFill>
           </a:ln>
           <a:effectLst/>
         </p:spPr>
@@ -10882,58 +11367,14 @@
       </p:sp>
       <p:sp>
         <p:nvSpPr>
-          <p:cNvPr id="24" name="Oval 23"/>
-          <p:cNvSpPr/>
-          <p:nvPr/>
-        </p:nvSpPr>
-        <p:spPr>
-          <a:xfrm>
-            <a:off x="1078992" y="3954780"/>
-            <a:ext cx="402336" cy="402336"/>
-          </a:xfrm>
-          <a:prstGeom prst="ellipse">
-            <a:avLst/>
-          </a:prstGeom>
-          <a:solidFill>
-            <a:srgbClr val="0093D0"/>
-          </a:solidFill>
-          <a:ln>
-            <a:noFill/>
-          </a:ln>
-          <a:effectLst/>
-        </p:spPr>
-        <p:style>
-          <a:lnRef idx="1">
-            <a:schemeClr val="accent1"/>
-          </a:lnRef>
-          <a:fillRef idx="3">
-            <a:schemeClr val="accent1"/>
-          </a:fillRef>
-          <a:effectRef idx="2">
-            <a:schemeClr val="accent1"/>
-          </a:effectRef>
-          <a:fontRef idx="minor">
-            <a:schemeClr val="lt1"/>
-          </a:fontRef>
-        </p:style>
-        <p:txBody>
-          <a:bodyPr rtlCol="0" anchor="ctr"/>
-          <a:lstStyle/>
-          <a:p>
-            <a:pPr algn="ctr"/>
-          </a:p>
-        </p:txBody>
-      </p:sp>
-      <p:sp>
-        <p:nvSpPr>
-          <p:cNvPr id="25" name="TextBox 24"/>
+          <p:cNvPr id="27" name="TextBox 26"/>
           <p:cNvSpPr txBox="1"/>
           <p:nvPr/>
         </p:nvSpPr>
         <p:spPr>
           <a:xfrm>
-            <a:off x="1078992" y="4000500"/>
-            <a:ext cx="402336" cy="320040"/>
+            <a:off x="9427464" y="2761488"/>
+            <a:ext cx="1819656" cy="292608"/>
           </a:xfrm>
           <a:prstGeom prst="rect">
             <a:avLst/>
@@ -10946,33 +11387,33 @@
           </a:bodyPr>
           <a:lstStyle/>
           <a:p>
-            <a:pPr algn="ctr">
+            <a:pPr algn="l">
               <a:lnSpc>
                 <a:spcPct val="100000"/>
               </a:lnSpc>
             </a:pPr>
             <a:r>
-              <a:rPr sz="1500" b="1" i="0">
-                <a:solidFill>
-                  <a:srgbClr val="FFFFFF"/>
-                </a:solidFill>
-                <a:latin typeface="Segoe UI"/>
-              </a:rPr>
-              <a:t>4</a:t>
-            </a:r>
-          </a:p>
-        </p:txBody>
-      </p:sp>
-      <p:sp>
-        <p:nvSpPr>
-          <p:cNvPr id="26" name="TextBox 25"/>
+              <a:rPr sz="1150" b="1" i="0">
+                <a:solidFill>
+                  <a:srgbClr val="0B1B2B"/>
+                </a:solidFill>
+                <a:latin typeface="Segoe UI"/>
+              </a:rPr>
+              <a:t>nRF9151 SMA-DK</a:t>
+            </a:r>
+          </a:p>
+        </p:txBody>
+      </p:sp>
+      <p:sp>
+        <p:nvSpPr>
+          <p:cNvPr id="28" name="TextBox 27"/>
           <p:cNvSpPr txBox="1"/>
           <p:nvPr/>
         </p:nvSpPr>
         <p:spPr>
           <a:xfrm>
-            <a:off x="1764792" y="3927348"/>
-            <a:ext cx="8936431" cy="292608"/>
+            <a:off x="9427464" y="3090672"/>
+            <a:ext cx="1819656" cy="685800"/>
           </a:xfrm>
           <a:prstGeom prst="rect">
             <a:avLst/>
@@ -10987,31 +11428,99 @@
           <a:p>
             <a:pPr algn="l">
               <a:lnSpc>
-                <a:spcPct val="100000"/>
-              </a:lnSpc>
-            </a:pPr>
-            <a:r>
-              <a:rPr sz="1500" b="1" i="0">
-                <a:solidFill>
-                  <a:srgbClr val="0B1B2B"/>
-                </a:solidFill>
-                <a:latin typeface="Segoe UI"/>
-              </a:rPr>
-              <a:t>Degrau 3: o rover com a correção da base</a:t>
-            </a:r>
-          </a:p>
-        </p:txBody>
-      </p:sp>
-      <p:sp>
-        <p:nvSpPr>
-          <p:cNvPr id="27" name="TextBox 26"/>
+                <a:spcPct val="115000"/>
+              </a:lnSpc>
+            </a:pPr>
+            <a:r>
+              <a:rPr sz="900" b="0" i="0">
+                <a:solidFill>
+                  <a:srgbClr val="566577"/>
+                </a:solidFill>
+                <a:latin typeface="Segoe UI"/>
+              </a:rPr>
+              <a:t>degrau 1: firmware do lab 3</a:t>
+            </a:r>
+          </a:p>
+          <a:p>
+            <a:pPr algn="l">
+              <a:lnSpc>
+                <a:spcPct val="115000"/>
+              </a:lnSpc>
+            </a:pPr>
+            <a:r>
+              <a:rPr sz="900" b="0" i="0">
+                <a:solidFill>
+                  <a:srgbClr val="566577"/>
+                </a:solidFill>
+                <a:latin typeface="Segoe UI"/>
+              </a:rPr>
+              <a:t>(NMEA limpo) capturado por</a:t>
+            </a:r>
+          </a:p>
+          <a:p>
+            <a:pPr algn="l">
+              <a:lnSpc>
+                <a:spcPct val="115000"/>
+              </a:lnSpc>
+            </a:pPr>
+            <a:r>
+              <a:rPr sz="900" b="0" i="0">
+                <a:solidFill>
+                  <a:srgbClr val="566577"/>
+                </a:solidFill>
+                <a:latin typeface="Consolas"/>
+              </a:rPr>
+              <a:t>nmea_captura.py</a:t>
+            </a:r>
+          </a:p>
+        </p:txBody>
+      </p:sp>
+      <p:cxnSp>
+        <p:nvCxnSpPr>
+          <p:cNvPr id="29" name="Connector 28"/>
+          <p:cNvCxnSpPr/>
+          <p:nvPr/>
+        </p:nvCxnSpPr>
+        <p:spPr>
+          <a:xfrm>
+            <a:off x="2953512" y="3246120"/>
+            <a:ext cx="914400" cy="0"/>
+          </a:xfrm>
+          <a:prstGeom prst="line">
+            <a:avLst/>
+          </a:prstGeom>
+          <a:ln w="25400">
+            <a:solidFill>
+              <a:srgbClr val="0093D0"/>
+            </a:solidFill>
+            <a:tailEnd type="triangle" w="med" len="med"/>
+          </a:ln>
+        </p:spPr>
+        <p:style>
+          <a:lnRef idx="2">
+            <a:schemeClr val="accent1"/>
+          </a:lnRef>
+          <a:fillRef idx="0">
+            <a:schemeClr val="accent1"/>
+          </a:fillRef>
+          <a:effectRef idx="1">
+            <a:schemeClr val="accent1"/>
+          </a:effectRef>
+          <a:fontRef idx="minor">
+            <a:schemeClr val="tx1"/>
+          </a:fontRef>
+        </p:style>
+      </p:cxnSp>
+      <p:sp>
+        <p:nvSpPr>
+          <p:cNvPr id="30" name="TextBox 29"/>
           <p:cNvSpPr txBox="1"/>
           <p:nvPr/>
         </p:nvSpPr>
         <p:spPr>
           <a:xfrm>
-            <a:off x="1764792" y="4238244"/>
-            <a:ext cx="8936431" cy="320040"/>
+            <a:off x="2862072" y="2862072"/>
+            <a:ext cx="1188720" cy="237744"/>
           </a:xfrm>
           <a:prstGeom prst="rect">
             <a:avLst/>
@@ -11024,121 +11533,69 @@
           </a:bodyPr>
           <a:lstStyle/>
           <a:p>
-            <a:pPr algn="l">
+            <a:pPr algn="ctr">
               <a:lnSpc>
                 <a:spcPct val="100000"/>
               </a:lnSpc>
             </a:pPr>
             <a:r>
-              <a:rPr sz="1250" b="0" i="0">
-                <a:solidFill>
-                  <a:srgbClr val="566577"/>
-                </a:solidFill>
-                <a:latin typeface="Segoe UI"/>
-              </a:rPr>
-              <a:t>narrar 3D → 3D/DGNSS → Float → Fixed enquanto acontece. Ligar o rover com antecedência: a primeira fixação leva minutos, refixar leva segundos.</a:t>
-            </a:r>
-          </a:p>
-        </p:txBody>
-      </p:sp>
-      <p:sp>
-        <p:nvSpPr>
-          <p:cNvPr id="28" name="Rectangle 27"/>
-          <p:cNvSpPr/>
-          <p:nvPr/>
-        </p:nvSpPr>
-        <p:spPr>
-          <a:xfrm>
-            <a:off x="1261872" y="5169408"/>
-            <a:ext cx="25400" cy="464820"/>
-          </a:xfrm>
-          <a:prstGeom prst="rect">
-            <a:avLst/>
-          </a:prstGeom>
-          <a:solidFill>
-            <a:srgbClr val="D3E0EB"/>
-          </a:solidFill>
-          <a:ln>
-            <a:noFill/>
+              <a:rPr sz="900" b="1" i="0">
+                <a:solidFill>
+                  <a:srgbClr val="0093D0"/>
+                </a:solidFill>
+                <a:latin typeface="Segoe UI"/>
+              </a:rPr>
+              <a:t>RTCM3, serial</a:t>
+            </a:r>
+          </a:p>
+        </p:txBody>
+      </p:sp>
+      <p:cxnSp>
+        <p:nvCxnSpPr>
+          <p:cNvPr id="31" name="Connector 30"/>
+          <p:cNvCxnSpPr/>
+          <p:nvPr/>
+        </p:nvCxnSpPr>
+        <p:spPr>
+          <a:xfrm>
+            <a:off x="6016752" y="3246120"/>
+            <a:ext cx="914400" cy="0"/>
+          </a:xfrm>
+          <a:prstGeom prst="line">
+            <a:avLst/>
+          </a:prstGeom>
+          <a:ln w="25400">
+            <a:solidFill>
+              <a:srgbClr val="1FA971"/>
+            </a:solidFill>
+            <a:tailEnd type="triangle" w="med" len="med"/>
           </a:ln>
-          <a:effectLst/>
         </p:spPr>
         <p:style>
-          <a:lnRef idx="1">
+          <a:lnRef idx="2">
             <a:schemeClr val="accent1"/>
           </a:lnRef>
-          <a:fillRef idx="3">
+          <a:fillRef idx="0">
             <a:schemeClr val="accent1"/>
           </a:fillRef>
-          <a:effectRef idx="2">
+          <a:effectRef idx="1">
             <a:schemeClr val="accent1"/>
           </a:effectRef>
           <a:fontRef idx="minor">
-            <a:schemeClr val="lt1"/>
+            <a:schemeClr val="tx1"/>
           </a:fontRef>
         </p:style>
-        <p:txBody>
-          <a:bodyPr rtlCol="0" anchor="ctr"/>
-          <a:lstStyle/>
-          <a:p>
-            <a:pPr algn="ctr"/>
-          </a:p>
-        </p:txBody>
-      </p:sp>
-      <p:sp>
-        <p:nvSpPr>
-          <p:cNvPr id="29" name="Oval 28"/>
-          <p:cNvSpPr/>
-          <p:nvPr/>
-        </p:nvSpPr>
-        <p:spPr>
-          <a:xfrm>
-            <a:off x="1078992" y="4739640"/>
-            <a:ext cx="402336" cy="402336"/>
-          </a:xfrm>
-          <a:prstGeom prst="ellipse">
-            <a:avLst/>
-          </a:prstGeom>
-          <a:solidFill>
-            <a:srgbClr val="0093D0"/>
-          </a:solidFill>
-          <a:ln>
-            <a:noFill/>
-          </a:ln>
-          <a:effectLst/>
-        </p:spPr>
-        <p:style>
-          <a:lnRef idx="1">
-            <a:schemeClr val="accent1"/>
-          </a:lnRef>
-          <a:fillRef idx="3">
-            <a:schemeClr val="accent1"/>
-          </a:fillRef>
-          <a:effectRef idx="2">
-            <a:schemeClr val="accent1"/>
-          </a:effectRef>
-          <a:fontRef idx="minor">
-            <a:schemeClr val="lt1"/>
-          </a:fontRef>
-        </p:style>
-        <p:txBody>
-          <a:bodyPr rtlCol="0" anchor="ctr"/>
-          <a:lstStyle/>
-          <a:p>
-            <a:pPr algn="ctr"/>
-          </a:p>
-        </p:txBody>
-      </p:sp>
-      <p:sp>
-        <p:nvSpPr>
-          <p:cNvPr id="30" name="TextBox 29"/>
+      </p:cxnSp>
+      <p:sp>
+        <p:nvSpPr>
+          <p:cNvPr id="32" name="TextBox 31"/>
           <p:cNvSpPr txBox="1"/>
           <p:nvPr/>
         </p:nvSpPr>
         <p:spPr>
           <a:xfrm>
-            <a:off x="1078992" y="4785360"/>
-            <a:ext cx="402336" cy="320040"/>
+            <a:off x="5925312" y="2862072"/>
+            <a:ext cx="1188720" cy="237744"/>
           </a:xfrm>
           <a:prstGeom prst="rect">
             <a:avLst/>
@@ -11157,27 +11614,132 @@
               </a:lnSpc>
             </a:pPr>
             <a:r>
-              <a:rPr sz="1500" b="1" i="0">
-                <a:solidFill>
-                  <a:srgbClr val="FFFFFF"/>
-                </a:solidFill>
-                <a:latin typeface="Segoe UI"/>
-              </a:rPr>
-              <a:t>5</a:t>
-            </a:r>
-          </a:p>
-        </p:txBody>
-      </p:sp>
-      <p:sp>
-        <p:nvSpPr>
-          <p:cNvPr id="31" name="TextBox 30"/>
+              <a:rPr sz="900" b="1" i="0">
+                <a:solidFill>
+                  <a:srgbClr val="1FA971"/>
+                </a:solidFill>
+                <a:latin typeface="Segoe UI"/>
+              </a:rPr>
+              <a:t>rede local</a:t>
+            </a:r>
+          </a:p>
+        </p:txBody>
+      </p:sp>
+      <p:cxnSp>
+        <p:nvCxnSpPr>
+          <p:cNvPr id="33" name="Connector 32"/>
+          <p:cNvCxnSpPr/>
+          <p:nvPr/>
+        </p:nvCxnSpPr>
+        <p:spPr>
+          <a:xfrm>
+            <a:off x="6931152" y="4069080"/>
+            <a:ext cx="4480560" cy="0"/>
+          </a:xfrm>
+          <a:prstGeom prst="line">
+            <a:avLst/>
+          </a:prstGeom>
+          <a:ln w="15875">
+            <a:solidFill>
+              <a:srgbClr val="566577"/>
+            </a:solidFill>
+          </a:ln>
+        </p:spPr>
+        <p:style>
+          <a:lnRef idx="2">
+            <a:schemeClr val="accent1"/>
+          </a:lnRef>
+          <a:fillRef idx="0">
+            <a:schemeClr val="accent1"/>
+          </a:fillRef>
+          <a:effectRef idx="1">
+            <a:schemeClr val="accent1"/>
+          </a:effectRef>
+          <a:fontRef idx="minor">
+            <a:schemeClr val="tx1"/>
+          </a:fontRef>
+        </p:style>
+      </p:cxnSp>
+      <p:cxnSp>
+        <p:nvCxnSpPr>
+          <p:cNvPr id="34" name="Connector 33"/>
+          <p:cNvCxnSpPr/>
+          <p:nvPr/>
+        </p:nvCxnSpPr>
+        <p:spPr>
+          <a:xfrm>
+            <a:off x="6931152" y="4069080"/>
+            <a:ext cx="0" cy="109728"/>
+          </a:xfrm>
+          <a:prstGeom prst="line">
+            <a:avLst/>
+          </a:prstGeom>
+          <a:ln w="15875">
+            <a:solidFill>
+              <a:srgbClr val="566577"/>
+            </a:solidFill>
+          </a:ln>
+        </p:spPr>
+        <p:style>
+          <a:lnRef idx="2">
+            <a:schemeClr val="accent1"/>
+          </a:lnRef>
+          <a:fillRef idx="0">
+            <a:schemeClr val="accent1"/>
+          </a:fillRef>
+          <a:effectRef idx="1">
+            <a:schemeClr val="accent1"/>
+          </a:effectRef>
+          <a:fontRef idx="minor">
+            <a:schemeClr val="tx1"/>
+          </a:fontRef>
+        </p:style>
+      </p:cxnSp>
+      <p:cxnSp>
+        <p:nvCxnSpPr>
+          <p:cNvPr id="35" name="Connector 34"/>
+          <p:cNvCxnSpPr/>
+          <p:nvPr/>
+        </p:nvCxnSpPr>
+        <p:spPr>
+          <a:xfrm>
+            <a:off x="11411712" y="4069080"/>
+            <a:ext cx="0" cy="109728"/>
+          </a:xfrm>
+          <a:prstGeom prst="line">
+            <a:avLst/>
+          </a:prstGeom>
+          <a:ln w="15875">
+            <a:solidFill>
+              <a:srgbClr val="566577"/>
+            </a:solidFill>
+          </a:ln>
+        </p:spPr>
+        <p:style>
+          <a:lnRef idx="2">
+            <a:schemeClr val="accent1"/>
+          </a:lnRef>
+          <a:fillRef idx="0">
+            <a:schemeClr val="accent1"/>
+          </a:fillRef>
+          <a:effectRef idx="1">
+            <a:schemeClr val="accent1"/>
+          </a:effectRef>
+          <a:fontRef idx="minor">
+            <a:schemeClr val="tx1"/>
+          </a:fontRef>
+        </p:style>
+      </p:cxnSp>
+      <p:sp>
+        <p:nvSpPr>
+          <p:cNvPr id="36" name="TextBox 35"/>
           <p:cNvSpPr txBox="1"/>
           <p:nvPr/>
         </p:nvSpPr>
         <p:spPr>
           <a:xfrm>
-            <a:off x="1764792" y="4712208"/>
-            <a:ext cx="8936431" cy="292608"/>
+            <a:off x="6931152" y="3794760"/>
+            <a:ext cx="4480560" cy="256032"/>
           </a:xfrm>
           <a:prstGeom prst="rect">
             <a:avLst/>
@@ -11190,33 +11752,24 @@
           </a:bodyPr>
           <a:lstStyle/>
           <a:p>
-            <a:pPr algn="l">
+            <a:pPr algn="ctr">
               <a:lnSpc>
                 <a:spcPct val="100000"/>
               </a:lnSpc>
             </a:pPr>
-            <a:r>
-              <a:rPr sz="1500" b="1" i="0">
-                <a:solidFill>
-                  <a:srgbClr val="0B1B2B"/>
-                </a:solidFill>
-                <a:latin typeface="Segoe UI"/>
-              </a:rPr>
-              <a:t>O laço que fecha o módulo</a:t>
-            </a:r>
-          </a:p>
-        </p:txBody>
-      </p:sp>
-      <p:sp>
-        <p:nvSpPr>
-          <p:cNvPr id="32" name="TextBox 31"/>
+          </a:p>
+        </p:txBody>
+      </p:sp>
+      <p:sp>
+        <p:nvSpPr>
+          <p:cNvPr id="37" name="TextBox 36"/>
           <p:cNvSpPr txBox="1"/>
           <p:nvPr/>
         </p:nvSpPr>
         <p:spPr>
           <a:xfrm>
-            <a:off x="1764792" y="5023104"/>
-            <a:ext cx="8936431" cy="320040"/>
+            <a:off x="6931152" y="4215384"/>
+            <a:ext cx="4480560" cy="274320"/>
           </a:xfrm>
           <a:prstGeom prst="rect">
             <a:avLst/>
@@ -11229,77 +11782,51 @@
           </a:bodyPr>
           <a:lstStyle/>
           <a:p>
-            <a:pPr algn="l">
+            <a:pPr algn="ctr">
               <a:lnSpc>
                 <a:spcPct val="100000"/>
               </a:lnSpc>
             </a:pPr>
             <a:r>
-              <a:rPr sz="1250" b="0" i="0">
-                <a:solidFill>
-                  <a:srgbClr val="566577"/>
-                </a:solidFill>
-                <a:latin typeface="Segoe UI"/>
-              </a:rPr>
-              <a:t>a coordenada do fix RTK volta como CONFIG_GNSS_SAMPLE_REFERENCE_LATITUDE/LONGITUDE no build do lab 1: a placa passa a reportar o próprio erro contra uma referência medida em sala.</a:t>
-            </a:r>
-          </a:p>
-        </p:txBody>
-      </p:sp>
-      <p:sp>
-        <p:nvSpPr>
-          <p:cNvPr id="33" name="Oval 32"/>
-          <p:cNvSpPr/>
-          <p:nvPr/>
-        </p:nvSpPr>
-        <p:spPr>
-          <a:xfrm>
-            <a:off x="1078992" y="5524500"/>
-            <a:ext cx="402336" cy="402336"/>
-          </a:xfrm>
-          <a:prstGeom prst="ellipse">
-            <a:avLst/>
-          </a:prstGeom>
-          <a:solidFill>
-            <a:srgbClr val="0093D0"/>
-          </a:solidFill>
-          <a:ln>
-            <a:noFill/>
-          </a:ln>
-          <a:effectLst/>
-        </p:spPr>
-        <p:style>
-          <a:lnRef idx="1">
-            <a:schemeClr val="accent1"/>
-          </a:lnRef>
-          <a:fillRef idx="3">
-            <a:schemeClr val="accent1"/>
-          </a:fillRef>
-          <a:effectRef idx="2">
-            <a:schemeClr val="accent1"/>
-          </a:effectRef>
-          <a:fontRef idx="minor">
-            <a:schemeClr val="lt1"/>
-          </a:fontRef>
-        </p:style>
-        <p:txBody>
-          <a:bodyPr rtlCol="0" anchor="ctr"/>
-          <a:lstStyle/>
-          <a:p>
-            <a:pPr algn="ctr"/>
-          </a:p>
-        </p:txBody>
-      </p:sp>
-      <p:sp>
-        <p:nvSpPr>
-          <p:cNvPr id="34" name="TextBox 33"/>
+              <a:rPr sz="1050" b="0" i="0">
+                <a:solidFill>
+                  <a:srgbClr val="0B1B2B"/>
+                </a:solidFill>
+                <a:latin typeface="Segoe UI"/>
+              </a:rPr>
+              <a:t>gravam </a:t>
+            </a:r>
+            <a:r>
+              <a:rPr sz="1050" b="1" i="0">
+                <a:solidFill>
+                  <a:srgbClr val="0B1B2B"/>
+                </a:solidFill>
+                <a:latin typeface="Segoe UI"/>
+              </a:rPr>
+              <a:t>ao mesmo tempo</a:t>
+            </a:r>
+            <a:r>
+              <a:rPr sz="1050" b="0" i="0">
+                <a:solidFill>
+                  <a:srgbClr val="0B1B2B"/>
+                </a:solidFill>
+                <a:latin typeface="Segoe UI"/>
+              </a:rPr>
+              <a:t>: a comparação controla o instante</a:t>
+            </a:r>
+          </a:p>
+        </p:txBody>
+      </p:sp>
+      <p:sp>
+        <p:nvSpPr>
+          <p:cNvPr id="38" name="TextBox 37"/>
           <p:cNvSpPr txBox="1"/>
           <p:nvPr/>
         </p:nvSpPr>
         <p:spPr>
           <a:xfrm>
-            <a:off x="1078992" y="5570220"/>
-            <a:ext cx="402336" cy="320040"/>
+            <a:off x="713232" y="4754880"/>
+            <a:ext cx="10765231" cy="914400"/>
           </a:xfrm>
           <a:prstGeom prst="rect">
             <a:avLst/>
@@ -11312,97 +11839,87 @@
           </a:bodyPr>
           <a:lstStyle/>
           <a:p>
-            <a:pPr algn="ctr">
-              <a:lnSpc>
-                <a:spcPct val="100000"/>
-              </a:lnSpc>
-            </a:pPr>
-            <a:r>
-              <a:rPr sz="1500" b="1" i="0">
-                <a:solidFill>
-                  <a:srgbClr val="FFFFFF"/>
-                </a:solidFill>
-                <a:latin typeface="Segoe UI"/>
-              </a:rPr>
-              <a:t>6</a:t>
-            </a:r>
-          </a:p>
-        </p:txBody>
-      </p:sp>
-      <p:sp>
-        <p:nvSpPr>
-          <p:cNvPr id="35" name="TextBox 34"/>
-          <p:cNvSpPr txBox="1"/>
-          <p:nvPr/>
-        </p:nvSpPr>
-        <p:spPr>
-          <a:xfrm>
-            <a:off x="1764792" y="5497068"/>
-            <a:ext cx="8936431" cy="292608"/>
-          </a:xfrm>
-          <a:prstGeom prst="rect">
-            <a:avLst/>
-          </a:prstGeom>
-          <a:noFill/>
-        </p:spPr>
-        <p:txBody>
-          <a:bodyPr wrap="square" anchor="t" lIns="0" rIns="0" tIns="0" bIns="0">
-            <a:spAutoFit/>
-          </a:bodyPr>
-          <a:lstStyle/>
-          <a:p>
             <a:pPr algn="l">
               <a:lnSpc>
-                <a:spcPct val="100000"/>
-              </a:lnSpc>
-            </a:pPr>
-            <a:r>
-              <a:rPr sz="1500" b="1" i="0">
+                <a:spcPct val="120000"/>
+              </a:lnSpc>
+            </a:pPr>
+            <a:r>
+              <a:rPr sz="1050" b="0" i="0">
+                <a:solidFill>
+                  <a:srgbClr val="566577"/>
+                </a:solidFill>
+                <a:latin typeface="Segoe UI"/>
+              </a:rPr>
+              <a:t>▪  Três antenas ANN-MB2, </a:t>
+            </a:r>
+            <a:r>
+              <a:rPr sz="1050" b="1" i="0">
                 <a:solidFill>
                   <a:srgbClr val="0B1B2B"/>
                 </a:solidFill>
                 <a:latin typeface="Segoe UI"/>
               </a:rPr>
-              <a:t>A ressalva de posição</a:t>
-            </a:r>
-          </a:p>
-        </p:txBody>
-      </p:sp>
-      <p:sp>
-        <p:nvSpPr>
-          <p:cNvPr id="36" name="TextBox 35"/>
-          <p:cNvSpPr txBox="1"/>
-          <p:nvPr/>
-        </p:nvSpPr>
-        <p:spPr>
-          <a:xfrm>
-            <a:off x="1764792" y="5807964"/>
-            <a:ext cx="8936431" cy="320040"/>
-          </a:xfrm>
-          <a:prstGeom prst="rect">
-            <a:avLst/>
-          </a:prstGeom>
-          <a:noFill/>
-        </p:spPr>
-        <p:txBody>
-          <a:bodyPr wrap="square" anchor="t" lIns="0" rIns="0" tIns="0" bIns="0">
-            <a:spAutoFit/>
-          </a:bodyPr>
-          <a:lstStyle/>
+              <a:t>na mesma altura</a:t>
+            </a:r>
+            <a:r>
+              <a:rPr sz="1050" b="0" i="0">
+                <a:solidFill>
+                  <a:srgbClr val="566577"/>
+                </a:solidFill>
+                <a:latin typeface="Segoe UI"/>
+              </a:rPr>
+              <a:t>, cada uma sobre plano de terra de ø12 cm, separadas por ~1,5 m. Base e rover a metros: baseline curta, mesma atmosfera.</a:t>
+            </a:r>
+          </a:p>
           <a:p>
             <a:pPr algn="l">
               <a:lnSpc>
-                <a:spcPct val="100000"/>
-              </a:lnSpc>
-            </a:pPr>
-            <a:r>
-              <a:rPr sz="1250" b="0" i="0">
+                <a:spcPct val="120000"/>
+              </a:lnSpc>
+            </a:pPr>
+            <a:r>
+              <a:rPr sz="1050" b="0" i="0">
                 <a:solidFill>
                   <a:srgbClr val="566577"/>
                 </a:solidFill>
                 <a:latin typeface="Segoe UI"/>
               </a:rPr>
-              <a:t>as antenas B e C ficam a ~1,5 m uma da outra, não no mesmo ponto: os degraus comparam dispersão (CEP), não a posição absoluta de cada receptor.</a:t>
+              <a:t>▪  Uma antena por receptor: sem troca de cabo e sem compartilhar antena (o J2 da SMA-DK alimenta a 3 V, o EVK a 3,3 V).</a:t>
+            </a:r>
+          </a:p>
+          <a:p>
+            <a:pPr algn="l">
+              <a:lnSpc>
+                <a:spcPct val="120000"/>
+              </a:lnSpc>
+            </a:pPr>
+            <a:r>
+              <a:rPr sz="1050" b="0" i="0">
+                <a:solidFill>
+                  <a:srgbClr val="566577"/>
+                </a:solidFill>
+                <a:latin typeface="Segoe UI"/>
+              </a:rPr>
+              <a:t>▪  As antenas B e C não estão no mesmo ponto: os degraus comparam </a:t>
+            </a:r>
+            <a:r>
+              <a:rPr sz="1050" b="1" i="0">
+                <a:solidFill>
+                  <a:srgbClr val="0B1B2B"/>
+                </a:solidFill>
+                <a:latin typeface="Segoe UI"/>
+              </a:rPr>
+              <a:t>dispersão</a:t>
+            </a:r>
+            <a:r>
+              <a:rPr sz="1050" b="0" i="0">
+                <a:solidFill>
+                  <a:srgbClr val="566577"/>
+                </a:solidFill>
+                <a:latin typeface="Segoe UI"/>
+              </a:rPr>
+              <a:t>, não posição absoluta.</a:t>
             </a:r>
           </a:p>
         </p:txBody>
@@ -11542,7 +12059,7 @@
                 </a:solidFill>
                 <a:latin typeface="Segoe UI"/>
               </a:rPr>
-              <a:t>As cinco falhas de RTK</a:t>
+              <a:t>O roteiro</a:t>
             </a:r>
           </a:p>
         </p:txBody>
@@ -11674,6 +12191,1463 @@
                 <a:latin typeface="Segoe UI"/>
               </a:rPr>
               <a:t>16</a:t>
+            </a:r>
+          </a:p>
+        </p:txBody>
+      </p:sp>
+      <p:sp>
+        <p:nvSpPr>
+          <p:cNvPr id="8" name="Rectangle 7"/>
+          <p:cNvSpPr/>
+          <p:nvPr/>
+        </p:nvSpPr>
+        <p:spPr>
+          <a:xfrm>
+            <a:off x="1261872" y="2029968"/>
+            <a:ext cx="25400" cy="464820"/>
+          </a:xfrm>
+          <a:prstGeom prst="rect">
+            <a:avLst/>
+          </a:prstGeom>
+          <a:solidFill>
+            <a:srgbClr val="D3E0EB"/>
+          </a:solidFill>
+          <a:ln>
+            <a:noFill/>
+          </a:ln>
+          <a:effectLst/>
+        </p:spPr>
+        <p:style>
+          <a:lnRef idx="1">
+            <a:schemeClr val="accent1"/>
+          </a:lnRef>
+          <a:fillRef idx="3">
+            <a:schemeClr val="accent1"/>
+          </a:fillRef>
+          <a:effectRef idx="2">
+            <a:schemeClr val="accent1"/>
+          </a:effectRef>
+          <a:fontRef idx="minor">
+            <a:schemeClr val="lt1"/>
+          </a:fontRef>
+        </p:style>
+        <p:txBody>
+          <a:bodyPr rtlCol="0" anchor="ctr"/>
+          <a:lstStyle/>
+          <a:p>
+            <a:pPr algn="ctr"/>
+          </a:p>
+        </p:txBody>
+      </p:sp>
+      <p:sp>
+        <p:nvSpPr>
+          <p:cNvPr id="9" name="Oval 8"/>
+          <p:cNvSpPr/>
+          <p:nvPr/>
+        </p:nvSpPr>
+        <p:spPr>
+          <a:xfrm>
+            <a:off x="1078992" y="1600200"/>
+            <a:ext cx="402336" cy="402336"/>
+          </a:xfrm>
+          <a:prstGeom prst="ellipse">
+            <a:avLst/>
+          </a:prstGeom>
+          <a:solidFill>
+            <a:srgbClr val="0093D0"/>
+          </a:solidFill>
+          <a:ln>
+            <a:noFill/>
+          </a:ln>
+          <a:effectLst/>
+        </p:spPr>
+        <p:style>
+          <a:lnRef idx="1">
+            <a:schemeClr val="accent1"/>
+          </a:lnRef>
+          <a:fillRef idx="3">
+            <a:schemeClr val="accent1"/>
+          </a:fillRef>
+          <a:effectRef idx="2">
+            <a:schemeClr val="accent1"/>
+          </a:effectRef>
+          <a:fontRef idx="minor">
+            <a:schemeClr val="lt1"/>
+          </a:fontRef>
+        </p:style>
+        <p:txBody>
+          <a:bodyPr rtlCol="0" anchor="ctr"/>
+          <a:lstStyle/>
+          <a:p>
+            <a:pPr algn="ctr"/>
+          </a:p>
+        </p:txBody>
+      </p:sp>
+      <p:sp>
+        <p:nvSpPr>
+          <p:cNvPr id="10" name="TextBox 9"/>
+          <p:cNvSpPr txBox="1"/>
+          <p:nvPr/>
+        </p:nvSpPr>
+        <p:spPr>
+          <a:xfrm>
+            <a:off x="1078992" y="1645920"/>
+            <a:ext cx="402336" cy="320040"/>
+          </a:xfrm>
+          <a:prstGeom prst="rect">
+            <a:avLst/>
+          </a:prstGeom>
+          <a:noFill/>
+        </p:spPr>
+        <p:txBody>
+          <a:bodyPr wrap="square" anchor="t" lIns="0" rIns="0" tIns="0" bIns="0">
+            <a:spAutoFit/>
+          </a:bodyPr>
+          <a:lstStyle/>
+          <a:p>
+            <a:pPr algn="ctr">
+              <a:lnSpc>
+                <a:spcPct val="100000"/>
+              </a:lnSpc>
+            </a:pPr>
+            <a:r>
+              <a:rPr sz="1500" b="1" i="0">
+                <a:solidFill>
+                  <a:srgbClr val="FFFFFF"/>
+                </a:solidFill>
+                <a:latin typeface="Segoe UI"/>
+              </a:rPr>
+              <a:t>1</a:t>
+            </a:r>
+          </a:p>
+        </p:txBody>
+      </p:sp>
+      <p:sp>
+        <p:nvSpPr>
+          <p:cNvPr id="11" name="TextBox 10"/>
+          <p:cNvSpPr txBox="1"/>
+          <p:nvPr/>
+        </p:nvSpPr>
+        <p:spPr>
+          <a:xfrm>
+            <a:off x="1764792" y="1572768"/>
+            <a:ext cx="8936431" cy="292608"/>
+          </a:xfrm>
+          <a:prstGeom prst="rect">
+            <a:avLst/>
+          </a:prstGeom>
+          <a:noFill/>
+        </p:spPr>
+        <p:txBody>
+          <a:bodyPr wrap="square" anchor="t" lIns="0" rIns="0" tIns="0" bIns="0">
+            <a:spAutoFit/>
+          </a:bodyPr>
+          <a:lstStyle/>
+          <a:p>
+            <a:pPr algn="l">
+              <a:lnSpc>
+                <a:spcPct val="100000"/>
+              </a:lnSpc>
+            </a:pPr>
+            <a:r>
+              <a:rPr sz="1500" b="1" i="0">
+                <a:solidFill>
+                  <a:srgbClr val="0B1B2B"/>
+                </a:solidFill>
+                <a:latin typeface="Segoe UI"/>
+              </a:rPr>
+              <a:t>Antes da aula: firmware e Survey-In</a:t>
+            </a:r>
+          </a:p>
+        </p:txBody>
+      </p:sp>
+      <p:sp>
+        <p:nvSpPr>
+          <p:cNvPr id="12" name="TextBox 11"/>
+          <p:cNvSpPr txBox="1"/>
+          <p:nvPr/>
+        </p:nvSpPr>
+        <p:spPr>
+          <a:xfrm>
+            <a:off x="1764792" y="1883664"/>
+            <a:ext cx="8936431" cy="320040"/>
+          </a:xfrm>
+          <a:prstGeom prst="rect">
+            <a:avLst/>
+          </a:prstGeom>
+          <a:noFill/>
+        </p:spPr>
+        <p:txBody>
+          <a:bodyPr wrap="square" anchor="t" lIns="0" rIns="0" tIns="0" bIns="0">
+            <a:spAutoFit/>
+          </a:bodyPr>
+          <a:lstStyle/>
+          <a:p>
+            <a:pPr algn="l">
+              <a:lnSpc>
+                <a:spcPct val="100000"/>
+              </a:lnSpc>
+            </a:pPr>
+            <a:r>
+              <a:rPr sz="1250" b="0" i="0">
+                <a:solidFill>
+                  <a:srgbClr val="566577"/>
+                </a:solidFill>
+                <a:latin typeface="Segoe UI"/>
+              </a:rPr>
+              <a:t>os dois EVK em HPG 2.11 (conferir com UBX-MON-VER). Survey-In da base uma vez: 5000 mm e 60 s de alvo, anotar a coordenada, gravar CFG-TMODE-MODE = FIXED e salvar na flash.</a:t>
+            </a:r>
+          </a:p>
+        </p:txBody>
+      </p:sp>
+      <p:sp>
+        <p:nvSpPr>
+          <p:cNvPr id="13" name="Rectangle 12"/>
+          <p:cNvSpPr/>
+          <p:nvPr/>
+        </p:nvSpPr>
+        <p:spPr>
+          <a:xfrm>
+            <a:off x="1261872" y="2814828"/>
+            <a:ext cx="25400" cy="464820"/>
+          </a:xfrm>
+          <a:prstGeom prst="rect">
+            <a:avLst/>
+          </a:prstGeom>
+          <a:solidFill>
+            <a:srgbClr val="D3E0EB"/>
+          </a:solidFill>
+          <a:ln>
+            <a:noFill/>
+          </a:ln>
+          <a:effectLst/>
+        </p:spPr>
+        <p:style>
+          <a:lnRef idx="1">
+            <a:schemeClr val="accent1"/>
+          </a:lnRef>
+          <a:fillRef idx="3">
+            <a:schemeClr val="accent1"/>
+          </a:fillRef>
+          <a:effectRef idx="2">
+            <a:schemeClr val="accent1"/>
+          </a:effectRef>
+          <a:fontRef idx="minor">
+            <a:schemeClr val="lt1"/>
+          </a:fontRef>
+        </p:style>
+        <p:txBody>
+          <a:bodyPr rtlCol="0" anchor="ctr"/>
+          <a:lstStyle/>
+          <a:p>
+            <a:pPr algn="ctr"/>
+          </a:p>
+        </p:txBody>
+      </p:sp>
+      <p:sp>
+        <p:nvSpPr>
+          <p:cNvPr id="14" name="Oval 13"/>
+          <p:cNvSpPr/>
+          <p:nvPr/>
+        </p:nvSpPr>
+        <p:spPr>
+          <a:xfrm>
+            <a:off x="1078992" y="2385060"/>
+            <a:ext cx="402336" cy="402336"/>
+          </a:xfrm>
+          <a:prstGeom prst="ellipse">
+            <a:avLst/>
+          </a:prstGeom>
+          <a:solidFill>
+            <a:srgbClr val="0093D0"/>
+          </a:solidFill>
+          <a:ln>
+            <a:noFill/>
+          </a:ln>
+          <a:effectLst/>
+        </p:spPr>
+        <p:style>
+          <a:lnRef idx="1">
+            <a:schemeClr val="accent1"/>
+          </a:lnRef>
+          <a:fillRef idx="3">
+            <a:schemeClr val="accent1"/>
+          </a:fillRef>
+          <a:effectRef idx="2">
+            <a:schemeClr val="accent1"/>
+          </a:effectRef>
+          <a:fontRef idx="minor">
+            <a:schemeClr val="lt1"/>
+          </a:fontRef>
+        </p:style>
+        <p:txBody>
+          <a:bodyPr rtlCol="0" anchor="ctr"/>
+          <a:lstStyle/>
+          <a:p>
+            <a:pPr algn="ctr"/>
+          </a:p>
+        </p:txBody>
+      </p:sp>
+      <p:sp>
+        <p:nvSpPr>
+          <p:cNvPr id="15" name="TextBox 14"/>
+          <p:cNvSpPr txBox="1"/>
+          <p:nvPr/>
+        </p:nvSpPr>
+        <p:spPr>
+          <a:xfrm>
+            <a:off x="1078992" y="2430780"/>
+            <a:ext cx="402336" cy="320040"/>
+          </a:xfrm>
+          <a:prstGeom prst="rect">
+            <a:avLst/>
+          </a:prstGeom>
+          <a:noFill/>
+        </p:spPr>
+        <p:txBody>
+          <a:bodyPr wrap="square" anchor="t" lIns="0" rIns="0" tIns="0" bIns="0">
+            <a:spAutoFit/>
+          </a:bodyPr>
+          <a:lstStyle/>
+          <a:p>
+            <a:pPr algn="ctr">
+              <a:lnSpc>
+                <a:spcPct val="100000"/>
+              </a:lnSpc>
+            </a:pPr>
+            <a:r>
+              <a:rPr sz="1500" b="1" i="0">
+                <a:solidFill>
+                  <a:srgbClr val="FFFFFF"/>
+                </a:solidFill>
+                <a:latin typeface="Segoe UI"/>
+              </a:rPr>
+              <a:t>2</a:t>
+            </a:r>
+          </a:p>
+        </p:txBody>
+      </p:sp>
+      <p:sp>
+        <p:nvSpPr>
+          <p:cNvPr id="16" name="TextBox 15"/>
+          <p:cNvSpPr txBox="1"/>
+          <p:nvPr/>
+        </p:nvSpPr>
+        <p:spPr>
+          <a:xfrm>
+            <a:off x="1764792" y="2357628"/>
+            <a:ext cx="8936431" cy="292608"/>
+          </a:xfrm>
+          <a:prstGeom prst="rect">
+            <a:avLst/>
+          </a:prstGeom>
+          <a:noFill/>
+        </p:spPr>
+        <p:txBody>
+          <a:bodyPr wrap="square" anchor="t" lIns="0" rIns="0" tIns="0" bIns="0">
+            <a:spAutoFit/>
+          </a:bodyPr>
+          <a:lstStyle/>
+          <a:p>
+            <a:pPr algn="l">
+              <a:lnSpc>
+                <a:spcPct val="100000"/>
+              </a:lnSpc>
+            </a:pPr>
+            <a:r>
+              <a:rPr sz="1500" b="1" i="0">
+                <a:solidFill>
+                  <a:srgbClr val="0B1B2B"/>
+                </a:solidFill>
+                <a:latin typeface="Segoe UI"/>
+              </a:rPr>
+              <a:t>Degrau 1: a SMA-DK, na antena C</a:t>
+            </a:r>
+          </a:p>
+        </p:txBody>
+      </p:sp>
+      <p:sp>
+        <p:nvSpPr>
+          <p:cNvPr id="17" name="TextBox 16"/>
+          <p:cNvSpPr txBox="1"/>
+          <p:nvPr/>
+        </p:nvSpPr>
+        <p:spPr>
+          <a:xfrm>
+            <a:off x="1764792" y="2668524"/>
+            <a:ext cx="8936431" cy="320040"/>
+          </a:xfrm>
+          <a:prstGeom prst="rect">
+            <a:avLst/>
+          </a:prstGeom>
+          <a:noFill/>
+        </p:spPr>
+        <p:txBody>
+          <a:bodyPr wrap="square" anchor="t" lIns="0" rIns="0" tIns="0" bIns="0">
+            <a:spAutoFit/>
+          </a:bodyPr>
+          <a:lstStyle/>
+          <a:p>
+            <a:pPr algn="l">
+              <a:lnSpc>
+                <a:spcPct val="100000"/>
+              </a:lnSpc>
+            </a:pPr>
+            <a:r>
+              <a:rPr sz="1250" b="0" i="0">
+                <a:solidFill>
+                  <a:srgbClr val="566577"/>
+                </a:solidFill>
+                <a:latin typeface="Segoe UI"/>
+              </a:rPr>
+              <a:t>firmware do lab 3; o u-center 2 monta o Deviation Map com CEP50/CEP95 a partir do NMEA. Dispersão de metros.</a:t>
+            </a:r>
+          </a:p>
+        </p:txBody>
+      </p:sp>
+      <p:sp>
+        <p:nvSpPr>
+          <p:cNvPr id="18" name="Rectangle 17"/>
+          <p:cNvSpPr/>
+          <p:nvPr/>
+        </p:nvSpPr>
+        <p:spPr>
+          <a:xfrm>
+            <a:off x="1261872" y="3599688"/>
+            <a:ext cx="25400" cy="464820"/>
+          </a:xfrm>
+          <a:prstGeom prst="rect">
+            <a:avLst/>
+          </a:prstGeom>
+          <a:solidFill>
+            <a:srgbClr val="D3E0EB"/>
+          </a:solidFill>
+          <a:ln>
+            <a:noFill/>
+          </a:ln>
+          <a:effectLst/>
+        </p:spPr>
+        <p:style>
+          <a:lnRef idx="1">
+            <a:schemeClr val="accent1"/>
+          </a:lnRef>
+          <a:fillRef idx="3">
+            <a:schemeClr val="accent1"/>
+          </a:fillRef>
+          <a:effectRef idx="2">
+            <a:schemeClr val="accent1"/>
+          </a:effectRef>
+          <a:fontRef idx="minor">
+            <a:schemeClr val="lt1"/>
+          </a:fontRef>
+        </p:style>
+        <p:txBody>
+          <a:bodyPr rtlCol="0" anchor="ctr"/>
+          <a:lstStyle/>
+          <a:p>
+            <a:pPr algn="ctr"/>
+          </a:p>
+        </p:txBody>
+      </p:sp>
+      <p:sp>
+        <p:nvSpPr>
+          <p:cNvPr id="19" name="Oval 18"/>
+          <p:cNvSpPr/>
+          <p:nvPr/>
+        </p:nvSpPr>
+        <p:spPr>
+          <a:xfrm>
+            <a:off x="1078992" y="3169920"/>
+            <a:ext cx="402336" cy="402336"/>
+          </a:xfrm>
+          <a:prstGeom prst="ellipse">
+            <a:avLst/>
+          </a:prstGeom>
+          <a:solidFill>
+            <a:srgbClr val="0093D0"/>
+          </a:solidFill>
+          <a:ln>
+            <a:noFill/>
+          </a:ln>
+          <a:effectLst/>
+        </p:spPr>
+        <p:style>
+          <a:lnRef idx="1">
+            <a:schemeClr val="accent1"/>
+          </a:lnRef>
+          <a:fillRef idx="3">
+            <a:schemeClr val="accent1"/>
+          </a:fillRef>
+          <a:effectRef idx="2">
+            <a:schemeClr val="accent1"/>
+          </a:effectRef>
+          <a:fontRef idx="minor">
+            <a:schemeClr val="lt1"/>
+          </a:fontRef>
+        </p:style>
+        <p:txBody>
+          <a:bodyPr rtlCol="0" anchor="ctr"/>
+          <a:lstStyle/>
+          <a:p>
+            <a:pPr algn="ctr"/>
+          </a:p>
+        </p:txBody>
+      </p:sp>
+      <p:sp>
+        <p:nvSpPr>
+          <p:cNvPr id="20" name="TextBox 19"/>
+          <p:cNvSpPr txBox="1"/>
+          <p:nvPr/>
+        </p:nvSpPr>
+        <p:spPr>
+          <a:xfrm>
+            <a:off x="1078992" y="3215640"/>
+            <a:ext cx="402336" cy="320040"/>
+          </a:xfrm>
+          <a:prstGeom prst="rect">
+            <a:avLst/>
+          </a:prstGeom>
+          <a:noFill/>
+        </p:spPr>
+        <p:txBody>
+          <a:bodyPr wrap="square" anchor="t" lIns="0" rIns="0" tIns="0" bIns="0">
+            <a:spAutoFit/>
+          </a:bodyPr>
+          <a:lstStyle/>
+          <a:p>
+            <a:pPr algn="ctr">
+              <a:lnSpc>
+                <a:spcPct val="100000"/>
+              </a:lnSpc>
+            </a:pPr>
+            <a:r>
+              <a:rPr sz="1500" b="1" i="0">
+                <a:solidFill>
+                  <a:srgbClr val="FFFFFF"/>
+                </a:solidFill>
+                <a:latin typeface="Segoe UI"/>
+              </a:rPr>
+              <a:t>3</a:t>
+            </a:r>
+          </a:p>
+        </p:txBody>
+      </p:sp>
+      <p:sp>
+        <p:nvSpPr>
+          <p:cNvPr id="21" name="TextBox 20"/>
+          <p:cNvSpPr txBox="1"/>
+          <p:nvPr/>
+        </p:nvSpPr>
+        <p:spPr>
+          <a:xfrm>
+            <a:off x="1764792" y="3142488"/>
+            <a:ext cx="8936431" cy="292608"/>
+          </a:xfrm>
+          <a:prstGeom prst="rect">
+            <a:avLst/>
+          </a:prstGeom>
+          <a:noFill/>
+        </p:spPr>
+        <p:txBody>
+          <a:bodyPr wrap="square" anchor="t" lIns="0" rIns="0" tIns="0" bIns="0">
+            <a:spAutoFit/>
+          </a:bodyPr>
+          <a:lstStyle/>
+          <a:p>
+            <a:pPr algn="l">
+              <a:lnSpc>
+                <a:spcPct val="100000"/>
+              </a:lnSpc>
+            </a:pPr>
+            <a:r>
+              <a:rPr sz="1500" b="1" i="0">
+                <a:solidFill>
+                  <a:srgbClr val="0B1B2B"/>
+                </a:solidFill>
+                <a:latin typeface="Segoe UI"/>
+              </a:rPr>
+              <a:t>Degrau 2: o rover autônomo, na antena B</a:t>
+            </a:r>
+          </a:p>
+        </p:txBody>
+      </p:sp>
+      <p:sp>
+        <p:nvSpPr>
+          <p:cNvPr id="22" name="TextBox 21"/>
+          <p:cNvSpPr txBox="1"/>
+          <p:nvPr/>
+        </p:nvSpPr>
+        <p:spPr>
+          <a:xfrm>
+            <a:off x="1764792" y="3453384"/>
+            <a:ext cx="8936431" cy="320040"/>
+          </a:xfrm>
+          <a:prstGeom prst="rect">
+            <a:avLst/>
+          </a:prstGeom>
+          <a:noFill/>
+        </p:spPr>
+        <p:txBody>
+          <a:bodyPr wrap="square" anchor="t" lIns="0" rIns="0" tIns="0" bIns="0">
+            <a:spAutoFit/>
+          </a:bodyPr>
+          <a:lstStyle/>
+          <a:p>
+            <a:pPr algn="l">
+              <a:lnSpc>
+                <a:spcPct val="100000"/>
+              </a:lnSpc>
+            </a:pPr>
+            <a:r>
+              <a:rPr sz="1250" b="0" i="0">
+                <a:solidFill>
+                  <a:srgbClr val="566577"/>
+                </a:solidFill>
+                <a:latin typeface="Segoe UI"/>
+              </a:rPr>
+              <a:t>ao mesmo tempo que o degrau 1: o que a multibanda faz antes de qualquer correção. Decimétrico.</a:t>
+            </a:r>
+          </a:p>
+        </p:txBody>
+      </p:sp>
+      <p:sp>
+        <p:nvSpPr>
+          <p:cNvPr id="23" name="Rectangle 22"/>
+          <p:cNvSpPr/>
+          <p:nvPr/>
+        </p:nvSpPr>
+        <p:spPr>
+          <a:xfrm>
+            <a:off x="1261872" y="4384548"/>
+            <a:ext cx="25400" cy="464820"/>
+          </a:xfrm>
+          <a:prstGeom prst="rect">
+            <a:avLst/>
+          </a:prstGeom>
+          <a:solidFill>
+            <a:srgbClr val="D3E0EB"/>
+          </a:solidFill>
+          <a:ln>
+            <a:noFill/>
+          </a:ln>
+          <a:effectLst/>
+        </p:spPr>
+        <p:style>
+          <a:lnRef idx="1">
+            <a:schemeClr val="accent1"/>
+          </a:lnRef>
+          <a:fillRef idx="3">
+            <a:schemeClr val="accent1"/>
+          </a:fillRef>
+          <a:effectRef idx="2">
+            <a:schemeClr val="accent1"/>
+          </a:effectRef>
+          <a:fontRef idx="minor">
+            <a:schemeClr val="lt1"/>
+          </a:fontRef>
+        </p:style>
+        <p:txBody>
+          <a:bodyPr rtlCol="0" anchor="ctr"/>
+          <a:lstStyle/>
+          <a:p>
+            <a:pPr algn="ctr"/>
+          </a:p>
+        </p:txBody>
+      </p:sp>
+      <p:sp>
+        <p:nvSpPr>
+          <p:cNvPr id="24" name="Oval 23"/>
+          <p:cNvSpPr/>
+          <p:nvPr/>
+        </p:nvSpPr>
+        <p:spPr>
+          <a:xfrm>
+            <a:off x="1078992" y="3954780"/>
+            <a:ext cx="402336" cy="402336"/>
+          </a:xfrm>
+          <a:prstGeom prst="ellipse">
+            <a:avLst/>
+          </a:prstGeom>
+          <a:solidFill>
+            <a:srgbClr val="0093D0"/>
+          </a:solidFill>
+          <a:ln>
+            <a:noFill/>
+          </a:ln>
+          <a:effectLst/>
+        </p:spPr>
+        <p:style>
+          <a:lnRef idx="1">
+            <a:schemeClr val="accent1"/>
+          </a:lnRef>
+          <a:fillRef idx="3">
+            <a:schemeClr val="accent1"/>
+          </a:fillRef>
+          <a:effectRef idx="2">
+            <a:schemeClr val="accent1"/>
+          </a:effectRef>
+          <a:fontRef idx="minor">
+            <a:schemeClr val="lt1"/>
+          </a:fontRef>
+        </p:style>
+        <p:txBody>
+          <a:bodyPr rtlCol="0" anchor="ctr"/>
+          <a:lstStyle/>
+          <a:p>
+            <a:pPr algn="ctr"/>
+          </a:p>
+        </p:txBody>
+      </p:sp>
+      <p:sp>
+        <p:nvSpPr>
+          <p:cNvPr id="25" name="TextBox 24"/>
+          <p:cNvSpPr txBox="1"/>
+          <p:nvPr/>
+        </p:nvSpPr>
+        <p:spPr>
+          <a:xfrm>
+            <a:off x="1078992" y="4000500"/>
+            <a:ext cx="402336" cy="320040"/>
+          </a:xfrm>
+          <a:prstGeom prst="rect">
+            <a:avLst/>
+          </a:prstGeom>
+          <a:noFill/>
+        </p:spPr>
+        <p:txBody>
+          <a:bodyPr wrap="square" anchor="t" lIns="0" rIns="0" tIns="0" bIns="0">
+            <a:spAutoFit/>
+          </a:bodyPr>
+          <a:lstStyle/>
+          <a:p>
+            <a:pPr algn="ctr">
+              <a:lnSpc>
+                <a:spcPct val="100000"/>
+              </a:lnSpc>
+            </a:pPr>
+            <a:r>
+              <a:rPr sz="1500" b="1" i="0">
+                <a:solidFill>
+                  <a:srgbClr val="FFFFFF"/>
+                </a:solidFill>
+                <a:latin typeface="Segoe UI"/>
+              </a:rPr>
+              <a:t>4</a:t>
+            </a:r>
+          </a:p>
+        </p:txBody>
+      </p:sp>
+      <p:sp>
+        <p:nvSpPr>
+          <p:cNvPr id="26" name="TextBox 25"/>
+          <p:cNvSpPr txBox="1"/>
+          <p:nvPr/>
+        </p:nvSpPr>
+        <p:spPr>
+          <a:xfrm>
+            <a:off x="1764792" y="3927348"/>
+            <a:ext cx="8936431" cy="292608"/>
+          </a:xfrm>
+          <a:prstGeom prst="rect">
+            <a:avLst/>
+          </a:prstGeom>
+          <a:noFill/>
+        </p:spPr>
+        <p:txBody>
+          <a:bodyPr wrap="square" anchor="t" lIns="0" rIns="0" tIns="0" bIns="0">
+            <a:spAutoFit/>
+          </a:bodyPr>
+          <a:lstStyle/>
+          <a:p>
+            <a:pPr algn="l">
+              <a:lnSpc>
+                <a:spcPct val="100000"/>
+              </a:lnSpc>
+            </a:pPr>
+            <a:r>
+              <a:rPr sz="1500" b="1" i="0">
+                <a:solidFill>
+                  <a:srgbClr val="0B1B2B"/>
+                </a:solidFill>
+                <a:latin typeface="Segoe UI"/>
+              </a:rPr>
+              <a:t>Degrau 3: o rover com a correção da base</a:t>
+            </a:r>
+          </a:p>
+        </p:txBody>
+      </p:sp>
+      <p:sp>
+        <p:nvSpPr>
+          <p:cNvPr id="27" name="TextBox 26"/>
+          <p:cNvSpPr txBox="1"/>
+          <p:nvPr/>
+        </p:nvSpPr>
+        <p:spPr>
+          <a:xfrm>
+            <a:off x="1764792" y="4238244"/>
+            <a:ext cx="8936431" cy="320040"/>
+          </a:xfrm>
+          <a:prstGeom prst="rect">
+            <a:avLst/>
+          </a:prstGeom>
+          <a:noFill/>
+        </p:spPr>
+        <p:txBody>
+          <a:bodyPr wrap="square" anchor="t" lIns="0" rIns="0" tIns="0" bIns="0">
+            <a:spAutoFit/>
+          </a:bodyPr>
+          <a:lstStyle/>
+          <a:p>
+            <a:pPr algn="l">
+              <a:lnSpc>
+                <a:spcPct val="100000"/>
+              </a:lnSpc>
+            </a:pPr>
+            <a:r>
+              <a:rPr sz="1250" b="0" i="0">
+                <a:solidFill>
+                  <a:srgbClr val="566577"/>
+                </a:solidFill>
+                <a:latin typeface="Segoe UI"/>
+              </a:rPr>
+              <a:t>narrar 3D → 3D/DGNSS → Float → Fixed enquanto acontece. Ligar o rover com antecedência: a primeira fixação leva minutos, refixar leva segundos.</a:t>
+            </a:r>
+          </a:p>
+        </p:txBody>
+      </p:sp>
+      <p:sp>
+        <p:nvSpPr>
+          <p:cNvPr id="28" name="Rectangle 27"/>
+          <p:cNvSpPr/>
+          <p:nvPr/>
+        </p:nvSpPr>
+        <p:spPr>
+          <a:xfrm>
+            <a:off x="1261872" y="5169408"/>
+            <a:ext cx="25400" cy="464820"/>
+          </a:xfrm>
+          <a:prstGeom prst="rect">
+            <a:avLst/>
+          </a:prstGeom>
+          <a:solidFill>
+            <a:srgbClr val="D3E0EB"/>
+          </a:solidFill>
+          <a:ln>
+            <a:noFill/>
+          </a:ln>
+          <a:effectLst/>
+        </p:spPr>
+        <p:style>
+          <a:lnRef idx="1">
+            <a:schemeClr val="accent1"/>
+          </a:lnRef>
+          <a:fillRef idx="3">
+            <a:schemeClr val="accent1"/>
+          </a:fillRef>
+          <a:effectRef idx="2">
+            <a:schemeClr val="accent1"/>
+          </a:effectRef>
+          <a:fontRef idx="minor">
+            <a:schemeClr val="lt1"/>
+          </a:fontRef>
+        </p:style>
+        <p:txBody>
+          <a:bodyPr rtlCol="0" anchor="ctr"/>
+          <a:lstStyle/>
+          <a:p>
+            <a:pPr algn="ctr"/>
+          </a:p>
+        </p:txBody>
+      </p:sp>
+      <p:sp>
+        <p:nvSpPr>
+          <p:cNvPr id="29" name="Oval 28"/>
+          <p:cNvSpPr/>
+          <p:nvPr/>
+        </p:nvSpPr>
+        <p:spPr>
+          <a:xfrm>
+            <a:off x="1078992" y="4739640"/>
+            <a:ext cx="402336" cy="402336"/>
+          </a:xfrm>
+          <a:prstGeom prst="ellipse">
+            <a:avLst/>
+          </a:prstGeom>
+          <a:solidFill>
+            <a:srgbClr val="0093D0"/>
+          </a:solidFill>
+          <a:ln>
+            <a:noFill/>
+          </a:ln>
+          <a:effectLst/>
+        </p:spPr>
+        <p:style>
+          <a:lnRef idx="1">
+            <a:schemeClr val="accent1"/>
+          </a:lnRef>
+          <a:fillRef idx="3">
+            <a:schemeClr val="accent1"/>
+          </a:fillRef>
+          <a:effectRef idx="2">
+            <a:schemeClr val="accent1"/>
+          </a:effectRef>
+          <a:fontRef idx="minor">
+            <a:schemeClr val="lt1"/>
+          </a:fontRef>
+        </p:style>
+        <p:txBody>
+          <a:bodyPr rtlCol="0" anchor="ctr"/>
+          <a:lstStyle/>
+          <a:p>
+            <a:pPr algn="ctr"/>
+          </a:p>
+        </p:txBody>
+      </p:sp>
+      <p:sp>
+        <p:nvSpPr>
+          <p:cNvPr id="30" name="TextBox 29"/>
+          <p:cNvSpPr txBox="1"/>
+          <p:nvPr/>
+        </p:nvSpPr>
+        <p:spPr>
+          <a:xfrm>
+            <a:off x="1078992" y="4785360"/>
+            <a:ext cx="402336" cy="320040"/>
+          </a:xfrm>
+          <a:prstGeom prst="rect">
+            <a:avLst/>
+          </a:prstGeom>
+          <a:noFill/>
+        </p:spPr>
+        <p:txBody>
+          <a:bodyPr wrap="square" anchor="t" lIns="0" rIns="0" tIns="0" bIns="0">
+            <a:spAutoFit/>
+          </a:bodyPr>
+          <a:lstStyle/>
+          <a:p>
+            <a:pPr algn="ctr">
+              <a:lnSpc>
+                <a:spcPct val="100000"/>
+              </a:lnSpc>
+            </a:pPr>
+            <a:r>
+              <a:rPr sz="1500" b="1" i="0">
+                <a:solidFill>
+                  <a:srgbClr val="FFFFFF"/>
+                </a:solidFill>
+                <a:latin typeface="Segoe UI"/>
+              </a:rPr>
+              <a:t>5</a:t>
+            </a:r>
+          </a:p>
+        </p:txBody>
+      </p:sp>
+      <p:sp>
+        <p:nvSpPr>
+          <p:cNvPr id="31" name="TextBox 30"/>
+          <p:cNvSpPr txBox="1"/>
+          <p:nvPr/>
+        </p:nvSpPr>
+        <p:spPr>
+          <a:xfrm>
+            <a:off x="1764792" y="4712208"/>
+            <a:ext cx="8936431" cy="292608"/>
+          </a:xfrm>
+          <a:prstGeom prst="rect">
+            <a:avLst/>
+          </a:prstGeom>
+          <a:noFill/>
+        </p:spPr>
+        <p:txBody>
+          <a:bodyPr wrap="square" anchor="t" lIns="0" rIns="0" tIns="0" bIns="0">
+            <a:spAutoFit/>
+          </a:bodyPr>
+          <a:lstStyle/>
+          <a:p>
+            <a:pPr algn="l">
+              <a:lnSpc>
+                <a:spcPct val="100000"/>
+              </a:lnSpc>
+            </a:pPr>
+            <a:r>
+              <a:rPr sz="1500" b="1" i="0">
+                <a:solidFill>
+                  <a:srgbClr val="0B1B2B"/>
+                </a:solidFill>
+                <a:latin typeface="Segoe UI"/>
+              </a:rPr>
+              <a:t>O laço que fecha o módulo</a:t>
+            </a:r>
+          </a:p>
+        </p:txBody>
+      </p:sp>
+      <p:sp>
+        <p:nvSpPr>
+          <p:cNvPr id="32" name="TextBox 31"/>
+          <p:cNvSpPr txBox="1"/>
+          <p:nvPr/>
+        </p:nvSpPr>
+        <p:spPr>
+          <a:xfrm>
+            <a:off x="1764792" y="5023104"/>
+            <a:ext cx="8936431" cy="320040"/>
+          </a:xfrm>
+          <a:prstGeom prst="rect">
+            <a:avLst/>
+          </a:prstGeom>
+          <a:noFill/>
+        </p:spPr>
+        <p:txBody>
+          <a:bodyPr wrap="square" anchor="t" lIns="0" rIns="0" tIns="0" bIns="0">
+            <a:spAutoFit/>
+          </a:bodyPr>
+          <a:lstStyle/>
+          <a:p>
+            <a:pPr algn="l">
+              <a:lnSpc>
+                <a:spcPct val="100000"/>
+              </a:lnSpc>
+            </a:pPr>
+            <a:r>
+              <a:rPr sz="1250" b="0" i="0">
+                <a:solidFill>
+                  <a:srgbClr val="566577"/>
+                </a:solidFill>
+                <a:latin typeface="Segoe UI"/>
+              </a:rPr>
+              <a:t>a coordenada do fix RTK volta como CONFIG_GNSS_SAMPLE_REFERENCE_LATITUDE/LONGITUDE no build do lab 1: a placa passa a reportar o próprio erro contra uma referência medida em sala.</a:t>
+            </a:r>
+          </a:p>
+        </p:txBody>
+      </p:sp>
+      <p:sp>
+        <p:nvSpPr>
+          <p:cNvPr id="33" name="Oval 32"/>
+          <p:cNvSpPr/>
+          <p:nvPr/>
+        </p:nvSpPr>
+        <p:spPr>
+          <a:xfrm>
+            <a:off x="1078992" y="5524500"/>
+            <a:ext cx="402336" cy="402336"/>
+          </a:xfrm>
+          <a:prstGeom prst="ellipse">
+            <a:avLst/>
+          </a:prstGeom>
+          <a:solidFill>
+            <a:srgbClr val="0093D0"/>
+          </a:solidFill>
+          <a:ln>
+            <a:noFill/>
+          </a:ln>
+          <a:effectLst/>
+        </p:spPr>
+        <p:style>
+          <a:lnRef idx="1">
+            <a:schemeClr val="accent1"/>
+          </a:lnRef>
+          <a:fillRef idx="3">
+            <a:schemeClr val="accent1"/>
+          </a:fillRef>
+          <a:effectRef idx="2">
+            <a:schemeClr val="accent1"/>
+          </a:effectRef>
+          <a:fontRef idx="minor">
+            <a:schemeClr val="lt1"/>
+          </a:fontRef>
+        </p:style>
+        <p:txBody>
+          <a:bodyPr rtlCol="0" anchor="ctr"/>
+          <a:lstStyle/>
+          <a:p>
+            <a:pPr algn="ctr"/>
+          </a:p>
+        </p:txBody>
+      </p:sp>
+      <p:sp>
+        <p:nvSpPr>
+          <p:cNvPr id="34" name="TextBox 33"/>
+          <p:cNvSpPr txBox="1"/>
+          <p:nvPr/>
+        </p:nvSpPr>
+        <p:spPr>
+          <a:xfrm>
+            <a:off x="1078992" y="5570220"/>
+            <a:ext cx="402336" cy="320040"/>
+          </a:xfrm>
+          <a:prstGeom prst="rect">
+            <a:avLst/>
+          </a:prstGeom>
+          <a:noFill/>
+        </p:spPr>
+        <p:txBody>
+          <a:bodyPr wrap="square" anchor="t" lIns="0" rIns="0" tIns="0" bIns="0">
+            <a:spAutoFit/>
+          </a:bodyPr>
+          <a:lstStyle/>
+          <a:p>
+            <a:pPr algn="ctr">
+              <a:lnSpc>
+                <a:spcPct val="100000"/>
+              </a:lnSpc>
+            </a:pPr>
+            <a:r>
+              <a:rPr sz="1500" b="1" i="0">
+                <a:solidFill>
+                  <a:srgbClr val="FFFFFF"/>
+                </a:solidFill>
+                <a:latin typeface="Segoe UI"/>
+              </a:rPr>
+              <a:t>6</a:t>
+            </a:r>
+          </a:p>
+        </p:txBody>
+      </p:sp>
+      <p:sp>
+        <p:nvSpPr>
+          <p:cNvPr id="35" name="TextBox 34"/>
+          <p:cNvSpPr txBox="1"/>
+          <p:nvPr/>
+        </p:nvSpPr>
+        <p:spPr>
+          <a:xfrm>
+            <a:off x="1764792" y="5497068"/>
+            <a:ext cx="8936431" cy="292608"/>
+          </a:xfrm>
+          <a:prstGeom prst="rect">
+            <a:avLst/>
+          </a:prstGeom>
+          <a:noFill/>
+        </p:spPr>
+        <p:txBody>
+          <a:bodyPr wrap="square" anchor="t" lIns="0" rIns="0" tIns="0" bIns="0">
+            <a:spAutoFit/>
+          </a:bodyPr>
+          <a:lstStyle/>
+          <a:p>
+            <a:pPr algn="l">
+              <a:lnSpc>
+                <a:spcPct val="100000"/>
+              </a:lnSpc>
+            </a:pPr>
+            <a:r>
+              <a:rPr sz="1500" b="1" i="0">
+                <a:solidFill>
+                  <a:srgbClr val="0B1B2B"/>
+                </a:solidFill>
+                <a:latin typeface="Segoe UI"/>
+              </a:rPr>
+              <a:t>A ressalva de posição</a:t>
+            </a:r>
+          </a:p>
+        </p:txBody>
+      </p:sp>
+      <p:sp>
+        <p:nvSpPr>
+          <p:cNvPr id="36" name="TextBox 35"/>
+          <p:cNvSpPr txBox="1"/>
+          <p:nvPr/>
+        </p:nvSpPr>
+        <p:spPr>
+          <a:xfrm>
+            <a:off x="1764792" y="5807964"/>
+            <a:ext cx="8936431" cy="320040"/>
+          </a:xfrm>
+          <a:prstGeom prst="rect">
+            <a:avLst/>
+          </a:prstGeom>
+          <a:noFill/>
+        </p:spPr>
+        <p:txBody>
+          <a:bodyPr wrap="square" anchor="t" lIns="0" rIns="0" tIns="0" bIns="0">
+            <a:spAutoFit/>
+          </a:bodyPr>
+          <a:lstStyle/>
+          <a:p>
+            <a:pPr algn="l">
+              <a:lnSpc>
+                <a:spcPct val="100000"/>
+              </a:lnSpc>
+            </a:pPr>
+            <a:r>
+              <a:rPr sz="1250" b="0" i="0">
+                <a:solidFill>
+                  <a:srgbClr val="566577"/>
+                </a:solidFill>
+                <a:latin typeface="Segoe UI"/>
+              </a:rPr>
+              <a:t>as antenas B e C ficam a ~1,5 m uma da outra, não no mesmo ponto: os degraus comparam dispersão (CEP), não a posição absoluta de cada receptor.</a:t>
+            </a:r>
+          </a:p>
+        </p:txBody>
+      </p:sp>
+    </p:spTree>
+  </p:cSld>
+  <p:clrMapOvr>
+    <a:masterClrMapping/>
+  </p:clrMapOvr>
+</p:sld>
+</file>
+
+<file path=ppt/slides/slide17.xml><?xml version="1.0" encoding="utf-8"?>
+<p:sld xmlns:a="http://schemas.openxmlformats.org/drawingml/2006/main" xmlns:p="http://schemas.openxmlformats.org/presentationml/2006/main" xmlns:r="http://schemas.openxmlformats.org/officeDocument/2006/relationships">
+  <p:cSld>
+    <p:spTree>
+      <p:nvGrpSpPr>
+        <p:cNvPr id="1" name=""/>
+        <p:cNvGrpSpPr/>
+        <p:nvPr/>
+      </p:nvGrpSpPr>
+      <p:grpSpPr/>
+      <p:sp>
+        <p:nvSpPr>
+          <p:cNvPr id="2" name="Rectangle 1"/>
+          <p:cNvSpPr/>
+          <p:nvPr/>
+        </p:nvSpPr>
+        <p:spPr>
+          <a:xfrm>
+            <a:off x="0" y="0"/>
+            <a:ext cx="12191695" cy="6858000"/>
+          </a:xfrm>
+          <a:prstGeom prst="rect">
+            <a:avLst/>
+          </a:prstGeom>
+          <a:solidFill>
+            <a:srgbClr val="FFFFFF"/>
+          </a:solidFill>
+          <a:ln>
+            <a:noFill/>
+          </a:ln>
+          <a:effectLst/>
+        </p:spPr>
+        <p:style>
+          <a:lnRef idx="1">
+            <a:schemeClr val="accent1"/>
+          </a:lnRef>
+          <a:fillRef idx="3">
+            <a:schemeClr val="accent1"/>
+          </a:fillRef>
+          <a:effectRef idx="2">
+            <a:schemeClr val="accent1"/>
+          </a:effectRef>
+          <a:fontRef idx="minor">
+            <a:schemeClr val="lt1"/>
+          </a:fontRef>
+        </p:style>
+        <p:txBody>
+          <a:bodyPr rtlCol="0" anchor="ctr"/>
+          <a:lstStyle/>
+          <a:p>
+            <a:pPr algn="ctr"/>
+          </a:p>
+        </p:txBody>
+      </p:sp>
+      <p:sp>
+        <p:nvSpPr>
+          <p:cNvPr id="3" name="TextBox 2"/>
+          <p:cNvSpPr txBox="1"/>
+          <p:nvPr/>
+        </p:nvSpPr>
+        <p:spPr>
+          <a:xfrm>
+            <a:off x="713232" y="274320"/>
+            <a:ext cx="10765231" cy="274320"/>
+          </a:xfrm>
+          <a:prstGeom prst="rect">
+            <a:avLst/>
+          </a:prstGeom>
+          <a:noFill/>
+        </p:spPr>
+        <p:txBody>
+          <a:bodyPr wrap="square" anchor="t" lIns="0" rIns="0" tIns="0" bIns="0">
+            <a:spAutoFit/>
+          </a:bodyPr>
+          <a:lstStyle/>
+          <a:p>
+            <a:pPr algn="l">
+              <a:lnSpc>
+                <a:spcPct val="100000"/>
+              </a:lnSpc>
+            </a:pPr>
+            <a:r>
+              <a:rPr sz="1200" b="1" i="0" spc="140">
+                <a:solidFill>
+                  <a:srgbClr val="0093D0"/>
+                </a:solidFill>
+                <a:latin typeface="Segoe UI"/>
+              </a:rPr>
+              <a:t>03 · A DEMO</a:t>
+            </a:r>
+          </a:p>
+        </p:txBody>
+      </p:sp>
+      <p:sp>
+        <p:nvSpPr>
+          <p:cNvPr id="4" name="TextBox 3"/>
+          <p:cNvSpPr txBox="1"/>
+          <p:nvPr/>
+        </p:nvSpPr>
+        <p:spPr>
+          <a:xfrm>
+            <a:off x="713232" y="585216"/>
+            <a:ext cx="10765231" cy="566928"/>
+          </a:xfrm>
+          <a:prstGeom prst="rect">
+            <a:avLst/>
+          </a:prstGeom>
+          <a:noFill/>
+        </p:spPr>
+        <p:txBody>
+          <a:bodyPr wrap="square" anchor="t" lIns="0" rIns="0" tIns="0" bIns="0">
+            <a:spAutoFit/>
+          </a:bodyPr>
+          <a:lstStyle/>
+          <a:p>
+            <a:pPr algn="l">
+              <a:lnSpc>
+                <a:spcPct val="100000"/>
+              </a:lnSpc>
+            </a:pPr>
+            <a:r>
+              <a:rPr sz="3200" b="1" i="0">
+                <a:solidFill>
+                  <a:srgbClr val="0B1B2B"/>
+                </a:solidFill>
+                <a:latin typeface="Segoe UI"/>
+              </a:rPr>
+              <a:t>As cinco falhas de RTK</a:t>
+            </a:r>
+          </a:p>
+        </p:txBody>
+      </p:sp>
+      <p:sp>
+        <p:nvSpPr>
+          <p:cNvPr id="5" name="Oval 4"/>
+          <p:cNvSpPr/>
+          <p:nvPr/>
+        </p:nvSpPr>
+        <p:spPr>
+          <a:xfrm>
+            <a:off x="713232" y="6492240"/>
+            <a:ext cx="82296" cy="82296"/>
+          </a:xfrm>
+          <a:prstGeom prst="ellipse">
+            <a:avLst/>
+          </a:prstGeom>
+          <a:solidFill>
+            <a:srgbClr val="22C3E6"/>
+          </a:solidFill>
+          <a:ln>
+            <a:noFill/>
+          </a:ln>
+          <a:effectLst/>
+        </p:spPr>
+        <p:style>
+          <a:lnRef idx="1">
+            <a:schemeClr val="accent1"/>
+          </a:lnRef>
+          <a:fillRef idx="3">
+            <a:schemeClr val="accent1"/>
+          </a:fillRef>
+          <a:effectRef idx="2">
+            <a:schemeClr val="accent1"/>
+          </a:effectRef>
+          <a:fontRef idx="minor">
+            <a:schemeClr val="lt1"/>
+          </a:fontRef>
+        </p:style>
+        <p:txBody>
+          <a:bodyPr rtlCol="0" anchor="ctr"/>
+          <a:lstStyle/>
+          <a:p>
+            <a:pPr algn="ctr"/>
+          </a:p>
+        </p:txBody>
+      </p:sp>
+      <p:sp>
+        <p:nvSpPr>
+          <p:cNvPr id="6" name="TextBox 5"/>
+          <p:cNvSpPr txBox="1"/>
+          <p:nvPr/>
+        </p:nvSpPr>
+        <p:spPr>
+          <a:xfrm>
+            <a:off x="877824" y="6400800"/>
+            <a:ext cx="8229600" cy="274320"/>
+          </a:xfrm>
+          <a:prstGeom prst="rect">
+            <a:avLst/>
+          </a:prstGeom>
+          <a:noFill/>
+        </p:spPr>
+        <p:txBody>
+          <a:bodyPr wrap="square" anchor="t" lIns="0" rIns="0" tIns="0" bIns="0">
+            <a:spAutoFit/>
+          </a:bodyPr>
+          <a:lstStyle/>
+          <a:p>
+            <a:pPr algn="l">
+              <a:lnSpc>
+                <a:spcPct val="100000"/>
+              </a:lnSpc>
+            </a:pPr>
+            <a:r>
+              <a:rPr sz="1000" b="1" i="0">
+                <a:solidFill>
+                  <a:srgbClr val="0B1B2B"/>
+                </a:solidFill>
+                <a:latin typeface="Segoe UI"/>
+              </a:rPr>
+              <a:t>M2</a:t>
+            </a:r>
+            <a:r>
+              <a:rPr sz="1000" b="0" i="0">
+                <a:solidFill>
+                  <a:srgbClr val="566577"/>
+                </a:solidFill>
+                <a:latin typeface="Segoe UI"/>
+              </a:rPr>
+              <a:t> · IA EMBARCADA &amp; CONECTIVIDADE</a:t>
+            </a:r>
+          </a:p>
+        </p:txBody>
+      </p:sp>
+      <p:sp>
+        <p:nvSpPr>
+          <p:cNvPr id="7" name="TextBox 6"/>
+          <p:cNvSpPr txBox="1"/>
+          <p:nvPr/>
+        </p:nvSpPr>
+        <p:spPr>
+          <a:xfrm>
+            <a:off x="10972800" y="6400800"/>
+            <a:ext cx="502920" cy="274320"/>
+          </a:xfrm>
+          <a:prstGeom prst="rect">
+            <a:avLst/>
+          </a:prstGeom>
+          <a:noFill/>
+        </p:spPr>
+        <p:txBody>
+          <a:bodyPr wrap="square" anchor="t" lIns="0" rIns="0" tIns="0" bIns="0">
+            <a:spAutoFit/>
+          </a:bodyPr>
+          <a:lstStyle/>
+          <a:p>
+            <a:pPr algn="r">
+              <a:lnSpc>
+                <a:spcPct val="100000"/>
+              </a:lnSpc>
+            </a:pPr>
+            <a:r>
+              <a:rPr sz="1000" b="0" i="0">
+                <a:solidFill>
+                  <a:srgbClr val="566577"/>
+                </a:solidFill>
+                <a:latin typeface="Segoe UI"/>
+              </a:rPr>
+              <a:t>17</a:t>
             </a:r>
           </a:p>
         </p:txBody>
@@ -12387,7 +14361,7 @@
 </p:sld>
 </file>
 
-<file path=ppt/slides/slide17.xml><?xml version="1.0" encoding="utf-8"?>
+<file path=ppt/slides/slide18.xml><?xml version="1.0" encoding="utf-8"?>
 <p:sld xmlns:a="http://schemas.openxmlformats.org/drawingml/2006/main" xmlns:p="http://schemas.openxmlformats.org/presentationml/2006/main" xmlns:r="http://schemas.openxmlformats.org/officeDocument/2006/relationships">
   <p:cSld>
     <p:spTree>
@@ -12645,7 +14619,7 @@
                 </a:solidFill>
                 <a:latin typeface="Segoe UI"/>
               </a:rPr>
-              <a:t>17</a:t>
+              <a:t>18</a:t>
             </a:r>
           </a:p>
         </p:txBody>
@@ -13107,928 +15081,6 @@
 </p:sld>
 </file>
 
-<file path=ppt/slides/slide18.xml><?xml version="1.0" encoding="utf-8"?>
-<p:sld xmlns:a="http://schemas.openxmlformats.org/drawingml/2006/main" xmlns:p="http://schemas.openxmlformats.org/presentationml/2006/main" xmlns:r="http://schemas.openxmlformats.org/officeDocument/2006/relationships">
-  <p:cSld>
-    <p:spTree>
-      <p:nvGrpSpPr>
-        <p:cNvPr id="1" name=""/>
-        <p:cNvGrpSpPr/>
-        <p:nvPr/>
-      </p:nvGrpSpPr>
-      <p:grpSpPr/>
-      <p:sp>
-        <p:nvSpPr>
-          <p:cNvPr id="2" name="Rectangle 1"/>
-          <p:cNvSpPr/>
-          <p:nvPr/>
-        </p:nvSpPr>
-        <p:spPr>
-          <a:xfrm>
-            <a:off x="0" y="0"/>
-            <a:ext cx="12191695" cy="6858000"/>
-          </a:xfrm>
-          <a:prstGeom prst="rect">
-            <a:avLst/>
-          </a:prstGeom>
-          <a:solidFill>
-            <a:srgbClr val="FFFFFF"/>
-          </a:solidFill>
-          <a:ln>
-            <a:noFill/>
-          </a:ln>
-          <a:effectLst/>
-        </p:spPr>
-        <p:style>
-          <a:lnRef idx="1">
-            <a:schemeClr val="accent1"/>
-          </a:lnRef>
-          <a:fillRef idx="3">
-            <a:schemeClr val="accent1"/>
-          </a:fillRef>
-          <a:effectRef idx="2">
-            <a:schemeClr val="accent1"/>
-          </a:effectRef>
-          <a:fontRef idx="minor">
-            <a:schemeClr val="lt1"/>
-          </a:fontRef>
-        </p:style>
-        <p:txBody>
-          <a:bodyPr rtlCol="0" anchor="ctr"/>
-          <a:lstStyle/>
-          <a:p>
-            <a:pPr algn="ctr"/>
-          </a:p>
-        </p:txBody>
-      </p:sp>
-      <p:sp>
-        <p:nvSpPr>
-          <p:cNvPr id="3" name="TextBox 2"/>
-          <p:cNvSpPr txBox="1"/>
-          <p:nvPr/>
-        </p:nvSpPr>
-        <p:spPr>
-          <a:xfrm>
-            <a:off x="713232" y="274320"/>
-            <a:ext cx="10765231" cy="274320"/>
-          </a:xfrm>
-          <a:prstGeom prst="rect">
-            <a:avLst/>
-          </a:prstGeom>
-          <a:noFill/>
-        </p:spPr>
-        <p:txBody>
-          <a:bodyPr wrap="square" anchor="t" lIns="0" rIns="0" tIns="0" bIns="0">
-            <a:spAutoFit/>
-          </a:bodyPr>
-          <a:lstStyle/>
-          <a:p>
-            <a:pPr algn="l">
-              <a:lnSpc>
-                <a:spcPct val="100000"/>
-              </a:lnSpc>
-            </a:pPr>
-            <a:r>
-              <a:rPr sz="1200" b="1" i="0" spc="140">
-                <a:solidFill>
-                  <a:srgbClr val="0093D0"/>
-                </a:solidFill>
-                <a:latin typeface="Segoe UI"/>
-              </a:rPr>
-              <a:t>03 · A DEMO</a:t>
-            </a:r>
-          </a:p>
-        </p:txBody>
-      </p:sp>
-      <p:sp>
-        <p:nvSpPr>
-          <p:cNvPr id="4" name="TextBox 3"/>
-          <p:cNvSpPr txBox="1"/>
-          <p:nvPr/>
-        </p:nvSpPr>
-        <p:spPr>
-          <a:xfrm>
-            <a:off x="713232" y="585216"/>
-            <a:ext cx="10765231" cy="566928"/>
-          </a:xfrm>
-          <a:prstGeom prst="rect">
-            <a:avLst/>
-          </a:prstGeom>
-          <a:noFill/>
-        </p:spPr>
-        <p:txBody>
-          <a:bodyPr wrap="square" anchor="t" lIns="0" rIns="0" tIns="0" bIns="0">
-            <a:spAutoFit/>
-          </a:bodyPr>
-          <a:lstStyle/>
-          <a:p>
-            <a:pPr algn="l">
-              <a:lnSpc>
-                <a:spcPct val="100000"/>
-              </a:lnSpc>
-            </a:pPr>
-            <a:r>
-              <a:rPr sz="3200" b="1" i="0">
-                <a:solidFill>
-                  <a:srgbClr val="0B1B2B"/>
-                </a:solidFill>
-                <a:latin typeface="Segoe UI"/>
-              </a:rPr>
-              <a:t>Armadilhas de bancada</a:t>
-            </a:r>
-          </a:p>
-        </p:txBody>
-      </p:sp>
-      <p:sp>
-        <p:nvSpPr>
-          <p:cNvPr id="5" name="Oval 4"/>
-          <p:cNvSpPr/>
-          <p:nvPr/>
-        </p:nvSpPr>
-        <p:spPr>
-          <a:xfrm>
-            <a:off x="713232" y="6492240"/>
-            <a:ext cx="82296" cy="82296"/>
-          </a:xfrm>
-          <a:prstGeom prst="ellipse">
-            <a:avLst/>
-          </a:prstGeom>
-          <a:solidFill>
-            <a:srgbClr val="22C3E6"/>
-          </a:solidFill>
-          <a:ln>
-            <a:noFill/>
-          </a:ln>
-          <a:effectLst/>
-        </p:spPr>
-        <p:style>
-          <a:lnRef idx="1">
-            <a:schemeClr val="accent1"/>
-          </a:lnRef>
-          <a:fillRef idx="3">
-            <a:schemeClr val="accent1"/>
-          </a:fillRef>
-          <a:effectRef idx="2">
-            <a:schemeClr val="accent1"/>
-          </a:effectRef>
-          <a:fontRef idx="minor">
-            <a:schemeClr val="lt1"/>
-          </a:fontRef>
-        </p:style>
-        <p:txBody>
-          <a:bodyPr rtlCol="0" anchor="ctr"/>
-          <a:lstStyle/>
-          <a:p>
-            <a:pPr algn="ctr"/>
-          </a:p>
-        </p:txBody>
-      </p:sp>
-      <p:sp>
-        <p:nvSpPr>
-          <p:cNvPr id="6" name="TextBox 5"/>
-          <p:cNvSpPr txBox="1"/>
-          <p:nvPr/>
-        </p:nvSpPr>
-        <p:spPr>
-          <a:xfrm>
-            <a:off x="877824" y="6400800"/>
-            <a:ext cx="8229600" cy="274320"/>
-          </a:xfrm>
-          <a:prstGeom prst="rect">
-            <a:avLst/>
-          </a:prstGeom>
-          <a:noFill/>
-        </p:spPr>
-        <p:txBody>
-          <a:bodyPr wrap="square" anchor="t" lIns="0" rIns="0" tIns="0" bIns="0">
-            <a:spAutoFit/>
-          </a:bodyPr>
-          <a:lstStyle/>
-          <a:p>
-            <a:pPr algn="l">
-              <a:lnSpc>
-                <a:spcPct val="100000"/>
-              </a:lnSpc>
-            </a:pPr>
-            <a:r>
-              <a:rPr sz="1000" b="1" i="0">
-                <a:solidFill>
-                  <a:srgbClr val="0B1B2B"/>
-                </a:solidFill>
-                <a:latin typeface="Segoe UI"/>
-              </a:rPr>
-              <a:t>M2</a:t>
-            </a:r>
-            <a:r>
-              <a:rPr sz="1000" b="0" i="0">
-                <a:solidFill>
-                  <a:srgbClr val="566577"/>
-                </a:solidFill>
-                <a:latin typeface="Segoe UI"/>
-              </a:rPr>
-              <a:t> · IA EMBARCADA &amp; CONECTIVIDADE</a:t>
-            </a:r>
-          </a:p>
-        </p:txBody>
-      </p:sp>
-      <p:sp>
-        <p:nvSpPr>
-          <p:cNvPr id="7" name="TextBox 6"/>
-          <p:cNvSpPr txBox="1"/>
-          <p:nvPr/>
-        </p:nvSpPr>
-        <p:spPr>
-          <a:xfrm>
-            <a:off x="10972800" y="6400800"/>
-            <a:ext cx="502920" cy="274320"/>
-          </a:xfrm>
-          <a:prstGeom prst="rect">
-            <a:avLst/>
-          </a:prstGeom>
-          <a:noFill/>
-        </p:spPr>
-        <p:txBody>
-          <a:bodyPr wrap="square" anchor="t" lIns="0" rIns="0" tIns="0" bIns="0">
-            <a:spAutoFit/>
-          </a:bodyPr>
-          <a:lstStyle/>
-          <a:p>
-            <a:pPr algn="r">
-              <a:lnSpc>
-                <a:spcPct val="100000"/>
-              </a:lnSpc>
-            </a:pPr>
-            <a:r>
-              <a:rPr sz="1000" b="0" i="0">
-                <a:solidFill>
-                  <a:srgbClr val="566577"/>
-                </a:solidFill>
-                <a:latin typeface="Segoe UI"/>
-              </a:rPr>
-              <a:t>18</a:t>
-            </a:r>
-          </a:p>
-        </p:txBody>
-      </p:sp>
-      <p:sp>
-        <p:nvSpPr>
-          <p:cNvPr id="8" name="Rounded Rectangle 7"/>
-          <p:cNvSpPr/>
-          <p:nvPr/>
-        </p:nvSpPr>
-        <p:spPr>
-          <a:xfrm>
-            <a:off x="713232" y="1554480"/>
-            <a:ext cx="5282031" cy="2244852"/>
-          </a:xfrm>
-          <a:prstGeom prst="roundRect">
-            <a:avLst>
-              <a:gd name="adj" fmla="val 7000"/>
-            </a:avLst>
-          </a:prstGeom>
-          <a:solidFill>
-            <a:srgbClr val="EDF3F8"/>
-          </a:solidFill>
-          <a:ln>
-            <a:noFill/>
-          </a:ln>
-          <a:effectLst/>
-        </p:spPr>
-        <p:style>
-          <a:lnRef idx="1">
-            <a:schemeClr val="accent1"/>
-          </a:lnRef>
-          <a:fillRef idx="3">
-            <a:schemeClr val="accent1"/>
-          </a:fillRef>
-          <a:effectRef idx="2">
-            <a:schemeClr val="accent1"/>
-          </a:effectRef>
-          <a:fontRef idx="minor">
-            <a:schemeClr val="lt1"/>
-          </a:fontRef>
-        </p:style>
-        <p:txBody>
-          <a:bodyPr rtlCol="0" anchor="ctr"/>
-          <a:lstStyle/>
-          <a:p>
-            <a:pPr algn="ctr"/>
-          </a:p>
-        </p:txBody>
-      </p:sp>
-      <p:sp>
-        <p:nvSpPr>
-          <p:cNvPr id="9" name="TextBox 8"/>
-          <p:cNvSpPr txBox="1"/>
-          <p:nvPr/>
-        </p:nvSpPr>
-        <p:spPr>
-          <a:xfrm>
-            <a:off x="932688" y="1700784"/>
-            <a:ext cx="4843119" cy="320040"/>
-          </a:xfrm>
-          <a:prstGeom prst="rect">
-            <a:avLst/>
-          </a:prstGeom>
-          <a:noFill/>
-        </p:spPr>
-        <p:txBody>
-          <a:bodyPr wrap="square" anchor="t" lIns="0" rIns="0" tIns="0" bIns="0">
-            <a:spAutoFit/>
-          </a:bodyPr>
-          <a:lstStyle/>
-          <a:p>
-            <a:pPr algn="l">
-              <a:lnSpc>
-                <a:spcPct val="100000"/>
-              </a:lnSpc>
-            </a:pPr>
-            <a:r>
-              <a:rPr sz="1400" b="1" i="0">
-                <a:solidFill>
-                  <a:srgbClr val="0B1B2B"/>
-                </a:solidFill>
-                <a:latin typeface="Segoe UI"/>
-              </a:rPr>
-              <a:t>A antena</a:t>
-            </a:r>
-          </a:p>
-        </p:txBody>
-      </p:sp>
-      <p:sp>
-        <p:nvSpPr>
-          <p:cNvPr id="10" name="TextBox 9"/>
-          <p:cNvSpPr txBox="1"/>
-          <p:nvPr/>
-        </p:nvSpPr>
-        <p:spPr>
-          <a:xfrm>
-            <a:off x="932688" y="2084832"/>
-            <a:ext cx="4843119" cy="1604772"/>
-          </a:xfrm>
-          <a:prstGeom prst="rect">
-            <a:avLst/>
-          </a:prstGeom>
-          <a:noFill/>
-        </p:spPr>
-        <p:txBody>
-          <a:bodyPr wrap="square" anchor="t" lIns="0" rIns="0" tIns="0" bIns="0">
-            <a:spAutoFit/>
-          </a:bodyPr>
-          <a:lstStyle/>
-          <a:p>
-            <a:pPr algn="l">
-              <a:lnSpc>
-                <a:spcPct val="115000"/>
-              </a:lnSpc>
-            </a:pPr>
-            <a:r>
-              <a:rPr sz="1200" b="0" i="0">
-                <a:solidFill>
-                  <a:srgbClr val="566577"/>
-                </a:solidFill>
-                <a:latin typeface="Segoe UI"/>
-              </a:rPr>
-              <a:t>uma por receptor: o J2 da SMA-DK alimenta a 3 V, o EVK a 3,3 V — nunca no mesmo cabo</a:t>
-            </a:r>
-          </a:p>
-          <a:p>
-            <a:pPr algn="l">
-              <a:lnSpc>
-                <a:spcPct val="115000"/>
-              </a:lnSpc>
-            </a:pPr>
-            <a:r>
-              <a:rPr sz="1200" b="0" i="0">
-                <a:solidFill>
-                  <a:srgbClr val="566577"/>
-                </a:solidFill>
-                <a:latin typeface="Segoe UI"/>
-              </a:rPr>
-              <a:t>plano de terra de ø12 cm sob cada ANN-MB2</a:t>
-            </a:r>
-          </a:p>
-          <a:p>
-            <a:pPr algn="l">
-              <a:lnSpc>
-                <a:spcPct val="115000"/>
-              </a:lnSpc>
-            </a:pPr>
-            <a:r>
-              <a:rPr sz="1200" b="0" i="0">
-                <a:solidFill>
-                  <a:srgbClr val="566577"/>
-                </a:solidFill>
-                <a:latin typeface="Segoe UI"/>
-              </a:rPr>
-              <a:t>o conector RF do EVK só recebe antena ou simulador</a:t>
-            </a:r>
-          </a:p>
-        </p:txBody>
-      </p:sp>
-      <p:sp>
-        <p:nvSpPr>
-          <p:cNvPr id="11" name="Rounded Rectangle 10"/>
-          <p:cNvSpPr/>
-          <p:nvPr/>
-        </p:nvSpPr>
-        <p:spPr>
-          <a:xfrm>
-            <a:off x="6196431" y="1554480"/>
-            <a:ext cx="5282031" cy="2244852"/>
-          </a:xfrm>
-          <a:prstGeom prst="roundRect">
-            <a:avLst>
-              <a:gd name="adj" fmla="val 7000"/>
-            </a:avLst>
-          </a:prstGeom>
-          <a:solidFill>
-            <a:srgbClr val="EDF3F8"/>
-          </a:solidFill>
-          <a:ln>
-            <a:noFill/>
-          </a:ln>
-          <a:effectLst/>
-        </p:spPr>
-        <p:style>
-          <a:lnRef idx="1">
-            <a:schemeClr val="accent1"/>
-          </a:lnRef>
-          <a:fillRef idx="3">
-            <a:schemeClr val="accent1"/>
-          </a:fillRef>
-          <a:effectRef idx="2">
-            <a:schemeClr val="accent1"/>
-          </a:effectRef>
-          <a:fontRef idx="minor">
-            <a:schemeClr val="lt1"/>
-          </a:fontRef>
-        </p:style>
-        <p:txBody>
-          <a:bodyPr rtlCol="0" anchor="ctr"/>
-          <a:lstStyle/>
-          <a:p>
-            <a:pPr algn="ctr"/>
-          </a:p>
-        </p:txBody>
-      </p:sp>
-      <p:sp>
-        <p:nvSpPr>
-          <p:cNvPr id="12" name="TextBox 11"/>
-          <p:cNvSpPr txBox="1"/>
-          <p:nvPr/>
-        </p:nvSpPr>
-        <p:spPr>
-          <a:xfrm>
-            <a:off x="6415887" y="1700784"/>
-            <a:ext cx="4843119" cy="320040"/>
-          </a:xfrm>
-          <a:prstGeom prst="rect">
-            <a:avLst/>
-          </a:prstGeom>
-          <a:noFill/>
-        </p:spPr>
-        <p:txBody>
-          <a:bodyPr wrap="square" anchor="t" lIns="0" rIns="0" tIns="0" bIns="0">
-            <a:spAutoFit/>
-          </a:bodyPr>
-          <a:lstStyle/>
-          <a:p>
-            <a:pPr algn="l">
-              <a:lnSpc>
-                <a:spcPct val="100000"/>
-              </a:lnSpc>
-            </a:pPr>
-            <a:r>
-              <a:rPr sz="1400" b="1" i="0">
-                <a:solidFill>
-                  <a:srgbClr val="0B1B2B"/>
-                </a:solidFill>
-                <a:latin typeface="Segoe UI"/>
-              </a:rPr>
-              <a:t>A chave I2C/SPI do EVK</a:t>
-            </a:r>
-          </a:p>
-        </p:txBody>
-      </p:sp>
-      <p:sp>
-        <p:nvSpPr>
-          <p:cNvPr id="13" name="TextBox 12"/>
-          <p:cNvSpPr txBox="1"/>
-          <p:nvPr/>
-        </p:nvSpPr>
-        <p:spPr>
-          <a:xfrm>
-            <a:off x="6415887" y="2084832"/>
-            <a:ext cx="4843119" cy="1604772"/>
-          </a:xfrm>
-          <a:prstGeom prst="rect">
-            <a:avLst/>
-          </a:prstGeom>
-          <a:noFill/>
-        </p:spPr>
-        <p:txBody>
-          <a:bodyPr wrap="square" anchor="t" lIns="0" rIns="0" tIns="0" bIns="0">
-            <a:spAutoFit/>
-          </a:bodyPr>
-          <a:lstStyle/>
-          <a:p>
-            <a:pPr algn="l">
-              <a:lnSpc>
-                <a:spcPct val="115000"/>
-              </a:lnSpc>
-            </a:pPr>
-            <a:r>
-              <a:rPr sz="1200" b="0" i="0">
-                <a:solidFill>
-                  <a:srgbClr val="566577"/>
-                </a:solidFill>
-                <a:latin typeface="Segoe UI"/>
-              </a:rPr>
-              <a:t>nunca mover com o EVK ligado: pode danificar o chip</a:t>
-            </a:r>
-          </a:p>
-          <a:p>
-            <a:pPr algn="l">
-              <a:lnSpc>
-                <a:spcPct val="115000"/>
-              </a:lnSpc>
-            </a:pPr>
-            <a:r>
-              <a:rPr sz="1200" b="0" i="0">
-                <a:solidFill>
-                  <a:srgbClr val="566577"/>
-                </a:solidFill>
-                <a:latin typeface="Segoe UI"/>
-              </a:rPr>
-              <a:t>em SPI, o DB9 e a UART do conector frontal ficam desativados</a:t>
-            </a:r>
-          </a:p>
-          <a:p>
-            <a:pPr algn="l">
-              <a:lnSpc>
-                <a:spcPct val="115000"/>
-              </a:lnSpc>
-            </a:pPr>
-            <a:r>
-              <a:rPr sz="1200" b="0" i="0">
-                <a:solidFill>
-                  <a:srgbClr val="566577"/>
-                </a:solidFill>
-                <a:latin typeface="Segoe UI"/>
-              </a:rPr>
-              <a:t>o sintoma parece driver: 'a porta COM não manda nada'</a:t>
-            </a:r>
-          </a:p>
-        </p:txBody>
-      </p:sp>
-      <p:sp>
-        <p:nvSpPr>
-          <p:cNvPr id="14" name="Rounded Rectangle 13"/>
-          <p:cNvSpPr/>
-          <p:nvPr/>
-        </p:nvSpPr>
-        <p:spPr>
-          <a:xfrm>
-            <a:off x="713232" y="4000500"/>
-            <a:ext cx="5282031" cy="2244852"/>
-          </a:xfrm>
-          <a:prstGeom prst="roundRect">
-            <a:avLst>
-              <a:gd name="adj" fmla="val 7000"/>
-            </a:avLst>
-          </a:prstGeom>
-          <a:solidFill>
-            <a:srgbClr val="EDF3F8"/>
-          </a:solidFill>
-          <a:ln>
-            <a:noFill/>
-          </a:ln>
-          <a:effectLst/>
-        </p:spPr>
-        <p:style>
-          <a:lnRef idx="1">
-            <a:schemeClr val="accent1"/>
-          </a:lnRef>
-          <a:fillRef idx="3">
-            <a:schemeClr val="accent1"/>
-          </a:fillRef>
-          <a:effectRef idx="2">
-            <a:schemeClr val="accent1"/>
-          </a:effectRef>
-          <a:fontRef idx="minor">
-            <a:schemeClr val="lt1"/>
-          </a:fontRef>
-        </p:style>
-        <p:txBody>
-          <a:bodyPr rtlCol="0" anchor="ctr"/>
-          <a:lstStyle/>
-          <a:p>
-            <a:pPr algn="ctr"/>
-          </a:p>
-        </p:txBody>
-      </p:sp>
-      <p:sp>
-        <p:nvSpPr>
-          <p:cNvPr id="15" name="TextBox 14"/>
-          <p:cNvSpPr txBox="1"/>
-          <p:nvPr/>
-        </p:nvSpPr>
-        <p:spPr>
-          <a:xfrm>
-            <a:off x="932688" y="4146804"/>
-            <a:ext cx="4843119" cy="320040"/>
-          </a:xfrm>
-          <a:prstGeom prst="rect">
-            <a:avLst/>
-          </a:prstGeom>
-          <a:noFill/>
-        </p:spPr>
-        <p:txBody>
-          <a:bodyPr wrap="square" anchor="t" lIns="0" rIns="0" tIns="0" bIns="0">
-            <a:spAutoFit/>
-          </a:bodyPr>
-          <a:lstStyle/>
-          <a:p>
-            <a:pPr algn="l">
-              <a:lnSpc>
-                <a:spcPct val="100000"/>
-              </a:lnSpc>
-            </a:pPr>
-            <a:r>
-              <a:rPr sz="1400" b="1" i="0">
-                <a:solidFill>
-                  <a:srgbClr val="0B1B2B"/>
-                </a:solidFill>
-                <a:latin typeface="Segoe UI"/>
-              </a:rPr>
-              <a:t>Sem bateria de backup</a:t>
-            </a:r>
-          </a:p>
-        </p:txBody>
-      </p:sp>
-      <p:sp>
-        <p:nvSpPr>
-          <p:cNvPr id="16" name="TextBox 15"/>
-          <p:cNvSpPr txBox="1"/>
-          <p:nvPr/>
-        </p:nvSpPr>
-        <p:spPr>
-          <a:xfrm>
-            <a:off x="932688" y="4530852"/>
-            <a:ext cx="4843119" cy="1604772"/>
-          </a:xfrm>
-          <a:prstGeom prst="rect">
-            <a:avLst/>
-          </a:prstGeom>
-          <a:noFill/>
-        </p:spPr>
-        <p:txBody>
-          <a:bodyPr wrap="square" anchor="t" lIns="0" rIns="0" tIns="0" bIns="0">
-            <a:spAutoFit/>
-          </a:bodyPr>
-          <a:lstStyle/>
-          <a:p>
-            <a:pPr algn="l">
-              <a:lnSpc>
-                <a:spcPct val="115000"/>
-              </a:lnSpc>
-            </a:pPr>
-            <a:r>
-              <a:rPr sz="1200" b="0" i="0">
-                <a:solidFill>
-                  <a:srgbClr val="566577"/>
-                </a:solidFill>
-                <a:latin typeface="Segoe UI"/>
-              </a:rPr>
-              <a:t>efemérides, almanaque e última posição se perdem</a:t>
-            </a:r>
-          </a:p>
-          <a:p>
-            <a:pPr algn="l">
-              <a:lnSpc>
-                <a:spcPct val="115000"/>
-              </a:lnSpc>
-            </a:pPr>
-            <a:r>
-              <a:rPr sz="1200" b="1" i="0">
-                <a:solidFill>
-                  <a:srgbClr val="0B1B2B"/>
-                </a:solidFill>
-                <a:latin typeface="Segoe UI"/>
-              </a:rPr>
-              <a:t>todo boot do X20P é partida a frio</a:t>
-            </a:r>
-            <a:r>
-              <a:rPr sz="1200" b="0" i="0">
-                <a:solidFill>
-                  <a:srgbClr val="566577"/>
-                </a:solidFill>
-                <a:latin typeface="Segoe UI"/>
-              </a:rPr>
-              <a:t> (~25 s de spec; 30 s medidos)</a:t>
-            </a:r>
-          </a:p>
-          <a:p>
-            <a:pPr algn="l">
-              <a:lnSpc>
-                <a:spcPct val="115000"/>
-              </a:lnSpc>
-            </a:pPr>
-            <a:r>
-              <a:rPr sz="1200" b="0" i="0">
-                <a:solidFill>
-                  <a:srgbClr val="566577"/>
-                </a:solidFill>
-                <a:latin typeface="Segoe UI"/>
-              </a:rPr>
-              <a:t>a configuração na flash sobrevive; conferir a versão com </a:t>
-            </a:r>
-            <a:r>
-              <a:rPr sz="1200" b="0" i="0">
-                <a:solidFill>
-                  <a:srgbClr val="566577"/>
-                </a:solidFill>
-                <a:latin typeface="Consolas"/>
-              </a:rPr>
-              <a:t>UBX-MON-VER</a:t>
-            </a:r>
-            <a:r>
-              <a:rPr sz="1200" b="0" i="0">
-                <a:solidFill>
-                  <a:srgbClr val="566577"/>
-                </a:solidFill>
-                <a:latin typeface="Segoe UI"/>
-              </a:rPr>
-              <a:t> (o curso usa HPG 2.11)</a:t>
-            </a:r>
-          </a:p>
-        </p:txBody>
-      </p:sp>
-      <p:sp>
-        <p:nvSpPr>
-          <p:cNvPr id="17" name="Rounded Rectangle 16"/>
-          <p:cNvSpPr/>
-          <p:nvPr/>
-        </p:nvSpPr>
-        <p:spPr>
-          <a:xfrm>
-            <a:off x="6196431" y="4000500"/>
-            <a:ext cx="5282031" cy="2244852"/>
-          </a:xfrm>
-          <a:prstGeom prst="roundRect">
-            <a:avLst>
-              <a:gd name="adj" fmla="val 7000"/>
-            </a:avLst>
-          </a:prstGeom>
-          <a:solidFill>
-            <a:srgbClr val="EDF3F8"/>
-          </a:solidFill>
-          <a:ln>
-            <a:noFill/>
-          </a:ln>
-          <a:effectLst/>
-        </p:spPr>
-        <p:style>
-          <a:lnRef idx="1">
-            <a:schemeClr val="accent1"/>
-          </a:lnRef>
-          <a:fillRef idx="3">
-            <a:schemeClr val="accent1"/>
-          </a:fillRef>
-          <a:effectRef idx="2">
-            <a:schemeClr val="accent1"/>
-          </a:effectRef>
-          <a:fontRef idx="minor">
-            <a:schemeClr val="lt1"/>
-          </a:fontRef>
-        </p:style>
-        <p:txBody>
-          <a:bodyPr rtlCol="0" anchor="ctr"/>
-          <a:lstStyle/>
-          <a:p>
-            <a:pPr algn="ctr"/>
-          </a:p>
-        </p:txBody>
-      </p:sp>
-      <p:sp>
-        <p:nvSpPr>
-          <p:cNvPr id="18" name="TextBox 17"/>
-          <p:cNvSpPr txBox="1"/>
-          <p:nvPr/>
-        </p:nvSpPr>
-        <p:spPr>
-          <a:xfrm>
-            <a:off x="6415887" y="4146804"/>
-            <a:ext cx="4843119" cy="320040"/>
-          </a:xfrm>
-          <a:prstGeom prst="rect">
-            <a:avLst/>
-          </a:prstGeom>
-          <a:noFill/>
-        </p:spPr>
-        <p:txBody>
-          <a:bodyPr wrap="square" anchor="t" lIns="0" rIns="0" tIns="0" bIns="0">
-            <a:spAutoFit/>
-          </a:bodyPr>
-          <a:lstStyle/>
-          <a:p>
-            <a:pPr algn="l">
-              <a:lnSpc>
-                <a:spcPct val="100000"/>
-              </a:lnSpc>
-            </a:pPr>
-            <a:r>
-              <a:rPr sz="1400" b="1" i="0">
-                <a:solidFill>
-                  <a:srgbClr val="0B1B2B"/>
-                </a:solidFill>
-                <a:latin typeface="Segoe UI"/>
-              </a:rPr>
-              <a:t>O firewall</a:t>
-            </a:r>
-          </a:p>
-        </p:txBody>
-      </p:sp>
-      <p:sp>
-        <p:nvSpPr>
-          <p:cNvPr id="19" name="TextBox 18"/>
-          <p:cNvSpPr txBox="1"/>
-          <p:nvPr/>
-        </p:nvSpPr>
-        <p:spPr>
-          <a:xfrm>
-            <a:off x="6415887" y="4530852"/>
-            <a:ext cx="4843119" cy="1604772"/>
-          </a:xfrm>
-          <a:prstGeom prst="rect">
-            <a:avLst/>
-          </a:prstGeom>
-          <a:noFill/>
-        </p:spPr>
-        <p:txBody>
-          <a:bodyPr wrap="square" anchor="t" lIns="0" rIns="0" tIns="0" bIns="0">
-            <a:spAutoFit/>
-          </a:bodyPr>
-          <a:lstStyle/>
-          <a:p>
-            <a:pPr algn="l">
-              <a:lnSpc>
-                <a:spcPct val="115000"/>
-              </a:lnSpc>
-            </a:pPr>
-            <a:r>
-              <a:rPr sz="1200" b="0" i="0">
-                <a:solidFill>
-                  <a:srgbClr val="566577"/>
-                </a:solidFill>
-                <a:latin typeface="Segoe UI"/>
-              </a:rPr>
-              <a:t>a porta do caster precisa estar liberada; na primeira execução o Windows pergunta</a:t>
-            </a:r>
-          </a:p>
-          <a:p>
-            <a:pPr algn="l">
-              <a:lnSpc>
-                <a:spcPct val="115000"/>
-              </a:lnSpc>
-            </a:pPr>
-            <a:r>
-              <a:rPr sz="1200" b="0" i="0">
-                <a:solidFill>
-                  <a:srgbClr val="566577"/>
-                </a:solidFill>
-                <a:latin typeface="Segoe UI"/>
-              </a:rPr>
-              <a:t>uma negativa distraída faz o rover não conectar sem sintoma que aponte a causa</a:t>
-            </a:r>
-          </a:p>
-          <a:p>
-            <a:pPr algn="l">
-              <a:lnSpc>
-                <a:spcPct val="115000"/>
-              </a:lnSpc>
-            </a:pPr>
-            <a:r>
-              <a:rPr sz="1200" b="0" i="0">
-                <a:solidFill>
-                  <a:srgbClr val="566577"/>
-                </a:solidFill>
-                <a:latin typeface="Segoe UI"/>
-              </a:rPr>
-              <a:t>desmarcar 'Get configuration automatically' no u-center 2: o padrão transmite tudo e causa latência</a:t>
-            </a:r>
-          </a:p>
-        </p:txBody>
-      </p:sp>
-    </p:spTree>
-  </p:cSld>
-  <p:clrMapOvr>
-    <a:masterClrMapping/>
-  </p:clrMapOvr>
-</p:sld>
-</file>
-
 <file path=ppt/slides/slide19.xml><?xml version="1.0" encoding="utf-8"?>
 <p:sld xmlns:a="http://schemas.openxmlformats.org/drawingml/2006/main" xmlns:p="http://schemas.openxmlformats.org/presentationml/2006/main" xmlns:r="http://schemas.openxmlformats.org/officeDocument/2006/relationships">
   <p:cSld>
@@ -14053,17 +15105,9 @@
           <a:prstGeom prst="rect">
             <a:avLst/>
           </a:prstGeom>
-          <a:gradFill rotWithShape="1">
-            <a:gsLst>
-              <a:gs pos="0">
-                <a:srgbClr val="061527"/>
-              </a:gs>
-              <a:gs pos="100000">
-                <a:srgbClr val="10314F"/>
-              </a:gs>
-            </a:gsLst>
-            <a:lin scaled="0" ang="19500000"/>
-          </a:gradFill>
+          <a:solidFill>
+            <a:srgbClr val="FFFFFF"/>
+          </a:solidFill>
           <a:ln>
             <a:noFill/>
           </a:ln>
@@ -14121,11 +15165,11 @@
             <a:r>
               <a:rPr sz="1200" b="1" i="0" spc="140">
                 <a:solidFill>
-                  <a:srgbClr val="22C3E6"/>
-                </a:solidFill>
-                <a:latin typeface="Segoe UI"/>
-              </a:rPr>
-              <a:t>RESUMO</a:t>
+                  <a:srgbClr val="0093D0"/>
+                </a:solidFill>
+                <a:latin typeface="Segoe UI"/>
+              </a:rPr>
+              <a:t>03 · A DEMO</a:t>
             </a:r>
           </a:p>
         </p:txBody>
@@ -14160,11 +15204,11 @@
             <a:r>
               <a:rPr sz="3200" b="1" i="0">
                 <a:solidFill>
-                  <a:srgbClr val="E8F1F8"/>
-                </a:solidFill>
-                <a:latin typeface="Segoe UI"/>
-              </a:rPr>
-              <a:t>Resumo do bloco 09</a:t>
+                  <a:srgbClr val="0B1B2B"/>
+                </a:solidFill>
+                <a:latin typeface="Segoe UI"/>
+              </a:rPr>
+              <a:t>Armadilhas de bancada</a:t>
             </a:r>
           </a:p>
         </p:txBody>
@@ -14243,7 +15287,7 @@
             <a:r>
               <a:rPr sz="1000" b="1" i="0">
                 <a:solidFill>
-                  <a:srgbClr val="E8F1F8"/>
+                  <a:srgbClr val="0B1B2B"/>
                 </a:solidFill>
                 <a:latin typeface="Segoe UI"/>
               </a:rPr>
@@ -14252,7 +15296,7 @@
             <a:r>
               <a:rPr sz="1000" b="0" i="0">
                 <a:solidFill>
-                  <a:srgbClr val="93A6B8"/>
+                  <a:srgbClr val="566577"/>
                 </a:solidFill>
                 <a:latin typeface="Segoe UI"/>
               </a:rPr>
@@ -14291,7 +15335,7 @@
             <a:r>
               <a:rPr sz="1000" b="0" i="0">
                 <a:solidFill>
-                  <a:srgbClr val="93A6B8"/>
+                  <a:srgbClr val="566577"/>
                 </a:solidFill>
                 <a:latin typeface="Segoe UI"/>
               </a:rPr>
@@ -14302,125 +15346,14 @@
       </p:sp>
       <p:sp>
         <p:nvSpPr>
-          <p:cNvPr id="8" name="TextBox 7"/>
-          <p:cNvSpPr txBox="1"/>
-          <p:nvPr/>
-        </p:nvSpPr>
-        <p:spPr>
-          <a:xfrm>
-            <a:off x="713232" y="1572768"/>
-            <a:ext cx="10765231" cy="1234440"/>
-          </a:xfrm>
-          <a:prstGeom prst="rect">
-            <a:avLst/>
-          </a:prstGeom>
-          <a:noFill/>
-        </p:spPr>
-        <p:txBody>
-          <a:bodyPr wrap="square">
-            <a:spAutoFit/>
-          </a:bodyPr>
-          <a:lstStyle/>
-          <a:p>
-            <a:pPr marL="256032" indent="-256032">
-              <a:spcAft>
-                <a:spcPts val="600"/>
-              </a:spcAft>
-              <a:buClr>
-                <a:srgbClr val="22C3E6"/>
-              </a:buClr>
-              <a:buSzPct val="90000"/>
-              <a:buFont typeface="Segoe UI"/>
-              <a:buChar char="▪"/>
-            </a:pPr>
-            <a:r>
-              <a:rPr sz="1500" b="0">
-                <a:solidFill>
-                  <a:srgbClr val="93A6B8"/>
-                </a:solidFill>
-                <a:latin typeface="Segoe UI"/>
-              </a:rPr>
-              <a:t>Mesmo céu, mesmos minutos: nRF9151 1,71 m, X20P 0,11 m, RTK 1 cm (CEP50, blocos de 100 s).</a:t>
-            </a:r>
-          </a:p>
-          <a:p>
-            <a:pPr marL="256032" indent="-256032">
-              <a:spcAft>
-                <a:spcPts val="600"/>
-              </a:spcAft>
-              <a:buClr>
-                <a:srgbClr val="22C3E6"/>
-              </a:buClr>
-              <a:buSzPct val="90000"/>
-              <a:buFont typeface="Segoe UI"/>
-              <a:buChar char="▪"/>
-            </a:pPr>
-            <a:r>
-              <a:rPr sz="1500" b="0">
-                <a:solidFill>
-                  <a:srgbClr val="93A6B8"/>
-                </a:solidFill>
-                <a:latin typeface="Segoe UI"/>
-              </a:rPr>
-              <a:t>Épocas com SBAS: dispersão maior em céu aberto (0,34 m contra 0,14 m). Comparativos rodam com SBAS desligado.</a:t>
-            </a:r>
-          </a:p>
-          <a:p>
-            <a:pPr marL="256032" indent="-256032">
-              <a:spcAft>
-                <a:spcPts val="600"/>
-              </a:spcAft>
-              <a:buClr>
-                <a:srgbClr val="22C3E6"/>
-              </a:buClr>
-              <a:buSzPct val="90000"/>
-              <a:buFont typeface="Segoe UI"/>
-              <a:buChar char="▪"/>
-            </a:pPr>
-            <a:r>
-              <a:rPr sz="1500" b="0">
-                <a:solidFill>
-                  <a:srgbClr val="93A6B8"/>
-                </a:solidFill>
-                <a:latin typeface="Segoe UI"/>
-              </a:rPr>
-              <a:t>Base a 1,42 m fixa em 5–19 s; estação a 16,4 km, 197 s. Primeira fixação 1149 s; refixação 2 s.</a:t>
-            </a:r>
-          </a:p>
-          <a:p>
-            <a:pPr marL="256032" indent="-256032">
-              <a:spcAft>
-                <a:spcPts val="600"/>
-              </a:spcAft>
-              <a:buClr>
-                <a:srgbClr val="22C3E6"/>
-              </a:buClr>
-              <a:buSzPct val="90000"/>
-              <a:buFont typeface="Segoe UI"/>
-              <a:buChar char="▪"/>
-            </a:pPr>
-            <a:r>
-              <a:rPr sz="1500" b="0">
-                <a:solidFill>
-                  <a:srgbClr val="93A6B8"/>
-                </a:solidFill>
-                <a:latin typeface="Segoe UI"/>
-              </a:rPr>
-              <a:t>CEP depende da janela. Blocos de mesma duração, ordem girada, SBAS desligado, só qualidade 4 em RTK.</a:t>
-            </a:r>
-          </a:p>
-        </p:txBody>
-      </p:sp>
-      <p:sp>
-        <p:nvSpPr>
-          <p:cNvPr id="9" name="Rounded Rectangle 8"/>
+          <p:cNvPr id="8" name="Rounded Rectangle 7"/>
           <p:cNvSpPr/>
           <p:nvPr/>
         </p:nvSpPr>
         <p:spPr>
           <a:xfrm>
-            <a:off x="713232" y="3291840"/>
-            <a:ext cx="2519857" cy="1828800"/>
+            <a:off x="713232" y="1554480"/>
+            <a:ext cx="5282031" cy="2244852"/>
           </a:xfrm>
           <a:prstGeom prst="roundRect">
             <a:avLst>
@@ -14428,12 +15361,10 @@
             </a:avLst>
           </a:prstGeom>
           <a:solidFill>
-            <a:srgbClr val="0D2138"/>
+            <a:srgbClr val="EDF3F8"/>
           </a:solidFill>
-          <a:ln w="12700">
-            <a:solidFill>
-              <a:srgbClr val="1C3A56"/>
-            </a:solidFill>
+          <a:ln>
+            <a:noFill/>
           </a:ln>
           <a:effectLst/>
         </p:spPr>
@@ -14461,14 +15392,14 @@
       </p:sp>
       <p:sp>
         <p:nvSpPr>
-          <p:cNvPr id="10" name="TextBox 9"/>
+          <p:cNvPr id="9" name="TextBox 8"/>
           <p:cNvSpPr txBox="1"/>
           <p:nvPr/>
         </p:nvSpPr>
         <p:spPr>
           <a:xfrm>
-            <a:off x="713232" y="3547872"/>
-            <a:ext cx="2519857" cy="822960"/>
+            <a:off x="932688" y="1700784"/>
+            <a:ext cx="4843119" cy="320040"/>
           </a:xfrm>
           <a:prstGeom prst="rect">
             <a:avLst/>
@@ -14481,33 +15412,33 @@
           </a:bodyPr>
           <a:lstStyle/>
           <a:p>
-            <a:pPr algn="ctr">
+            <a:pPr algn="l">
               <a:lnSpc>
                 <a:spcPct val="100000"/>
               </a:lnSpc>
             </a:pPr>
             <a:r>
-              <a:rPr sz="2400" b="1" i="0">
-                <a:solidFill>
-                  <a:srgbClr val="22C3E6"/>
-                </a:solidFill>
-                <a:latin typeface="Consolas"/>
-              </a:rPr>
-              <a:t>1,71 m → 1 cm</a:t>
-            </a:r>
-          </a:p>
-        </p:txBody>
-      </p:sp>
-      <p:sp>
-        <p:nvSpPr>
-          <p:cNvPr id="11" name="TextBox 10"/>
+              <a:rPr sz="1400" b="1" i="0">
+                <a:solidFill>
+                  <a:srgbClr val="0B1B2B"/>
+                </a:solidFill>
+                <a:latin typeface="Segoe UI"/>
+              </a:rPr>
+              <a:t>A antena</a:t>
+            </a:r>
+          </a:p>
+        </p:txBody>
+      </p:sp>
+      <p:sp>
+        <p:nvSpPr>
+          <p:cNvPr id="10" name="TextBox 9"/>
           <p:cNvSpPr txBox="1"/>
           <p:nvPr/>
         </p:nvSpPr>
         <p:spPr>
           <a:xfrm>
-            <a:off x="850392" y="4526280"/>
-            <a:ext cx="2245537" cy="502920"/>
+            <a:off x="932688" y="2084832"/>
+            <a:ext cx="4843119" cy="1604772"/>
           </a:xfrm>
           <a:prstGeom prst="rect">
             <a:avLst/>
@@ -14520,49 +15451,65 @@
           </a:bodyPr>
           <a:lstStyle/>
           <a:p>
-            <a:pPr algn="ctr">
-              <a:lnSpc>
-                <a:spcPct val="100000"/>
+            <a:pPr algn="l">
+              <a:lnSpc>
+                <a:spcPct val="115000"/>
               </a:lnSpc>
             </a:pPr>
             <a:r>
               <a:rPr sz="1200" b="0" i="0">
                 <a:solidFill>
-                  <a:srgbClr val="93A6B8"/>
-                </a:solidFill>
-                <a:latin typeface="Segoe UI"/>
-              </a:rPr>
-              <a:t>a escada no cânion</a:t>
-            </a:r>
-          </a:p>
-          <a:p>
-            <a:pPr algn="ctr">
-              <a:lnSpc>
-                <a:spcPct val="100000"/>
+                  <a:srgbClr val="566577"/>
+                </a:solidFill>
+                <a:latin typeface="Segoe UI"/>
+              </a:rPr>
+              <a:t>uma por receptor: o J2 da SMA-DK alimenta a 3 V, o EVK a 3,3 V — nunca no mesmo cabo</a:t>
+            </a:r>
+          </a:p>
+          <a:p>
+            <a:pPr algn="l">
+              <a:lnSpc>
+                <a:spcPct val="115000"/>
               </a:lnSpc>
             </a:pPr>
             <a:r>
               <a:rPr sz="1200" b="0" i="0">
                 <a:solidFill>
-                  <a:srgbClr val="93A6B8"/>
-                </a:solidFill>
-                <a:latin typeface="Segoe UI"/>
-              </a:rPr>
-              <a:t>blocos de 100 s</a:t>
-            </a:r>
-          </a:p>
-        </p:txBody>
-      </p:sp>
-      <p:sp>
-        <p:nvSpPr>
-          <p:cNvPr id="12" name="Rounded Rectangle 11"/>
+                  <a:srgbClr val="566577"/>
+                </a:solidFill>
+                <a:latin typeface="Segoe UI"/>
+              </a:rPr>
+              <a:t>plano de terra de ø12 cm sob cada ANN-MB2</a:t>
+            </a:r>
+          </a:p>
+          <a:p>
+            <a:pPr algn="l">
+              <a:lnSpc>
+                <a:spcPct val="115000"/>
+              </a:lnSpc>
+            </a:pPr>
+            <a:r>
+              <a:rPr sz="1200" b="0" i="0">
+                <a:solidFill>
+                  <a:srgbClr val="566577"/>
+                </a:solidFill>
+                <a:latin typeface="Segoe UI"/>
+              </a:rPr>
+              <a:t>o conector RF do EVK só recebe antena ou simulador</a:t>
+            </a:r>
+          </a:p>
+        </p:txBody>
+      </p:sp>
+      <p:sp>
+        <p:nvSpPr>
+          <p:cNvPr id="11" name="Rounded Rectangle 10"/>
           <p:cNvSpPr/>
           <p:nvPr/>
         </p:nvSpPr>
         <p:spPr>
           <a:xfrm>
-            <a:off x="3461689" y="3291840"/>
-            <a:ext cx="2519857" cy="1828800"/>
+            <a:off x="6196431" y="1554480"/>
+            <a:ext cx="5282031" cy="2244852"/>
           </a:xfrm>
           <a:prstGeom prst="roundRect">
             <a:avLst>
@@ -14570,12 +15517,10 @@
             </a:avLst>
           </a:prstGeom>
           <a:solidFill>
-            <a:srgbClr val="0D2138"/>
+            <a:srgbClr val="EDF3F8"/>
           </a:solidFill>
-          <a:ln w="12700">
-            <a:solidFill>
-              <a:srgbClr val="1C3A56"/>
-            </a:solidFill>
+          <a:ln>
+            <a:noFill/>
           </a:ln>
           <a:effectLst/>
         </p:spPr>
@@ -14603,14 +15548,14 @@
       </p:sp>
       <p:sp>
         <p:nvSpPr>
-          <p:cNvPr id="13" name="TextBox 12"/>
+          <p:cNvPr id="12" name="TextBox 11"/>
           <p:cNvSpPr txBox="1"/>
           <p:nvPr/>
         </p:nvSpPr>
         <p:spPr>
           <a:xfrm>
-            <a:off x="3461689" y="3547872"/>
-            <a:ext cx="2519857" cy="822960"/>
+            <a:off x="6415887" y="1700784"/>
+            <a:ext cx="4843119" cy="320040"/>
           </a:xfrm>
           <a:prstGeom prst="rect">
             <a:avLst/>
@@ -14623,33 +15568,33 @@
           </a:bodyPr>
           <a:lstStyle/>
           <a:p>
-            <a:pPr algn="ctr">
+            <a:pPr algn="l">
               <a:lnSpc>
                 <a:spcPct val="100000"/>
               </a:lnSpc>
             </a:pPr>
             <a:r>
-              <a:rPr sz="2400" b="1" i="0">
-                <a:solidFill>
-                  <a:srgbClr val="22C3E6"/>
-                </a:solidFill>
-                <a:latin typeface="Consolas"/>
-              </a:rPr>
-              <a:t>5 – 19 s</a:t>
-            </a:r>
-          </a:p>
-        </p:txBody>
-      </p:sp>
-      <p:sp>
-        <p:nvSpPr>
-          <p:cNvPr id="14" name="TextBox 13"/>
+              <a:rPr sz="1400" b="1" i="0">
+                <a:solidFill>
+                  <a:srgbClr val="0B1B2B"/>
+                </a:solidFill>
+                <a:latin typeface="Segoe UI"/>
+              </a:rPr>
+              <a:t>A chave I2C/SPI do EVK</a:t>
+            </a:r>
+          </a:p>
+        </p:txBody>
+      </p:sp>
+      <p:sp>
+        <p:nvSpPr>
+          <p:cNvPr id="13" name="TextBox 12"/>
           <p:cNvSpPr txBox="1"/>
           <p:nvPr/>
         </p:nvSpPr>
         <p:spPr>
           <a:xfrm>
-            <a:off x="3598849" y="4526280"/>
-            <a:ext cx="2245537" cy="502920"/>
+            <a:off x="6415887" y="2084832"/>
+            <a:ext cx="4843119" cy="1604772"/>
           </a:xfrm>
           <a:prstGeom prst="rect">
             <a:avLst/>
@@ -14662,49 +15607,65 @@
           </a:bodyPr>
           <a:lstStyle/>
           <a:p>
-            <a:pPr algn="ctr">
-              <a:lnSpc>
-                <a:spcPct val="100000"/>
+            <a:pPr algn="l">
+              <a:lnSpc>
+                <a:spcPct val="115000"/>
               </a:lnSpc>
             </a:pPr>
             <a:r>
               <a:rPr sz="1200" b="0" i="0">
                 <a:solidFill>
-                  <a:srgbClr val="93A6B8"/>
-                </a:solidFill>
-                <a:latin typeface="Segoe UI"/>
-              </a:rPr>
-              <a:t>até o RTK fixo</a:t>
-            </a:r>
-          </a:p>
-          <a:p>
-            <a:pPr algn="ctr">
-              <a:lnSpc>
-                <a:spcPct val="100000"/>
+                  <a:srgbClr val="566577"/>
+                </a:solidFill>
+                <a:latin typeface="Segoe UI"/>
+              </a:rPr>
+              <a:t>nunca mover com o EVK ligado: pode danificar o chip</a:t>
+            </a:r>
+          </a:p>
+          <a:p>
+            <a:pPr algn="l">
+              <a:lnSpc>
+                <a:spcPct val="115000"/>
               </a:lnSpc>
             </a:pPr>
             <a:r>
               <a:rPr sz="1200" b="0" i="0">
                 <a:solidFill>
-                  <a:srgbClr val="93A6B8"/>
-                </a:solidFill>
-                <a:latin typeface="Segoe UI"/>
-              </a:rPr>
-              <a:t>com a base a 1,42 m</a:t>
-            </a:r>
-          </a:p>
-        </p:txBody>
-      </p:sp>
-      <p:sp>
-        <p:nvSpPr>
-          <p:cNvPr id="15" name="Rounded Rectangle 14"/>
+                  <a:srgbClr val="566577"/>
+                </a:solidFill>
+                <a:latin typeface="Segoe UI"/>
+              </a:rPr>
+              <a:t>em SPI, o DB9 e a UART do conector frontal ficam desativados</a:t>
+            </a:r>
+          </a:p>
+          <a:p>
+            <a:pPr algn="l">
+              <a:lnSpc>
+                <a:spcPct val="115000"/>
+              </a:lnSpc>
+            </a:pPr>
+            <a:r>
+              <a:rPr sz="1200" b="0" i="0">
+                <a:solidFill>
+                  <a:srgbClr val="566577"/>
+                </a:solidFill>
+                <a:latin typeface="Segoe UI"/>
+              </a:rPr>
+              <a:t>o sintoma parece driver: 'a porta COM não manda nada'</a:t>
+            </a:r>
+          </a:p>
+        </p:txBody>
+      </p:sp>
+      <p:sp>
+        <p:nvSpPr>
+          <p:cNvPr id="14" name="Rounded Rectangle 13"/>
           <p:cNvSpPr/>
           <p:nvPr/>
         </p:nvSpPr>
         <p:spPr>
           <a:xfrm>
-            <a:off x="6210147" y="3291840"/>
-            <a:ext cx="2519857" cy="1828800"/>
+            <a:off x="713232" y="4000500"/>
+            <a:ext cx="5282031" cy="2244852"/>
           </a:xfrm>
           <a:prstGeom prst="roundRect">
             <a:avLst>
@@ -14712,12 +15673,10 @@
             </a:avLst>
           </a:prstGeom>
           <a:solidFill>
-            <a:srgbClr val="0D2138"/>
+            <a:srgbClr val="EDF3F8"/>
           </a:solidFill>
-          <a:ln w="12700">
-            <a:solidFill>
-              <a:srgbClr val="1C3A56"/>
-            </a:solidFill>
+          <a:ln>
+            <a:noFill/>
           </a:ln>
           <a:effectLst/>
         </p:spPr>
@@ -14745,14 +15704,14 @@
       </p:sp>
       <p:sp>
         <p:nvSpPr>
-          <p:cNvPr id="16" name="TextBox 15"/>
+          <p:cNvPr id="15" name="TextBox 14"/>
           <p:cNvSpPr txBox="1"/>
           <p:nvPr/>
         </p:nvSpPr>
         <p:spPr>
           <a:xfrm>
-            <a:off x="6210147" y="3547872"/>
-            <a:ext cx="2519857" cy="822960"/>
+            <a:off x="932688" y="4146804"/>
+            <a:ext cx="4843119" cy="320040"/>
           </a:xfrm>
           <a:prstGeom prst="rect">
             <a:avLst/>
@@ -14765,33 +15724,33 @@
           </a:bodyPr>
           <a:lstStyle/>
           <a:p>
-            <a:pPr algn="ctr">
+            <a:pPr algn="l">
               <a:lnSpc>
                 <a:spcPct val="100000"/>
               </a:lnSpc>
             </a:pPr>
             <a:r>
-              <a:rPr sz="2400" b="1" i="0">
-                <a:solidFill>
-                  <a:srgbClr val="22C3E6"/>
-                </a:solidFill>
-                <a:latin typeface="Consolas"/>
-              </a:rPr>
-              <a:t>10,4 ± 1,9 cm</a:t>
-            </a:r>
-          </a:p>
-        </p:txBody>
-      </p:sp>
-      <p:sp>
-        <p:nvSpPr>
-          <p:cNvPr id="17" name="TextBox 16"/>
+              <a:rPr sz="1400" b="1" i="0">
+                <a:solidFill>
+                  <a:srgbClr val="0B1B2B"/>
+                </a:solidFill>
+                <a:latin typeface="Segoe UI"/>
+              </a:rPr>
+              <a:t>Sem bateria de backup</a:t>
+            </a:r>
+          </a:p>
+        </p:txBody>
+      </p:sp>
+      <p:sp>
+        <p:nvSpPr>
+          <p:cNvPr id="16" name="TextBox 15"/>
           <p:cNvSpPr txBox="1"/>
           <p:nvPr/>
         </p:nvSpPr>
         <p:spPr>
           <a:xfrm>
-            <a:off x="6347307" y="4526280"/>
-            <a:ext cx="2245537" cy="502920"/>
+            <a:off x="932688" y="4530852"/>
+            <a:ext cx="4843119" cy="1604772"/>
           </a:xfrm>
           <a:prstGeom prst="rect">
             <a:avLst/>
@@ -14804,49 +15763,92 @@
           </a:bodyPr>
           <a:lstStyle/>
           <a:p>
-            <a:pPr algn="ctr">
-              <a:lnSpc>
-                <a:spcPct val="100000"/>
+            <a:pPr algn="l">
+              <a:lnSpc>
+                <a:spcPct val="115000"/>
               </a:lnSpc>
             </a:pPr>
             <a:r>
               <a:rPr sz="1200" b="0" i="0">
                 <a:solidFill>
-                  <a:srgbClr val="93A6B8"/>
-                </a:solidFill>
-                <a:latin typeface="Segoe UI"/>
-              </a:rPr>
-              <a:t>deslocamento medido</a:t>
-            </a:r>
-          </a:p>
-          <a:p>
-            <a:pPr algn="ctr">
-              <a:lnSpc>
-                <a:spcPct val="100000"/>
-              </a:lnSpc>
-            </a:pPr>
+                  <a:srgbClr val="566577"/>
+                </a:solidFill>
+                <a:latin typeface="Segoe UI"/>
+              </a:rPr>
+              <a:t>efemérides, almanaque e última posição se perdem</a:t>
+            </a:r>
+          </a:p>
+          <a:p>
+            <a:pPr algn="l">
+              <a:lnSpc>
+                <a:spcPct val="115000"/>
+              </a:lnSpc>
+            </a:pPr>
+            <a:r>
+              <a:rPr sz="1200" b="1" i="0">
+                <a:solidFill>
+                  <a:srgbClr val="0B1B2B"/>
+                </a:solidFill>
+                <a:latin typeface="Segoe UI"/>
+              </a:rPr>
+              <a:t>todo boot do X20P é partida a frio</a:t>
+            </a:r>
             <a:r>
               <a:rPr sz="1200" b="0" i="0">
                 <a:solidFill>
-                  <a:srgbClr val="93A6B8"/>
-                </a:solidFill>
-                <a:latin typeface="Segoe UI"/>
-              </a:rPr>
-              <a:t>contra ~14 cm anotados</a:t>
-            </a:r>
-          </a:p>
-        </p:txBody>
-      </p:sp>
-      <p:sp>
-        <p:nvSpPr>
-          <p:cNvPr id="18" name="Rounded Rectangle 17"/>
+                  <a:srgbClr val="566577"/>
+                </a:solidFill>
+                <a:latin typeface="Segoe UI"/>
+              </a:rPr>
+              <a:t> (~25 s de spec; 30 s medidos)</a:t>
+            </a:r>
+          </a:p>
+          <a:p>
+            <a:pPr algn="l">
+              <a:lnSpc>
+                <a:spcPct val="115000"/>
+              </a:lnSpc>
+            </a:pPr>
+            <a:r>
+              <a:rPr sz="1200" b="0" i="0">
+                <a:solidFill>
+                  <a:srgbClr val="566577"/>
+                </a:solidFill>
+                <a:latin typeface="Segoe UI"/>
+              </a:rPr>
+              <a:t>a configuração na flash sobrevive; conferir a versão com </a:t>
+            </a:r>
+            <a:r>
+              <a:rPr sz="1200" b="0" i="0">
+                <a:solidFill>
+                  <a:srgbClr val="566577"/>
+                </a:solidFill>
+                <a:latin typeface="Consolas"/>
+              </a:rPr>
+              <a:t>UBX-MON-VER</a:t>
+            </a:r>
+            <a:r>
+              <a:rPr sz="1200" b="0" i="0">
+                <a:solidFill>
+                  <a:srgbClr val="566577"/>
+                </a:solidFill>
+                <a:latin typeface="Segoe UI"/>
+              </a:rPr>
+              <a:t> (o curso usa HPG 2.11)</a:t>
+            </a:r>
+          </a:p>
+        </p:txBody>
+      </p:sp>
+      <p:sp>
+        <p:nvSpPr>
+          <p:cNvPr id="17" name="Rounded Rectangle 16"/>
           <p:cNvSpPr/>
           <p:nvPr/>
         </p:nvSpPr>
         <p:spPr>
           <a:xfrm>
-            <a:off x="8958605" y="3291840"/>
-            <a:ext cx="2519857" cy="1828800"/>
+            <a:off x="6196431" y="4000500"/>
+            <a:ext cx="5282031" cy="2244852"/>
           </a:xfrm>
           <a:prstGeom prst="roundRect">
             <a:avLst>
@@ -14854,12 +15856,10 @@
             </a:avLst>
           </a:prstGeom>
           <a:solidFill>
-            <a:srgbClr val="0D2138"/>
+            <a:srgbClr val="EDF3F8"/>
           </a:solidFill>
-          <a:ln w="12700">
-            <a:solidFill>
-              <a:srgbClr val="1C3A56"/>
-            </a:solidFill>
+          <a:ln>
+            <a:noFill/>
           </a:ln>
           <a:effectLst/>
         </p:spPr>
@@ -14887,14 +15887,14 @@
       </p:sp>
       <p:sp>
         <p:nvSpPr>
-          <p:cNvPr id="19" name="TextBox 18"/>
+          <p:cNvPr id="18" name="TextBox 17"/>
           <p:cNvSpPr txBox="1"/>
           <p:nvPr/>
         </p:nvSpPr>
         <p:spPr>
           <a:xfrm>
-            <a:off x="8958605" y="3547872"/>
-            <a:ext cx="2519857" cy="822960"/>
+            <a:off x="6415887" y="4146804"/>
+            <a:ext cx="4843119" cy="320040"/>
           </a:xfrm>
           <a:prstGeom prst="rect">
             <a:avLst/>
@@ -14907,33 +15907,33 @@
           </a:bodyPr>
           <a:lstStyle/>
           <a:p>
-            <a:pPr algn="ctr">
+            <a:pPr algn="l">
               <a:lnSpc>
                 <a:spcPct val="100000"/>
               </a:lnSpc>
             </a:pPr>
             <a:r>
-              <a:rPr sz="2400" b="1" i="0">
-                <a:solidFill>
-                  <a:srgbClr val="22C3E6"/>
-                </a:solidFill>
-                <a:latin typeface="Consolas"/>
-              </a:rPr>
-              <a:t>5 falhas</a:t>
-            </a:r>
-          </a:p>
-        </p:txBody>
-      </p:sp>
-      <p:sp>
-        <p:nvSpPr>
-          <p:cNvPr id="20" name="TextBox 19"/>
+              <a:rPr sz="1400" b="1" i="0">
+                <a:solidFill>
+                  <a:srgbClr val="0B1B2B"/>
+                </a:solidFill>
+                <a:latin typeface="Segoe UI"/>
+              </a:rPr>
+              <a:t>O firewall</a:t>
+            </a:r>
+          </a:p>
+        </p:txBody>
+      </p:sp>
+      <p:sp>
+        <p:nvSpPr>
+          <p:cNvPr id="19" name="TextBox 18"/>
           <p:cNvSpPr txBox="1"/>
           <p:nvPr/>
         </p:nvSpPr>
         <p:spPr>
           <a:xfrm>
-            <a:off x="9095765" y="4526280"/>
-            <a:ext cx="2245537" cy="502920"/>
+            <a:off x="6415887" y="4530852"/>
+            <a:ext cx="4843119" cy="1604772"/>
           </a:xfrm>
           <a:prstGeom prst="rect">
             <a:avLst/>
@@ -14946,74 +15946,51 @@
           </a:bodyPr>
           <a:lstStyle/>
           <a:p>
-            <a:pPr algn="ctr">
-              <a:lnSpc>
-                <a:spcPct val="100000"/>
+            <a:pPr algn="l">
+              <a:lnSpc>
+                <a:spcPct val="115000"/>
               </a:lnSpc>
             </a:pPr>
             <a:r>
               <a:rPr sz="1200" b="0" i="0">
                 <a:solidFill>
-                  <a:srgbClr val="93A6B8"/>
-                </a:solidFill>
-                <a:latin typeface="Segoe UI"/>
-              </a:rPr>
-              <a:t>documentadas e</a:t>
-            </a:r>
-          </a:p>
-          <a:p>
-            <a:pPr algn="ctr">
-              <a:lnSpc>
-                <a:spcPct val="100000"/>
+                  <a:srgbClr val="566577"/>
+                </a:solidFill>
+                <a:latin typeface="Segoe UI"/>
+              </a:rPr>
+              <a:t>a porta do caster precisa estar liberada; na primeira execução o Windows pergunta</a:t>
+            </a:r>
+          </a:p>
+          <a:p>
+            <a:pPr algn="l">
+              <a:lnSpc>
+                <a:spcPct val="115000"/>
               </a:lnSpc>
             </a:pPr>
             <a:r>
               <a:rPr sz="1200" b="0" i="0">
                 <a:solidFill>
-                  <a:srgbClr val="93A6B8"/>
-                </a:solidFill>
-                <a:latin typeface="Segoe UI"/>
-              </a:rPr>
-              <a:t>determinísticas</a:t>
-            </a:r>
-          </a:p>
-        </p:txBody>
-      </p:sp>
-      <p:sp>
-        <p:nvSpPr>
-          <p:cNvPr id="21" name="TextBox 20"/>
-          <p:cNvSpPr txBox="1"/>
-          <p:nvPr/>
-        </p:nvSpPr>
-        <p:spPr>
-          <a:xfrm>
-            <a:off x="713232" y="5532120"/>
-            <a:ext cx="10765231" cy="457200"/>
-          </a:xfrm>
-          <a:prstGeom prst="rect">
-            <a:avLst/>
-          </a:prstGeom>
-          <a:noFill/>
-        </p:spPr>
-        <p:txBody>
-          <a:bodyPr wrap="square" anchor="t" lIns="0" rIns="0" tIns="0" bIns="0">
-            <a:spAutoFit/>
-          </a:bodyPr>
-          <a:lstStyle/>
-          <a:p>
-            <a:pPr algn="ctr">
-              <a:lnSpc>
-                <a:spcPct val="100000"/>
-              </a:lnSpc>
-            </a:pPr>
-            <a:r>
-              <a:rPr sz="1500" b="1" i="1">
-                <a:solidFill>
-                  <a:srgbClr val="22C3E6"/>
-                </a:solidFill>
-                <a:latin typeface="Segoe UI"/>
-              </a:rPr>
-              <a:t>Os números de bancada valem sob as regras de comparabilidade; fora delas, a mesma montagem produz conclusões opostas.</a:t>
+                  <a:srgbClr val="566577"/>
+                </a:solidFill>
+                <a:latin typeface="Segoe UI"/>
+              </a:rPr>
+              <a:t>uma negativa distraída faz o rover não conectar sem sintoma que aponte a causa</a:t>
+            </a:r>
+          </a:p>
+          <a:p>
+            <a:pPr algn="l">
+              <a:lnSpc>
+                <a:spcPct val="115000"/>
+              </a:lnSpc>
+            </a:pPr>
+            <a:r>
+              <a:rPr sz="1200" b="0" i="0">
+                <a:solidFill>
+                  <a:srgbClr val="566577"/>
+                </a:solidFill>
+                <a:latin typeface="Segoe UI"/>
+              </a:rPr>
+              <a:t>desmarcar 'Get configuration automatically' no u-center 2: o padrão transmite tudo e causa latência</a:t>
             </a:r>
           </a:p>
         </p:txBody>
@@ -15376,6 +16353,1003 @@
                 <a:latin typeface="Segoe UI"/>
               </a:rPr>
               <a:t>02</a:t>
+            </a:r>
+          </a:p>
+        </p:txBody>
+      </p:sp>
+    </p:spTree>
+  </p:cSld>
+  <p:clrMapOvr>
+    <a:masterClrMapping/>
+  </p:clrMapOvr>
+</p:sld>
+</file>
+
+<file path=ppt/slides/slide20.xml><?xml version="1.0" encoding="utf-8"?>
+<p:sld xmlns:a="http://schemas.openxmlformats.org/drawingml/2006/main" xmlns:p="http://schemas.openxmlformats.org/presentationml/2006/main" xmlns:r="http://schemas.openxmlformats.org/officeDocument/2006/relationships">
+  <p:cSld>
+    <p:spTree>
+      <p:nvGrpSpPr>
+        <p:cNvPr id="1" name=""/>
+        <p:cNvGrpSpPr/>
+        <p:nvPr/>
+      </p:nvGrpSpPr>
+      <p:grpSpPr/>
+      <p:sp>
+        <p:nvSpPr>
+          <p:cNvPr id="2" name="Rectangle 1"/>
+          <p:cNvSpPr/>
+          <p:nvPr/>
+        </p:nvSpPr>
+        <p:spPr>
+          <a:xfrm>
+            <a:off x="0" y="0"/>
+            <a:ext cx="12191695" cy="6858000"/>
+          </a:xfrm>
+          <a:prstGeom prst="rect">
+            <a:avLst/>
+          </a:prstGeom>
+          <a:gradFill rotWithShape="1">
+            <a:gsLst>
+              <a:gs pos="0">
+                <a:srgbClr val="061527"/>
+              </a:gs>
+              <a:gs pos="100000">
+                <a:srgbClr val="10314F"/>
+              </a:gs>
+            </a:gsLst>
+            <a:lin scaled="0" ang="19500000"/>
+          </a:gradFill>
+          <a:ln>
+            <a:noFill/>
+          </a:ln>
+          <a:effectLst/>
+        </p:spPr>
+        <p:style>
+          <a:lnRef idx="1">
+            <a:schemeClr val="accent1"/>
+          </a:lnRef>
+          <a:fillRef idx="3">
+            <a:schemeClr val="accent1"/>
+          </a:fillRef>
+          <a:effectRef idx="2">
+            <a:schemeClr val="accent1"/>
+          </a:effectRef>
+          <a:fontRef idx="minor">
+            <a:schemeClr val="lt1"/>
+          </a:fontRef>
+        </p:style>
+        <p:txBody>
+          <a:bodyPr rtlCol="0" anchor="ctr"/>
+          <a:lstStyle/>
+          <a:p>
+            <a:pPr algn="ctr"/>
+          </a:p>
+        </p:txBody>
+      </p:sp>
+      <p:sp>
+        <p:nvSpPr>
+          <p:cNvPr id="3" name="TextBox 2"/>
+          <p:cNvSpPr txBox="1"/>
+          <p:nvPr/>
+        </p:nvSpPr>
+        <p:spPr>
+          <a:xfrm>
+            <a:off x="713232" y="274320"/>
+            <a:ext cx="10765231" cy="274320"/>
+          </a:xfrm>
+          <a:prstGeom prst="rect">
+            <a:avLst/>
+          </a:prstGeom>
+          <a:noFill/>
+        </p:spPr>
+        <p:txBody>
+          <a:bodyPr wrap="square" anchor="t" lIns="0" rIns="0" tIns="0" bIns="0">
+            <a:spAutoFit/>
+          </a:bodyPr>
+          <a:lstStyle/>
+          <a:p>
+            <a:pPr algn="l">
+              <a:lnSpc>
+                <a:spcPct val="100000"/>
+              </a:lnSpc>
+            </a:pPr>
+            <a:r>
+              <a:rPr sz="1200" b="1" i="0" spc="140">
+                <a:solidFill>
+                  <a:srgbClr val="22C3E6"/>
+                </a:solidFill>
+                <a:latin typeface="Segoe UI"/>
+              </a:rPr>
+              <a:t>RESUMO</a:t>
+            </a:r>
+          </a:p>
+        </p:txBody>
+      </p:sp>
+      <p:sp>
+        <p:nvSpPr>
+          <p:cNvPr id="4" name="TextBox 3"/>
+          <p:cNvSpPr txBox="1"/>
+          <p:nvPr/>
+        </p:nvSpPr>
+        <p:spPr>
+          <a:xfrm>
+            <a:off x="713232" y="585216"/>
+            <a:ext cx="10765231" cy="566928"/>
+          </a:xfrm>
+          <a:prstGeom prst="rect">
+            <a:avLst/>
+          </a:prstGeom>
+          <a:noFill/>
+        </p:spPr>
+        <p:txBody>
+          <a:bodyPr wrap="square" anchor="t" lIns="0" rIns="0" tIns="0" bIns="0">
+            <a:spAutoFit/>
+          </a:bodyPr>
+          <a:lstStyle/>
+          <a:p>
+            <a:pPr algn="l">
+              <a:lnSpc>
+                <a:spcPct val="100000"/>
+              </a:lnSpc>
+            </a:pPr>
+            <a:r>
+              <a:rPr sz="3200" b="1" i="0">
+                <a:solidFill>
+                  <a:srgbClr val="E8F1F8"/>
+                </a:solidFill>
+                <a:latin typeface="Segoe UI"/>
+              </a:rPr>
+              <a:t>Resumo do bloco 09</a:t>
+            </a:r>
+          </a:p>
+        </p:txBody>
+      </p:sp>
+      <p:sp>
+        <p:nvSpPr>
+          <p:cNvPr id="5" name="Oval 4"/>
+          <p:cNvSpPr/>
+          <p:nvPr/>
+        </p:nvSpPr>
+        <p:spPr>
+          <a:xfrm>
+            <a:off x="713232" y="6492240"/>
+            <a:ext cx="82296" cy="82296"/>
+          </a:xfrm>
+          <a:prstGeom prst="ellipse">
+            <a:avLst/>
+          </a:prstGeom>
+          <a:solidFill>
+            <a:srgbClr val="22C3E6"/>
+          </a:solidFill>
+          <a:ln>
+            <a:noFill/>
+          </a:ln>
+          <a:effectLst/>
+        </p:spPr>
+        <p:style>
+          <a:lnRef idx="1">
+            <a:schemeClr val="accent1"/>
+          </a:lnRef>
+          <a:fillRef idx="3">
+            <a:schemeClr val="accent1"/>
+          </a:fillRef>
+          <a:effectRef idx="2">
+            <a:schemeClr val="accent1"/>
+          </a:effectRef>
+          <a:fontRef idx="minor">
+            <a:schemeClr val="lt1"/>
+          </a:fontRef>
+        </p:style>
+        <p:txBody>
+          <a:bodyPr rtlCol="0" anchor="ctr"/>
+          <a:lstStyle/>
+          <a:p>
+            <a:pPr algn="ctr"/>
+          </a:p>
+        </p:txBody>
+      </p:sp>
+      <p:sp>
+        <p:nvSpPr>
+          <p:cNvPr id="6" name="TextBox 5"/>
+          <p:cNvSpPr txBox="1"/>
+          <p:nvPr/>
+        </p:nvSpPr>
+        <p:spPr>
+          <a:xfrm>
+            <a:off x="877824" y="6400800"/>
+            <a:ext cx="8229600" cy="274320"/>
+          </a:xfrm>
+          <a:prstGeom prst="rect">
+            <a:avLst/>
+          </a:prstGeom>
+          <a:noFill/>
+        </p:spPr>
+        <p:txBody>
+          <a:bodyPr wrap="square" anchor="t" lIns="0" rIns="0" tIns="0" bIns="0">
+            <a:spAutoFit/>
+          </a:bodyPr>
+          <a:lstStyle/>
+          <a:p>
+            <a:pPr algn="l">
+              <a:lnSpc>
+                <a:spcPct val="100000"/>
+              </a:lnSpc>
+            </a:pPr>
+            <a:r>
+              <a:rPr sz="1000" b="1" i="0">
+                <a:solidFill>
+                  <a:srgbClr val="E8F1F8"/>
+                </a:solidFill>
+                <a:latin typeface="Segoe UI"/>
+              </a:rPr>
+              <a:t>M2</a:t>
+            </a:r>
+            <a:r>
+              <a:rPr sz="1000" b="0" i="0">
+                <a:solidFill>
+                  <a:srgbClr val="93A6B8"/>
+                </a:solidFill>
+                <a:latin typeface="Segoe UI"/>
+              </a:rPr>
+              <a:t> · IA EMBARCADA &amp; CONECTIVIDADE</a:t>
+            </a:r>
+          </a:p>
+        </p:txBody>
+      </p:sp>
+      <p:sp>
+        <p:nvSpPr>
+          <p:cNvPr id="7" name="TextBox 6"/>
+          <p:cNvSpPr txBox="1"/>
+          <p:nvPr/>
+        </p:nvSpPr>
+        <p:spPr>
+          <a:xfrm>
+            <a:off x="10972800" y="6400800"/>
+            <a:ext cx="502920" cy="274320"/>
+          </a:xfrm>
+          <a:prstGeom prst="rect">
+            <a:avLst/>
+          </a:prstGeom>
+          <a:noFill/>
+        </p:spPr>
+        <p:txBody>
+          <a:bodyPr wrap="square" anchor="t" lIns="0" rIns="0" tIns="0" bIns="0">
+            <a:spAutoFit/>
+          </a:bodyPr>
+          <a:lstStyle/>
+          <a:p>
+            <a:pPr algn="r">
+              <a:lnSpc>
+                <a:spcPct val="100000"/>
+              </a:lnSpc>
+            </a:pPr>
+            <a:r>
+              <a:rPr sz="1000" b="0" i="0">
+                <a:solidFill>
+                  <a:srgbClr val="93A6B8"/>
+                </a:solidFill>
+                <a:latin typeface="Segoe UI"/>
+              </a:rPr>
+              <a:t>20</a:t>
+            </a:r>
+          </a:p>
+        </p:txBody>
+      </p:sp>
+      <p:sp>
+        <p:nvSpPr>
+          <p:cNvPr id="8" name="TextBox 7"/>
+          <p:cNvSpPr txBox="1"/>
+          <p:nvPr/>
+        </p:nvSpPr>
+        <p:spPr>
+          <a:xfrm>
+            <a:off x="713232" y="1572768"/>
+            <a:ext cx="10765231" cy="1234440"/>
+          </a:xfrm>
+          <a:prstGeom prst="rect">
+            <a:avLst/>
+          </a:prstGeom>
+          <a:noFill/>
+        </p:spPr>
+        <p:txBody>
+          <a:bodyPr wrap="square">
+            <a:spAutoFit/>
+          </a:bodyPr>
+          <a:lstStyle/>
+          <a:p>
+            <a:pPr marL="256032" indent="-256032">
+              <a:spcAft>
+                <a:spcPts val="600"/>
+              </a:spcAft>
+              <a:buClr>
+                <a:srgbClr val="22C3E6"/>
+              </a:buClr>
+              <a:buSzPct val="90000"/>
+              <a:buFont typeface="Segoe UI"/>
+              <a:buChar char="▪"/>
+            </a:pPr>
+            <a:r>
+              <a:rPr sz="1500" b="0">
+                <a:solidFill>
+                  <a:srgbClr val="93A6B8"/>
+                </a:solidFill>
+                <a:latin typeface="Segoe UI"/>
+              </a:rPr>
+              <a:t>Mesmo céu, mesmos minutos: nRF9151 1,71 m, X20P 0,11 m, RTK 1 cm (CEP50, blocos de 100 s).</a:t>
+            </a:r>
+          </a:p>
+          <a:p>
+            <a:pPr marL="256032" indent="-256032">
+              <a:spcAft>
+                <a:spcPts val="600"/>
+              </a:spcAft>
+              <a:buClr>
+                <a:srgbClr val="22C3E6"/>
+              </a:buClr>
+              <a:buSzPct val="90000"/>
+              <a:buFont typeface="Segoe UI"/>
+              <a:buChar char="▪"/>
+            </a:pPr>
+            <a:r>
+              <a:rPr sz="1500" b="0">
+                <a:solidFill>
+                  <a:srgbClr val="93A6B8"/>
+                </a:solidFill>
+                <a:latin typeface="Segoe UI"/>
+              </a:rPr>
+              <a:t>Épocas com SBAS: dispersão maior em céu aberto (0,34 m contra 0,14 m). Comparativos rodam com SBAS desligado.</a:t>
+            </a:r>
+          </a:p>
+          <a:p>
+            <a:pPr marL="256032" indent="-256032">
+              <a:spcAft>
+                <a:spcPts val="600"/>
+              </a:spcAft>
+              <a:buClr>
+                <a:srgbClr val="22C3E6"/>
+              </a:buClr>
+              <a:buSzPct val="90000"/>
+              <a:buFont typeface="Segoe UI"/>
+              <a:buChar char="▪"/>
+            </a:pPr>
+            <a:r>
+              <a:rPr sz="1500" b="0">
+                <a:solidFill>
+                  <a:srgbClr val="93A6B8"/>
+                </a:solidFill>
+                <a:latin typeface="Segoe UI"/>
+              </a:rPr>
+              <a:t>Base a 1,42 m fixa em 5–19 s; PointPerfect por NTRIP, 197 s. Primeira fixação 1149 s; refixação 2 s.</a:t>
+            </a:r>
+          </a:p>
+          <a:p>
+            <a:pPr marL="256032" indent="-256032">
+              <a:spcAft>
+                <a:spcPts val="600"/>
+              </a:spcAft>
+              <a:buClr>
+                <a:srgbClr val="22C3E6"/>
+              </a:buClr>
+              <a:buSzPct val="90000"/>
+              <a:buFont typeface="Segoe UI"/>
+              <a:buChar char="▪"/>
+            </a:pPr>
+            <a:r>
+              <a:rPr sz="1500" b="0">
+                <a:solidFill>
+                  <a:srgbClr val="93A6B8"/>
+                </a:solidFill>
+                <a:latin typeface="Segoe UI"/>
+              </a:rPr>
+              <a:t>CEP depende da janela. Blocos de mesma duração, ordem girada, SBAS desligado, só qualidade 4 em RTK.</a:t>
+            </a:r>
+          </a:p>
+        </p:txBody>
+      </p:sp>
+      <p:sp>
+        <p:nvSpPr>
+          <p:cNvPr id="9" name="Rounded Rectangle 8"/>
+          <p:cNvSpPr/>
+          <p:nvPr/>
+        </p:nvSpPr>
+        <p:spPr>
+          <a:xfrm>
+            <a:off x="713232" y="3291840"/>
+            <a:ext cx="2519857" cy="1828800"/>
+          </a:xfrm>
+          <a:prstGeom prst="roundRect">
+            <a:avLst>
+              <a:gd name="adj" fmla="val 7000"/>
+            </a:avLst>
+          </a:prstGeom>
+          <a:solidFill>
+            <a:srgbClr val="0D2138"/>
+          </a:solidFill>
+          <a:ln w="12700">
+            <a:solidFill>
+              <a:srgbClr val="1C3A56"/>
+            </a:solidFill>
+          </a:ln>
+          <a:effectLst/>
+        </p:spPr>
+        <p:style>
+          <a:lnRef idx="1">
+            <a:schemeClr val="accent1"/>
+          </a:lnRef>
+          <a:fillRef idx="3">
+            <a:schemeClr val="accent1"/>
+          </a:fillRef>
+          <a:effectRef idx="2">
+            <a:schemeClr val="accent1"/>
+          </a:effectRef>
+          <a:fontRef idx="minor">
+            <a:schemeClr val="lt1"/>
+          </a:fontRef>
+        </p:style>
+        <p:txBody>
+          <a:bodyPr rtlCol="0" anchor="ctr"/>
+          <a:lstStyle/>
+          <a:p>
+            <a:pPr algn="ctr"/>
+          </a:p>
+        </p:txBody>
+      </p:sp>
+      <p:sp>
+        <p:nvSpPr>
+          <p:cNvPr id="10" name="TextBox 9"/>
+          <p:cNvSpPr txBox="1"/>
+          <p:nvPr/>
+        </p:nvSpPr>
+        <p:spPr>
+          <a:xfrm>
+            <a:off x="713232" y="3547872"/>
+            <a:ext cx="2519857" cy="822960"/>
+          </a:xfrm>
+          <a:prstGeom prst="rect">
+            <a:avLst/>
+          </a:prstGeom>
+          <a:noFill/>
+        </p:spPr>
+        <p:txBody>
+          <a:bodyPr wrap="square" anchor="t" lIns="0" rIns="0" tIns="0" bIns="0">
+            <a:spAutoFit/>
+          </a:bodyPr>
+          <a:lstStyle/>
+          <a:p>
+            <a:pPr algn="ctr">
+              <a:lnSpc>
+                <a:spcPct val="100000"/>
+              </a:lnSpc>
+            </a:pPr>
+            <a:r>
+              <a:rPr sz="2400" b="1" i="0">
+                <a:solidFill>
+                  <a:srgbClr val="22C3E6"/>
+                </a:solidFill>
+                <a:latin typeface="Consolas"/>
+              </a:rPr>
+              <a:t>1,71 m → 1 cm</a:t>
+            </a:r>
+          </a:p>
+        </p:txBody>
+      </p:sp>
+      <p:sp>
+        <p:nvSpPr>
+          <p:cNvPr id="11" name="TextBox 10"/>
+          <p:cNvSpPr txBox="1"/>
+          <p:nvPr/>
+        </p:nvSpPr>
+        <p:spPr>
+          <a:xfrm>
+            <a:off x="850392" y="4526280"/>
+            <a:ext cx="2245537" cy="502920"/>
+          </a:xfrm>
+          <a:prstGeom prst="rect">
+            <a:avLst/>
+          </a:prstGeom>
+          <a:noFill/>
+        </p:spPr>
+        <p:txBody>
+          <a:bodyPr wrap="square" anchor="t" lIns="0" rIns="0" tIns="0" bIns="0">
+            <a:spAutoFit/>
+          </a:bodyPr>
+          <a:lstStyle/>
+          <a:p>
+            <a:pPr algn="ctr">
+              <a:lnSpc>
+                <a:spcPct val="100000"/>
+              </a:lnSpc>
+            </a:pPr>
+            <a:r>
+              <a:rPr sz="1200" b="0" i="0">
+                <a:solidFill>
+                  <a:srgbClr val="93A6B8"/>
+                </a:solidFill>
+                <a:latin typeface="Segoe UI"/>
+              </a:rPr>
+              <a:t>a escada no cânion</a:t>
+            </a:r>
+          </a:p>
+          <a:p>
+            <a:pPr algn="ctr">
+              <a:lnSpc>
+                <a:spcPct val="100000"/>
+              </a:lnSpc>
+            </a:pPr>
+            <a:r>
+              <a:rPr sz="1200" b="0" i="0">
+                <a:solidFill>
+                  <a:srgbClr val="93A6B8"/>
+                </a:solidFill>
+                <a:latin typeface="Segoe UI"/>
+              </a:rPr>
+              <a:t>blocos de 100 s</a:t>
+            </a:r>
+          </a:p>
+        </p:txBody>
+      </p:sp>
+      <p:sp>
+        <p:nvSpPr>
+          <p:cNvPr id="12" name="Rounded Rectangle 11"/>
+          <p:cNvSpPr/>
+          <p:nvPr/>
+        </p:nvSpPr>
+        <p:spPr>
+          <a:xfrm>
+            <a:off x="3461689" y="3291840"/>
+            <a:ext cx="2519857" cy="1828800"/>
+          </a:xfrm>
+          <a:prstGeom prst="roundRect">
+            <a:avLst>
+              <a:gd name="adj" fmla="val 7000"/>
+            </a:avLst>
+          </a:prstGeom>
+          <a:solidFill>
+            <a:srgbClr val="0D2138"/>
+          </a:solidFill>
+          <a:ln w="12700">
+            <a:solidFill>
+              <a:srgbClr val="1C3A56"/>
+            </a:solidFill>
+          </a:ln>
+          <a:effectLst/>
+        </p:spPr>
+        <p:style>
+          <a:lnRef idx="1">
+            <a:schemeClr val="accent1"/>
+          </a:lnRef>
+          <a:fillRef idx="3">
+            <a:schemeClr val="accent1"/>
+          </a:fillRef>
+          <a:effectRef idx="2">
+            <a:schemeClr val="accent1"/>
+          </a:effectRef>
+          <a:fontRef idx="minor">
+            <a:schemeClr val="lt1"/>
+          </a:fontRef>
+        </p:style>
+        <p:txBody>
+          <a:bodyPr rtlCol="0" anchor="ctr"/>
+          <a:lstStyle/>
+          <a:p>
+            <a:pPr algn="ctr"/>
+          </a:p>
+        </p:txBody>
+      </p:sp>
+      <p:sp>
+        <p:nvSpPr>
+          <p:cNvPr id="13" name="TextBox 12"/>
+          <p:cNvSpPr txBox="1"/>
+          <p:nvPr/>
+        </p:nvSpPr>
+        <p:spPr>
+          <a:xfrm>
+            <a:off x="3461689" y="3547872"/>
+            <a:ext cx="2519857" cy="822960"/>
+          </a:xfrm>
+          <a:prstGeom prst="rect">
+            <a:avLst/>
+          </a:prstGeom>
+          <a:noFill/>
+        </p:spPr>
+        <p:txBody>
+          <a:bodyPr wrap="square" anchor="t" lIns="0" rIns="0" tIns="0" bIns="0">
+            <a:spAutoFit/>
+          </a:bodyPr>
+          <a:lstStyle/>
+          <a:p>
+            <a:pPr algn="ctr">
+              <a:lnSpc>
+                <a:spcPct val="100000"/>
+              </a:lnSpc>
+            </a:pPr>
+            <a:r>
+              <a:rPr sz="2400" b="1" i="0">
+                <a:solidFill>
+                  <a:srgbClr val="22C3E6"/>
+                </a:solidFill>
+                <a:latin typeface="Consolas"/>
+              </a:rPr>
+              <a:t>5 – 19 s</a:t>
+            </a:r>
+          </a:p>
+        </p:txBody>
+      </p:sp>
+      <p:sp>
+        <p:nvSpPr>
+          <p:cNvPr id="14" name="TextBox 13"/>
+          <p:cNvSpPr txBox="1"/>
+          <p:nvPr/>
+        </p:nvSpPr>
+        <p:spPr>
+          <a:xfrm>
+            <a:off x="3598849" y="4526280"/>
+            <a:ext cx="2245537" cy="502920"/>
+          </a:xfrm>
+          <a:prstGeom prst="rect">
+            <a:avLst/>
+          </a:prstGeom>
+          <a:noFill/>
+        </p:spPr>
+        <p:txBody>
+          <a:bodyPr wrap="square" anchor="t" lIns="0" rIns="0" tIns="0" bIns="0">
+            <a:spAutoFit/>
+          </a:bodyPr>
+          <a:lstStyle/>
+          <a:p>
+            <a:pPr algn="ctr">
+              <a:lnSpc>
+                <a:spcPct val="100000"/>
+              </a:lnSpc>
+            </a:pPr>
+            <a:r>
+              <a:rPr sz="1200" b="0" i="0">
+                <a:solidFill>
+                  <a:srgbClr val="93A6B8"/>
+                </a:solidFill>
+                <a:latin typeface="Segoe UI"/>
+              </a:rPr>
+              <a:t>até o RTK fixo</a:t>
+            </a:r>
+          </a:p>
+          <a:p>
+            <a:pPr algn="ctr">
+              <a:lnSpc>
+                <a:spcPct val="100000"/>
+              </a:lnSpc>
+            </a:pPr>
+            <a:r>
+              <a:rPr sz="1200" b="0" i="0">
+                <a:solidFill>
+                  <a:srgbClr val="93A6B8"/>
+                </a:solidFill>
+                <a:latin typeface="Segoe UI"/>
+              </a:rPr>
+              <a:t>com a base a 1,42 m</a:t>
+            </a:r>
+          </a:p>
+        </p:txBody>
+      </p:sp>
+      <p:sp>
+        <p:nvSpPr>
+          <p:cNvPr id="15" name="Rounded Rectangle 14"/>
+          <p:cNvSpPr/>
+          <p:nvPr/>
+        </p:nvSpPr>
+        <p:spPr>
+          <a:xfrm>
+            <a:off x="6210147" y="3291840"/>
+            <a:ext cx="2519857" cy="1828800"/>
+          </a:xfrm>
+          <a:prstGeom prst="roundRect">
+            <a:avLst>
+              <a:gd name="adj" fmla="val 7000"/>
+            </a:avLst>
+          </a:prstGeom>
+          <a:solidFill>
+            <a:srgbClr val="0D2138"/>
+          </a:solidFill>
+          <a:ln w="12700">
+            <a:solidFill>
+              <a:srgbClr val="1C3A56"/>
+            </a:solidFill>
+          </a:ln>
+          <a:effectLst/>
+        </p:spPr>
+        <p:style>
+          <a:lnRef idx="1">
+            <a:schemeClr val="accent1"/>
+          </a:lnRef>
+          <a:fillRef idx="3">
+            <a:schemeClr val="accent1"/>
+          </a:fillRef>
+          <a:effectRef idx="2">
+            <a:schemeClr val="accent1"/>
+          </a:effectRef>
+          <a:fontRef idx="minor">
+            <a:schemeClr val="lt1"/>
+          </a:fontRef>
+        </p:style>
+        <p:txBody>
+          <a:bodyPr rtlCol="0" anchor="ctr"/>
+          <a:lstStyle/>
+          <a:p>
+            <a:pPr algn="ctr"/>
+          </a:p>
+        </p:txBody>
+      </p:sp>
+      <p:sp>
+        <p:nvSpPr>
+          <p:cNvPr id="16" name="TextBox 15"/>
+          <p:cNvSpPr txBox="1"/>
+          <p:nvPr/>
+        </p:nvSpPr>
+        <p:spPr>
+          <a:xfrm>
+            <a:off x="6210147" y="3547872"/>
+            <a:ext cx="2519857" cy="822960"/>
+          </a:xfrm>
+          <a:prstGeom prst="rect">
+            <a:avLst/>
+          </a:prstGeom>
+          <a:noFill/>
+        </p:spPr>
+        <p:txBody>
+          <a:bodyPr wrap="square" anchor="t" lIns="0" rIns="0" tIns="0" bIns="0">
+            <a:spAutoFit/>
+          </a:bodyPr>
+          <a:lstStyle/>
+          <a:p>
+            <a:pPr algn="ctr">
+              <a:lnSpc>
+                <a:spcPct val="100000"/>
+              </a:lnSpc>
+            </a:pPr>
+            <a:r>
+              <a:rPr sz="2400" b="1" i="0">
+                <a:solidFill>
+                  <a:srgbClr val="22C3E6"/>
+                </a:solidFill>
+                <a:latin typeface="Consolas"/>
+              </a:rPr>
+              <a:t>10,4 ± 1,9 cm</a:t>
+            </a:r>
+          </a:p>
+        </p:txBody>
+      </p:sp>
+      <p:sp>
+        <p:nvSpPr>
+          <p:cNvPr id="17" name="TextBox 16"/>
+          <p:cNvSpPr txBox="1"/>
+          <p:nvPr/>
+        </p:nvSpPr>
+        <p:spPr>
+          <a:xfrm>
+            <a:off x="6347307" y="4526280"/>
+            <a:ext cx="2245537" cy="502920"/>
+          </a:xfrm>
+          <a:prstGeom prst="rect">
+            <a:avLst/>
+          </a:prstGeom>
+          <a:noFill/>
+        </p:spPr>
+        <p:txBody>
+          <a:bodyPr wrap="square" anchor="t" lIns="0" rIns="0" tIns="0" bIns="0">
+            <a:spAutoFit/>
+          </a:bodyPr>
+          <a:lstStyle/>
+          <a:p>
+            <a:pPr algn="ctr">
+              <a:lnSpc>
+                <a:spcPct val="100000"/>
+              </a:lnSpc>
+            </a:pPr>
+            <a:r>
+              <a:rPr sz="1200" b="0" i="0">
+                <a:solidFill>
+                  <a:srgbClr val="93A6B8"/>
+                </a:solidFill>
+                <a:latin typeface="Segoe UI"/>
+              </a:rPr>
+              <a:t>deslocamento medido</a:t>
+            </a:r>
+          </a:p>
+          <a:p>
+            <a:pPr algn="ctr">
+              <a:lnSpc>
+                <a:spcPct val="100000"/>
+              </a:lnSpc>
+            </a:pPr>
+            <a:r>
+              <a:rPr sz="1200" b="0" i="0">
+                <a:solidFill>
+                  <a:srgbClr val="93A6B8"/>
+                </a:solidFill>
+                <a:latin typeface="Segoe UI"/>
+              </a:rPr>
+              <a:t>contra ~14 cm anotados</a:t>
+            </a:r>
+          </a:p>
+        </p:txBody>
+      </p:sp>
+      <p:sp>
+        <p:nvSpPr>
+          <p:cNvPr id="18" name="Rounded Rectangle 17"/>
+          <p:cNvSpPr/>
+          <p:nvPr/>
+        </p:nvSpPr>
+        <p:spPr>
+          <a:xfrm>
+            <a:off x="8958605" y="3291840"/>
+            <a:ext cx="2519857" cy="1828800"/>
+          </a:xfrm>
+          <a:prstGeom prst="roundRect">
+            <a:avLst>
+              <a:gd name="adj" fmla="val 7000"/>
+            </a:avLst>
+          </a:prstGeom>
+          <a:solidFill>
+            <a:srgbClr val="0D2138"/>
+          </a:solidFill>
+          <a:ln w="12700">
+            <a:solidFill>
+              <a:srgbClr val="1C3A56"/>
+            </a:solidFill>
+          </a:ln>
+          <a:effectLst/>
+        </p:spPr>
+        <p:style>
+          <a:lnRef idx="1">
+            <a:schemeClr val="accent1"/>
+          </a:lnRef>
+          <a:fillRef idx="3">
+            <a:schemeClr val="accent1"/>
+          </a:fillRef>
+          <a:effectRef idx="2">
+            <a:schemeClr val="accent1"/>
+          </a:effectRef>
+          <a:fontRef idx="minor">
+            <a:schemeClr val="lt1"/>
+          </a:fontRef>
+        </p:style>
+        <p:txBody>
+          <a:bodyPr rtlCol="0" anchor="ctr"/>
+          <a:lstStyle/>
+          <a:p>
+            <a:pPr algn="ctr"/>
+          </a:p>
+        </p:txBody>
+      </p:sp>
+      <p:sp>
+        <p:nvSpPr>
+          <p:cNvPr id="19" name="TextBox 18"/>
+          <p:cNvSpPr txBox="1"/>
+          <p:nvPr/>
+        </p:nvSpPr>
+        <p:spPr>
+          <a:xfrm>
+            <a:off x="8958605" y="3547872"/>
+            <a:ext cx="2519857" cy="822960"/>
+          </a:xfrm>
+          <a:prstGeom prst="rect">
+            <a:avLst/>
+          </a:prstGeom>
+          <a:noFill/>
+        </p:spPr>
+        <p:txBody>
+          <a:bodyPr wrap="square" anchor="t" lIns="0" rIns="0" tIns="0" bIns="0">
+            <a:spAutoFit/>
+          </a:bodyPr>
+          <a:lstStyle/>
+          <a:p>
+            <a:pPr algn="ctr">
+              <a:lnSpc>
+                <a:spcPct val="100000"/>
+              </a:lnSpc>
+            </a:pPr>
+            <a:r>
+              <a:rPr sz="2400" b="1" i="0">
+                <a:solidFill>
+                  <a:srgbClr val="22C3E6"/>
+                </a:solidFill>
+                <a:latin typeface="Consolas"/>
+              </a:rPr>
+              <a:t>5 falhas</a:t>
+            </a:r>
+          </a:p>
+        </p:txBody>
+      </p:sp>
+      <p:sp>
+        <p:nvSpPr>
+          <p:cNvPr id="20" name="TextBox 19"/>
+          <p:cNvSpPr txBox="1"/>
+          <p:nvPr/>
+        </p:nvSpPr>
+        <p:spPr>
+          <a:xfrm>
+            <a:off x="9095765" y="4526280"/>
+            <a:ext cx="2245537" cy="502920"/>
+          </a:xfrm>
+          <a:prstGeom prst="rect">
+            <a:avLst/>
+          </a:prstGeom>
+          <a:noFill/>
+        </p:spPr>
+        <p:txBody>
+          <a:bodyPr wrap="square" anchor="t" lIns="0" rIns="0" tIns="0" bIns="0">
+            <a:spAutoFit/>
+          </a:bodyPr>
+          <a:lstStyle/>
+          <a:p>
+            <a:pPr algn="ctr">
+              <a:lnSpc>
+                <a:spcPct val="100000"/>
+              </a:lnSpc>
+            </a:pPr>
+            <a:r>
+              <a:rPr sz="1200" b="0" i="0">
+                <a:solidFill>
+                  <a:srgbClr val="93A6B8"/>
+                </a:solidFill>
+                <a:latin typeface="Segoe UI"/>
+              </a:rPr>
+              <a:t>documentadas e</a:t>
+            </a:r>
+          </a:p>
+          <a:p>
+            <a:pPr algn="ctr">
+              <a:lnSpc>
+                <a:spcPct val="100000"/>
+              </a:lnSpc>
+            </a:pPr>
+            <a:r>
+              <a:rPr sz="1200" b="0" i="0">
+                <a:solidFill>
+                  <a:srgbClr val="93A6B8"/>
+                </a:solidFill>
+                <a:latin typeface="Segoe UI"/>
+              </a:rPr>
+              <a:t>determinísticas</a:t>
+            </a:r>
+          </a:p>
+        </p:txBody>
+      </p:sp>
+      <p:sp>
+        <p:nvSpPr>
+          <p:cNvPr id="21" name="TextBox 20"/>
+          <p:cNvSpPr txBox="1"/>
+          <p:nvPr/>
+        </p:nvSpPr>
+        <p:spPr>
+          <a:xfrm>
+            <a:off x="713232" y="5532120"/>
+            <a:ext cx="10765231" cy="457200"/>
+          </a:xfrm>
+          <a:prstGeom prst="rect">
+            <a:avLst/>
+          </a:prstGeom>
+          <a:noFill/>
+        </p:spPr>
+        <p:txBody>
+          <a:bodyPr wrap="square" anchor="t" lIns="0" rIns="0" tIns="0" bIns="0">
+            <a:spAutoFit/>
+          </a:bodyPr>
+          <a:lstStyle/>
+          <a:p>
+            <a:pPr algn="ctr">
+              <a:lnSpc>
+                <a:spcPct val="100000"/>
+              </a:lnSpc>
+            </a:pPr>
+            <a:r>
+              <a:rPr sz="1500" b="1" i="1">
+                <a:solidFill>
+                  <a:srgbClr val="22C3E6"/>
+                </a:solidFill>
+                <a:latin typeface="Segoe UI"/>
+              </a:rPr>
+              <a:t>Os números de bancada valem sob as regras de comparabilidade; fora delas, a mesma montagem produz conclusões opostas.</a:t>
             </a:r>
           </a:p>
         </p:txBody>
@@ -17410,7 +19384,7 @@
                           </a:solidFill>
                           <a:latin typeface="Segoe UI"/>
                         </a:rPr>
-                        <a:t>X20P + correção por rede, RTK fixo</a:t>
+                        <a:t>X20P + PointPerfect (NTRIP), RTK fixo</a:t>
                       </a:r>
                     </a:p>
                   </a:txBody>
@@ -17925,7 +19899,7 @@
                 </a:solidFill>
                 <a:latin typeface="Segoe UI"/>
               </a:rPr>
-              <a:t>Base a 1,42 m: 5 e 19 s. Estação a 16,4 km: 197 s, e dois blocos sem fixar. Na janela obstruída, só depois de 5 min. </a:t>
+              <a:t>Base a 1,42 m: 5 e 19 s. PointPerfect por NTRIP (base virtual): 197 s, e dois blocos sem fixar. Na janela obstruída, só depois de 5 min. </a:t>
             </a:r>
             <a:r>
               <a:rPr sz="1400" b="1" i="0">
